--- a/сайт/практики/2 JavaScript для сайтов.pptx
+++ b/сайт/практики/2 JavaScript для сайтов.pptx
@@ -21,19 +21,21 @@
     <p:sldId id="277" r:id="rId15"/>
     <p:sldId id="279" r:id="rId16"/>
     <p:sldId id="278" r:id="rId17"/>
-    <p:sldId id="282" r:id="rId18"/>
-    <p:sldId id="286" r:id="rId19"/>
-    <p:sldId id="287" r:id="rId20"/>
-    <p:sldId id="283" r:id="rId21"/>
-    <p:sldId id="284" r:id="rId22"/>
-    <p:sldId id="285" r:id="rId23"/>
-    <p:sldId id="288" r:id="rId24"/>
-    <p:sldId id="289" r:id="rId25"/>
-    <p:sldId id="290" r:id="rId26"/>
-    <p:sldId id="291" r:id="rId27"/>
-    <p:sldId id="292" r:id="rId28"/>
-    <p:sldId id="293" r:id="rId29"/>
-    <p:sldId id="294" r:id="rId30"/>
+    <p:sldId id="295" r:id="rId18"/>
+    <p:sldId id="296" r:id="rId19"/>
+    <p:sldId id="282" r:id="rId20"/>
+    <p:sldId id="286" r:id="rId21"/>
+    <p:sldId id="287" r:id="rId22"/>
+    <p:sldId id="283" r:id="rId23"/>
+    <p:sldId id="284" r:id="rId24"/>
+    <p:sldId id="285" r:id="rId25"/>
+    <p:sldId id="288" r:id="rId26"/>
+    <p:sldId id="289" r:id="rId27"/>
+    <p:sldId id="290" r:id="rId28"/>
+    <p:sldId id="291" r:id="rId29"/>
+    <p:sldId id="292" r:id="rId30"/>
+    <p:sldId id="293" r:id="rId31"/>
+    <p:sldId id="294" r:id="rId32"/>
   </p:sldIdLst>
   <p:sldSz cx="9144000" cy="6858000" type="screen4x3"/>
   <p:notesSz cx="6858000" cy="9144000"/>
@@ -317,7 +319,7 @@
             <a:fld id="{0FF7147C-2AAC-473E-AD87-1A0FFEE67DAA}" type="datetimeFigureOut">
               <a:rPr lang="ru-RU" smtClean="0"/>
               <a:pPr/>
-              <a:t>21.08.2026</a:t>
+              <a:t>22.09.2026</a:t>
             </a:fld>
             <a:endParaRPr lang="ru-RU" dirty="0"/>
           </a:p>
@@ -484,7 +486,7 @@
             <a:fld id="{0FF7147C-2AAC-473E-AD87-1A0FFEE67DAA}" type="datetimeFigureOut">
               <a:rPr lang="ru-RU" smtClean="0"/>
               <a:pPr/>
-              <a:t>21.08.2026</a:t>
+              <a:t>22.09.2026</a:t>
             </a:fld>
             <a:endParaRPr lang="ru-RU" dirty="0"/>
           </a:p>
@@ -661,7 +663,7 @@
             <a:fld id="{0FF7147C-2AAC-473E-AD87-1A0FFEE67DAA}" type="datetimeFigureOut">
               <a:rPr lang="ru-RU" smtClean="0"/>
               <a:pPr/>
-              <a:t>21.08.2026</a:t>
+              <a:t>22.09.2026</a:t>
             </a:fld>
             <a:endParaRPr lang="ru-RU" dirty="0"/>
           </a:p>
@@ -828,7 +830,7 @@
             <a:fld id="{0FF7147C-2AAC-473E-AD87-1A0FFEE67DAA}" type="datetimeFigureOut">
               <a:rPr lang="ru-RU" smtClean="0"/>
               <a:pPr/>
-              <a:t>21.08.2026</a:t>
+              <a:t>22.09.2026</a:t>
             </a:fld>
             <a:endParaRPr lang="ru-RU" dirty="0"/>
           </a:p>
@@ -1071,7 +1073,7 @@
             <a:fld id="{0FF7147C-2AAC-473E-AD87-1A0FFEE67DAA}" type="datetimeFigureOut">
               <a:rPr lang="ru-RU" smtClean="0"/>
               <a:pPr/>
-              <a:t>21.08.2026</a:t>
+              <a:t>22.09.2026</a:t>
             </a:fld>
             <a:endParaRPr lang="ru-RU" dirty="0"/>
           </a:p>
@@ -1356,7 +1358,7 @@
             <a:fld id="{0FF7147C-2AAC-473E-AD87-1A0FFEE67DAA}" type="datetimeFigureOut">
               <a:rPr lang="ru-RU" smtClean="0"/>
               <a:pPr/>
-              <a:t>21.08.2026</a:t>
+              <a:t>22.09.2026</a:t>
             </a:fld>
             <a:endParaRPr lang="ru-RU" dirty="0"/>
           </a:p>
@@ -1775,7 +1777,7 @@
             <a:fld id="{0FF7147C-2AAC-473E-AD87-1A0FFEE67DAA}" type="datetimeFigureOut">
               <a:rPr lang="ru-RU" smtClean="0"/>
               <a:pPr/>
-              <a:t>21.08.2026</a:t>
+              <a:t>22.09.2026</a:t>
             </a:fld>
             <a:endParaRPr lang="ru-RU" dirty="0"/>
           </a:p>
@@ -1890,7 +1892,7 @@
             <a:fld id="{0FF7147C-2AAC-473E-AD87-1A0FFEE67DAA}" type="datetimeFigureOut">
               <a:rPr lang="ru-RU" smtClean="0"/>
               <a:pPr/>
-              <a:t>21.08.2026</a:t>
+              <a:t>22.09.2026</a:t>
             </a:fld>
             <a:endParaRPr lang="ru-RU" dirty="0"/>
           </a:p>
@@ -1982,7 +1984,7 @@
             <a:fld id="{0FF7147C-2AAC-473E-AD87-1A0FFEE67DAA}" type="datetimeFigureOut">
               <a:rPr lang="ru-RU" smtClean="0"/>
               <a:pPr/>
-              <a:t>21.08.2026</a:t>
+              <a:t>22.09.2026</a:t>
             </a:fld>
             <a:endParaRPr lang="ru-RU" dirty="0"/>
           </a:p>
@@ -2256,7 +2258,7 @@
             <a:fld id="{0FF7147C-2AAC-473E-AD87-1A0FFEE67DAA}" type="datetimeFigureOut">
               <a:rPr lang="ru-RU" smtClean="0"/>
               <a:pPr/>
-              <a:t>21.08.2026</a:t>
+              <a:t>22.09.2026</a:t>
             </a:fld>
             <a:endParaRPr lang="ru-RU" dirty="0"/>
           </a:p>
@@ -2506,7 +2508,7 @@
             <a:fld id="{0FF7147C-2AAC-473E-AD87-1A0FFEE67DAA}" type="datetimeFigureOut">
               <a:rPr lang="ru-RU" smtClean="0"/>
               <a:pPr/>
-              <a:t>21.08.2026</a:t>
+              <a:t>22.09.2026</a:t>
             </a:fld>
             <a:endParaRPr lang="ru-RU" dirty="0"/>
           </a:p>
@@ -2716,7 +2718,7 @@
             <a:fld id="{0FF7147C-2AAC-473E-AD87-1A0FFEE67DAA}" type="datetimeFigureOut">
               <a:rPr lang="ru-RU" smtClean="0"/>
               <a:pPr/>
-              <a:t>21.08.2026</a:t>
+              <a:t>22.09.2026</a:t>
             </a:fld>
             <a:endParaRPr lang="ru-RU" dirty="0"/>
           </a:p>
@@ -3871,11 +3873,7 @@
           <a:p>
             <a:r>
               <a:rPr lang="ru-RU" dirty="0" smtClean="0"/>
-              <a:t>Задание 2</a:t>
-            </a:r>
-            <a:r>
-              <a:rPr lang="ru-RU" dirty="0" smtClean="0"/>
-              <a:t>. Создание собственных </a:t>
+              <a:t>Задание 2. Создание собственных </a:t>
             </a:r>
             <a:r>
               <a:rPr lang="ru-RU" dirty="0" err="1" smtClean="0"/>
@@ -5026,40 +5024,532 @@
       </p:grpSpPr>
       <p:sp>
         <p:nvSpPr>
-          <p:cNvPr id="2" name="Заголовок 1"/>
-          <p:cNvSpPr>
-            <a:spLocks noGrp="1"/>
-          </p:cNvSpPr>
-          <p:nvPr>
-            <p:ph type="title"/>
-          </p:nvPr>
+          <p:cNvPr id="2" name="Прямоугольник 1"/>
+          <p:cNvSpPr/>
+          <p:nvPr/>
         </p:nvSpPr>
         <p:spPr>
           <a:xfrm>
-            <a:off x="285720" y="2571744"/>
-            <a:ext cx="8229600" cy="1143000"/>
-          </a:xfrm>
-        </p:spPr>
-        <p:txBody>
-          <a:bodyPr/>
+            <a:off x="0" y="0"/>
+            <a:ext cx="9144000" cy="5693866"/>
+          </a:xfrm>
+          <a:prstGeom prst="rect">
+            <a:avLst/>
+          </a:prstGeom>
+        </p:spPr>
+        <p:txBody>
+          <a:bodyPr wrap="square">
+            <a:spAutoFit/>
+          </a:bodyPr>
           <a:lstStyle/>
           <a:p>
-            <a:r>
-              <a:rPr lang="ru-RU" dirty="0" smtClean="0"/>
-              <a:t>Задание 3</a:t>
-            </a:r>
-            <a:r>
-              <a:rPr lang="ru-RU" dirty="0" smtClean="0"/>
-              <a:t>. Работа с </a:t>
-            </a:r>
-            <a:r>
-              <a:rPr lang="ru-RU" dirty="0" err="1" smtClean="0"/>
-              <a:t>плагинами</a:t>
-            </a:r>
-            <a:endParaRPr lang="ru-RU" dirty="0"/>
-          </a:p>
-        </p:txBody>
-      </p:sp>
+            <a:pPr algn="just"/>
+            <a:r>
+              <a:rPr lang="en-US" sz="1400" dirty="0" smtClean="0">
+                <a:latin typeface="Courier New" pitchFamily="49" charset="0"/>
+                <a:cs typeface="Courier New" pitchFamily="49" charset="0"/>
+              </a:rPr>
+              <a:t>&lt;body&gt;</a:t>
+            </a:r>
+          </a:p>
+          <a:p>
+            <a:pPr algn="just"/>
+            <a:endParaRPr lang="en-US" sz="1400" dirty="0" smtClean="0">
+              <a:latin typeface="Courier New" pitchFamily="49" charset="0"/>
+              <a:cs typeface="Courier New" pitchFamily="49" charset="0"/>
+            </a:endParaRPr>
+          </a:p>
+          <a:p>
+            <a:pPr algn="just"/>
+            <a:r>
+              <a:rPr lang="en-US" sz="1400" dirty="0" smtClean="0">
+                <a:latin typeface="Courier New" pitchFamily="49" charset="0"/>
+                <a:cs typeface="Courier New" pitchFamily="49" charset="0"/>
+              </a:rPr>
+              <a:t>&lt;div class="container"&gt;</a:t>
+            </a:r>
+          </a:p>
+          <a:p>
+            <a:pPr algn="just"/>
+            <a:r>
+              <a:rPr lang="en-US" sz="1400" dirty="0" smtClean="0">
+                <a:latin typeface="Courier New" pitchFamily="49" charset="0"/>
+                <a:cs typeface="Courier New" pitchFamily="49" charset="0"/>
+              </a:rPr>
+              <a:t>    &lt;h2&gt;</a:t>
+            </a:r>
+            <a:r>
+              <a:rPr lang="ru-RU" sz="1400" dirty="0" smtClean="0">
+                <a:latin typeface="Courier New" pitchFamily="49" charset="0"/>
+                <a:cs typeface="Courier New" pitchFamily="49" charset="0"/>
+              </a:rPr>
+              <a:t>Какое это животное?&lt;/</a:t>
+            </a:r>
+            <a:r>
+              <a:rPr lang="en-US" sz="1400" dirty="0" smtClean="0">
+                <a:latin typeface="Courier New" pitchFamily="49" charset="0"/>
+                <a:cs typeface="Courier New" pitchFamily="49" charset="0"/>
+              </a:rPr>
+              <a:t>h2&gt;</a:t>
+            </a:r>
+          </a:p>
+          <a:p>
+            <a:pPr algn="just"/>
+            <a:r>
+              <a:rPr lang="en-US" sz="1400" dirty="0" smtClean="0">
+                <a:latin typeface="Courier New" pitchFamily="49" charset="0"/>
+                <a:cs typeface="Courier New" pitchFamily="49" charset="0"/>
+              </a:rPr>
+              <a:t>    </a:t>
+            </a:r>
+          </a:p>
+          <a:p>
+            <a:pPr algn="just"/>
+            <a:r>
+              <a:rPr lang="en-US" sz="1400" dirty="0" smtClean="0">
+                <a:latin typeface="Courier New" pitchFamily="49" charset="0"/>
+                <a:cs typeface="Courier New" pitchFamily="49" charset="0"/>
+              </a:rPr>
+              <a:t>    &lt;div class="frame"&gt;</a:t>
+            </a:r>
+          </a:p>
+          <a:p>
+            <a:pPr algn="just"/>
+            <a:r>
+              <a:rPr lang="en-US" sz="1400" dirty="0" smtClean="0">
+                <a:latin typeface="Courier New" pitchFamily="49" charset="0"/>
+                <a:cs typeface="Courier New" pitchFamily="49" charset="0"/>
+              </a:rPr>
+              <a:t>        &lt;</a:t>
+            </a:r>
+            <a:r>
+              <a:rPr lang="en-US" sz="1400" dirty="0" err="1" smtClean="0">
+                <a:latin typeface="Courier New" pitchFamily="49" charset="0"/>
+                <a:cs typeface="Courier New" pitchFamily="49" charset="0"/>
+              </a:rPr>
+              <a:t>img</a:t>
+            </a:r>
+            <a:r>
+              <a:rPr lang="en-US" sz="1400" dirty="0" smtClean="0">
+                <a:latin typeface="Courier New" pitchFamily="49" charset="0"/>
+                <a:cs typeface="Courier New" pitchFamily="49" charset="0"/>
+              </a:rPr>
+              <a:t> </a:t>
+            </a:r>
+            <a:r>
+              <a:rPr lang="en-US" sz="1400" dirty="0" err="1" smtClean="0">
+                <a:latin typeface="Courier New" pitchFamily="49" charset="0"/>
+                <a:cs typeface="Courier New" pitchFamily="49" charset="0"/>
+              </a:rPr>
+              <a:t>src</a:t>
+            </a:r>
+            <a:r>
+              <a:rPr lang="en-US" sz="1400" dirty="0" smtClean="0">
+                <a:latin typeface="Courier New" pitchFamily="49" charset="0"/>
+                <a:cs typeface="Courier New" pitchFamily="49" charset="0"/>
+              </a:rPr>
+              <a:t>="https://upload.wikimedia.org/wikipedia/commons/thumb/b/b5/Lion_d%27Afrique.jpg/500px-Lion_d%27Afrique.jpg" alt="</a:t>
+            </a:r>
+            <a:r>
+              <a:rPr lang="ru-RU" sz="1400" dirty="0" smtClean="0">
+                <a:latin typeface="Courier New" pitchFamily="49" charset="0"/>
+                <a:cs typeface="Courier New" pitchFamily="49" charset="0"/>
+              </a:rPr>
+              <a:t>Лев"&gt;</a:t>
+            </a:r>
+          </a:p>
+          <a:p>
+            <a:pPr algn="just"/>
+            <a:r>
+              <a:rPr lang="ru-RU" sz="1400" dirty="0" smtClean="0">
+                <a:latin typeface="Courier New" pitchFamily="49" charset="0"/>
+                <a:cs typeface="Courier New" pitchFamily="49" charset="0"/>
+              </a:rPr>
+              <a:t>    &lt;/</a:t>
+            </a:r>
+            <a:r>
+              <a:rPr lang="en-US" sz="1400" dirty="0" smtClean="0">
+                <a:latin typeface="Courier New" pitchFamily="49" charset="0"/>
+                <a:cs typeface="Courier New" pitchFamily="49" charset="0"/>
+              </a:rPr>
+              <a:t>div&gt;</a:t>
+            </a:r>
+          </a:p>
+          <a:p>
+            <a:pPr algn="just"/>
+            <a:endParaRPr lang="en-US" sz="1400" dirty="0" smtClean="0">
+              <a:latin typeface="Courier New" pitchFamily="49" charset="0"/>
+              <a:cs typeface="Courier New" pitchFamily="49" charset="0"/>
+            </a:endParaRPr>
+          </a:p>
+          <a:p>
+            <a:pPr algn="just"/>
+            <a:r>
+              <a:rPr lang="en-US" sz="1400" dirty="0" smtClean="0">
+                <a:latin typeface="Courier New" pitchFamily="49" charset="0"/>
+                <a:cs typeface="Courier New" pitchFamily="49" charset="0"/>
+              </a:rPr>
+              <a:t>    &lt;button </a:t>
+            </a:r>
+            <a:r>
+              <a:rPr lang="en-US" sz="1400" dirty="0" err="1" smtClean="0">
+                <a:latin typeface="Courier New" pitchFamily="49" charset="0"/>
+                <a:cs typeface="Courier New" pitchFamily="49" charset="0"/>
+              </a:rPr>
+              <a:t>onclick</a:t>
+            </a:r>
+            <a:r>
+              <a:rPr lang="en-US" sz="1400" dirty="0" smtClean="0">
+                <a:latin typeface="Courier New" pitchFamily="49" charset="0"/>
+                <a:cs typeface="Courier New" pitchFamily="49" charset="0"/>
+              </a:rPr>
+              <a:t>="</a:t>
+            </a:r>
+            <a:r>
+              <a:rPr lang="en-US" sz="1400" dirty="0" err="1" smtClean="0">
+                <a:latin typeface="Courier New" pitchFamily="49" charset="0"/>
+                <a:cs typeface="Courier New" pitchFamily="49" charset="0"/>
+              </a:rPr>
+              <a:t>checkAnswer</a:t>
+            </a:r>
+            <a:r>
+              <a:rPr lang="en-US" sz="1400" dirty="0" smtClean="0">
+                <a:latin typeface="Courier New" pitchFamily="49" charset="0"/>
+                <a:cs typeface="Courier New" pitchFamily="49" charset="0"/>
+              </a:rPr>
+              <a:t>('</a:t>
+            </a:r>
+            <a:r>
+              <a:rPr lang="ru-RU" sz="1400" dirty="0" smtClean="0">
+                <a:latin typeface="Courier New" pitchFamily="49" charset="0"/>
+                <a:cs typeface="Courier New" pitchFamily="49" charset="0"/>
+              </a:rPr>
+              <a:t>тигр')"&gt;Это тигр!&lt;/</a:t>
+            </a:r>
+            <a:r>
+              <a:rPr lang="en-US" sz="1400" dirty="0" smtClean="0">
+                <a:latin typeface="Courier New" pitchFamily="49" charset="0"/>
+                <a:cs typeface="Courier New" pitchFamily="49" charset="0"/>
+              </a:rPr>
+              <a:t>button&gt;</a:t>
+            </a:r>
+          </a:p>
+          <a:p>
+            <a:pPr algn="just"/>
+            <a:r>
+              <a:rPr lang="en-US" sz="1400" dirty="0" smtClean="0">
+                <a:latin typeface="Courier New" pitchFamily="49" charset="0"/>
+                <a:cs typeface="Courier New" pitchFamily="49" charset="0"/>
+              </a:rPr>
+              <a:t>    &lt;button </a:t>
+            </a:r>
+            <a:r>
+              <a:rPr lang="en-US" sz="1400" dirty="0" err="1" smtClean="0">
+                <a:latin typeface="Courier New" pitchFamily="49" charset="0"/>
+                <a:cs typeface="Courier New" pitchFamily="49" charset="0"/>
+              </a:rPr>
+              <a:t>onclick</a:t>
+            </a:r>
+            <a:r>
+              <a:rPr lang="en-US" sz="1400" dirty="0" smtClean="0">
+                <a:latin typeface="Courier New" pitchFamily="49" charset="0"/>
+                <a:cs typeface="Courier New" pitchFamily="49" charset="0"/>
+              </a:rPr>
+              <a:t>="</a:t>
+            </a:r>
+            <a:r>
+              <a:rPr lang="en-US" sz="1400" dirty="0" err="1" smtClean="0">
+                <a:latin typeface="Courier New" pitchFamily="49" charset="0"/>
+                <a:cs typeface="Courier New" pitchFamily="49" charset="0"/>
+              </a:rPr>
+              <a:t>checkAnswer</a:t>
+            </a:r>
+            <a:r>
+              <a:rPr lang="en-US" sz="1400" dirty="0" smtClean="0">
+                <a:latin typeface="Courier New" pitchFamily="49" charset="0"/>
+                <a:cs typeface="Courier New" pitchFamily="49" charset="0"/>
+              </a:rPr>
+              <a:t>('</a:t>
+            </a:r>
+            <a:r>
+              <a:rPr lang="ru-RU" sz="1400" dirty="0" smtClean="0">
+                <a:latin typeface="Courier New" pitchFamily="49" charset="0"/>
+                <a:cs typeface="Courier New" pitchFamily="49" charset="0"/>
+              </a:rPr>
+              <a:t>лев')"&gt;Это лев!&lt;/</a:t>
+            </a:r>
+            <a:r>
+              <a:rPr lang="en-US" sz="1400" dirty="0" smtClean="0">
+                <a:latin typeface="Courier New" pitchFamily="49" charset="0"/>
+                <a:cs typeface="Courier New" pitchFamily="49" charset="0"/>
+              </a:rPr>
+              <a:t>button&gt;</a:t>
+            </a:r>
+          </a:p>
+          <a:p>
+            <a:pPr algn="just"/>
+            <a:r>
+              <a:rPr lang="en-US" sz="1400" dirty="0" smtClean="0">
+                <a:latin typeface="Courier New" pitchFamily="49" charset="0"/>
+                <a:cs typeface="Courier New" pitchFamily="49" charset="0"/>
+              </a:rPr>
+              <a:t>    &lt;button </a:t>
+            </a:r>
+            <a:r>
+              <a:rPr lang="en-US" sz="1400" dirty="0" err="1" smtClean="0">
+                <a:latin typeface="Courier New" pitchFamily="49" charset="0"/>
+                <a:cs typeface="Courier New" pitchFamily="49" charset="0"/>
+              </a:rPr>
+              <a:t>onclick</a:t>
+            </a:r>
+            <a:r>
+              <a:rPr lang="en-US" sz="1400" dirty="0" smtClean="0">
+                <a:latin typeface="Courier New" pitchFamily="49" charset="0"/>
+                <a:cs typeface="Courier New" pitchFamily="49" charset="0"/>
+              </a:rPr>
+              <a:t>="</a:t>
+            </a:r>
+            <a:r>
+              <a:rPr lang="en-US" sz="1400" dirty="0" err="1" smtClean="0">
+                <a:latin typeface="Courier New" pitchFamily="49" charset="0"/>
+                <a:cs typeface="Courier New" pitchFamily="49" charset="0"/>
+              </a:rPr>
+              <a:t>checkAnswer</a:t>
+            </a:r>
+            <a:r>
+              <a:rPr lang="en-US" sz="1400" dirty="0" smtClean="0">
+                <a:latin typeface="Courier New" pitchFamily="49" charset="0"/>
+                <a:cs typeface="Courier New" pitchFamily="49" charset="0"/>
+              </a:rPr>
+              <a:t>('</a:t>
+            </a:r>
+            <a:r>
+              <a:rPr lang="ru-RU" sz="1400" dirty="0" smtClean="0">
+                <a:latin typeface="Courier New" pitchFamily="49" charset="0"/>
+                <a:cs typeface="Courier New" pitchFamily="49" charset="0"/>
+              </a:rPr>
+              <a:t>гепард')"&gt;Это гепард!&lt;/</a:t>
+            </a:r>
+            <a:r>
+              <a:rPr lang="en-US" sz="1400" dirty="0" smtClean="0">
+                <a:latin typeface="Courier New" pitchFamily="49" charset="0"/>
+                <a:cs typeface="Courier New" pitchFamily="49" charset="0"/>
+              </a:rPr>
+              <a:t>button&gt;</a:t>
+            </a:r>
+          </a:p>
+          <a:p>
+            <a:pPr algn="just"/>
+            <a:r>
+              <a:rPr lang="en-US" sz="1400" dirty="0" smtClean="0">
+                <a:latin typeface="Courier New" pitchFamily="49" charset="0"/>
+                <a:cs typeface="Courier New" pitchFamily="49" charset="0"/>
+              </a:rPr>
+              <a:t>&lt;/div&gt;</a:t>
+            </a:r>
+          </a:p>
+          <a:p>
+            <a:pPr algn="just"/>
+            <a:endParaRPr lang="en-US" sz="1400" dirty="0" smtClean="0">
+              <a:latin typeface="Courier New" pitchFamily="49" charset="0"/>
+              <a:cs typeface="Courier New" pitchFamily="49" charset="0"/>
+            </a:endParaRPr>
+          </a:p>
+          <a:p>
+            <a:pPr algn="just"/>
+            <a:r>
+              <a:rPr lang="en-US" sz="1400" dirty="0" smtClean="0">
+                <a:latin typeface="Courier New" pitchFamily="49" charset="0"/>
+                <a:cs typeface="Courier New" pitchFamily="49" charset="0"/>
+              </a:rPr>
+              <a:t>&lt;script&gt;</a:t>
+            </a:r>
+          </a:p>
+          <a:p>
+            <a:pPr algn="just"/>
+            <a:r>
+              <a:rPr lang="en-US" sz="1400" dirty="0" smtClean="0">
+                <a:latin typeface="Courier New" pitchFamily="49" charset="0"/>
+                <a:cs typeface="Courier New" pitchFamily="49" charset="0"/>
+              </a:rPr>
+              <a:t>    function </a:t>
+            </a:r>
+            <a:r>
+              <a:rPr lang="en-US" sz="1400" dirty="0" err="1" smtClean="0">
+                <a:latin typeface="Courier New" pitchFamily="49" charset="0"/>
+                <a:cs typeface="Courier New" pitchFamily="49" charset="0"/>
+              </a:rPr>
+              <a:t>checkAnswer</a:t>
+            </a:r>
+            <a:r>
+              <a:rPr lang="en-US" sz="1400" dirty="0" smtClean="0">
+                <a:latin typeface="Courier New" pitchFamily="49" charset="0"/>
+                <a:cs typeface="Courier New" pitchFamily="49" charset="0"/>
+              </a:rPr>
+              <a:t>(selected) {</a:t>
+            </a:r>
+          </a:p>
+          <a:p>
+            <a:pPr algn="just"/>
+            <a:r>
+              <a:rPr lang="en-US" sz="1400" dirty="0" smtClean="0">
+                <a:latin typeface="Courier New" pitchFamily="49" charset="0"/>
+                <a:cs typeface="Courier New" pitchFamily="49" charset="0"/>
+              </a:rPr>
+              <a:t>        if (selected === '</a:t>
+            </a:r>
+            <a:r>
+              <a:rPr lang="ru-RU" sz="1400" dirty="0" smtClean="0">
+                <a:latin typeface="Courier New" pitchFamily="49" charset="0"/>
+                <a:cs typeface="Courier New" pitchFamily="49" charset="0"/>
+              </a:rPr>
+              <a:t>лев') {</a:t>
+            </a:r>
+          </a:p>
+          <a:p>
+            <a:pPr algn="just"/>
+            <a:r>
+              <a:rPr lang="ru-RU" sz="1400" dirty="0" smtClean="0">
+                <a:latin typeface="Courier New" pitchFamily="49" charset="0"/>
+                <a:cs typeface="Courier New" pitchFamily="49" charset="0"/>
+              </a:rPr>
+              <a:t>            </a:t>
+            </a:r>
+            <a:r>
+              <a:rPr lang="en-US" sz="1400" dirty="0" smtClean="0">
+                <a:latin typeface="Courier New" pitchFamily="49" charset="0"/>
+                <a:cs typeface="Courier New" pitchFamily="49" charset="0"/>
+              </a:rPr>
+              <a:t>alert('</a:t>
+            </a:r>
+            <a:r>
+              <a:rPr lang="ru-RU" sz="1400" dirty="0" smtClean="0">
+                <a:latin typeface="Courier New" pitchFamily="49" charset="0"/>
+                <a:cs typeface="Courier New" pitchFamily="49" charset="0"/>
+              </a:rPr>
+              <a:t>Да, это ЛЕВ - ЦАРЬ ЗВЕРЕЙ!');</a:t>
+            </a:r>
+          </a:p>
+          <a:p>
+            <a:pPr algn="just"/>
+            <a:r>
+              <a:rPr lang="ru-RU" sz="1400" dirty="0" smtClean="0">
+                <a:latin typeface="Courier New" pitchFamily="49" charset="0"/>
+                <a:cs typeface="Courier New" pitchFamily="49" charset="0"/>
+              </a:rPr>
+              <a:t>        } </a:t>
+            </a:r>
+            <a:r>
+              <a:rPr lang="en-US" sz="1400" dirty="0" smtClean="0">
+                <a:latin typeface="Courier New" pitchFamily="49" charset="0"/>
+                <a:cs typeface="Courier New" pitchFamily="49" charset="0"/>
+              </a:rPr>
+              <a:t>else {</a:t>
+            </a:r>
+          </a:p>
+          <a:p>
+            <a:pPr algn="just"/>
+            <a:r>
+              <a:rPr lang="en-US" sz="1400" dirty="0" smtClean="0">
+                <a:latin typeface="Courier New" pitchFamily="49" charset="0"/>
+                <a:cs typeface="Courier New" pitchFamily="49" charset="0"/>
+              </a:rPr>
+              <a:t>            alert('</a:t>
+            </a:r>
+            <a:r>
+              <a:rPr lang="ru-RU" sz="1400" dirty="0" smtClean="0">
+                <a:latin typeface="Courier New" pitchFamily="49" charset="0"/>
+                <a:cs typeface="Courier New" pitchFamily="49" charset="0"/>
+              </a:rPr>
+              <a:t>Попробуйте еще раз!');</a:t>
+            </a:r>
+          </a:p>
+          <a:p>
+            <a:pPr algn="just"/>
+            <a:r>
+              <a:rPr lang="ru-RU" sz="1400" dirty="0" smtClean="0">
+                <a:latin typeface="Courier New" pitchFamily="49" charset="0"/>
+                <a:cs typeface="Courier New" pitchFamily="49" charset="0"/>
+              </a:rPr>
+              <a:t>        }</a:t>
+            </a:r>
+          </a:p>
+          <a:p>
+            <a:pPr algn="just"/>
+            <a:r>
+              <a:rPr lang="ru-RU" sz="1400" dirty="0" smtClean="0">
+                <a:latin typeface="Courier New" pitchFamily="49" charset="0"/>
+                <a:cs typeface="Courier New" pitchFamily="49" charset="0"/>
+              </a:rPr>
+              <a:t>    }</a:t>
+            </a:r>
+          </a:p>
+          <a:p>
+            <a:pPr algn="just"/>
+            <a:r>
+              <a:rPr lang="ru-RU" sz="1400" dirty="0" smtClean="0">
+                <a:latin typeface="Courier New" pitchFamily="49" charset="0"/>
+                <a:cs typeface="Courier New" pitchFamily="49" charset="0"/>
+              </a:rPr>
+              <a:t>&lt;/</a:t>
+            </a:r>
+            <a:r>
+              <a:rPr lang="en-US" sz="1400" dirty="0" smtClean="0">
+                <a:latin typeface="Courier New" pitchFamily="49" charset="0"/>
+                <a:cs typeface="Courier New" pitchFamily="49" charset="0"/>
+              </a:rPr>
+              <a:t>script&gt;</a:t>
+            </a:r>
+          </a:p>
+          <a:p>
+            <a:pPr algn="just"/>
+            <a:r>
+              <a:rPr lang="en-US" sz="1400" dirty="0" smtClean="0">
+                <a:latin typeface="Courier New" pitchFamily="49" charset="0"/>
+                <a:cs typeface="Courier New" pitchFamily="49" charset="0"/>
+              </a:rPr>
+              <a:t>&lt;/body&gt;</a:t>
+            </a:r>
+            <a:endParaRPr lang="ru-RU" sz="1400" dirty="0">
+              <a:latin typeface="Courier New" pitchFamily="49" charset="0"/>
+              <a:cs typeface="Courier New" pitchFamily="49" charset="0"/>
+            </a:endParaRPr>
+          </a:p>
+        </p:txBody>
+      </p:sp>
+      <p:pic>
+        <p:nvPicPr>
+          <p:cNvPr id="1026" name="Picture 2"/>
+          <p:cNvPicPr>
+            <a:picLocks noChangeAspect="1" noChangeArrowheads="1"/>
+          </p:cNvPicPr>
+          <p:nvPr/>
+        </p:nvPicPr>
+        <p:blipFill>
+          <a:blip r:embed="rId2"/>
+          <a:srcRect/>
+          <a:stretch>
+            <a:fillRect/>
+          </a:stretch>
+        </p:blipFill>
+        <p:spPr bwMode="auto">
+          <a:xfrm>
+            <a:off x="6832010" y="3214686"/>
+            <a:ext cx="2311989" cy="3643314"/>
+          </a:xfrm>
+          <a:prstGeom prst="rect">
+            <a:avLst/>
+          </a:prstGeom>
+          <a:noFill/>
+          <a:ln w="9525">
+            <a:noFill/>
+            <a:miter lim="800000"/>
+            <a:headEnd/>
+            <a:tailEnd/>
+          </a:ln>
+          <a:effectLst/>
+        </p:spPr>
+      </p:pic>
     </p:spTree>
   </p:cSld>
   <p:clrMapOvr>
@@ -5087,49 +5577,18 @@
       </p:grpSpPr>
       <p:sp>
         <p:nvSpPr>
-          <p:cNvPr id="2" name="Заголовок 1"/>
-          <p:cNvSpPr>
-            <a:spLocks noGrp="1"/>
-          </p:cNvSpPr>
-          <p:nvPr>
-            <p:ph type="title"/>
-          </p:nvPr>
+          <p:cNvPr id="2" name="Прямоугольник 1"/>
+          <p:cNvSpPr/>
+          <p:nvPr/>
         </p:nvSpPr>
         <p:spPr>
           <a:xfrm>
-            <a:off x="500034" y="0"/>
-            <a:ext cx="8229600" cy="1143000"/>
-          </a:xfrm>
-        </p:spPr>
-        <p:txBody>
-          <a:bodyPr/>
-          <a:lstStyle/>
-          <a:p>
-            <a:r>
-              <a:rPr lang="ru-RU" b="1" dirty="0" smtClean="0"/>
-              <a:t>Дополнительные материалы</a:t>
-            </a:r>
-            <a:endParaRPr lang="ru-RU" b="1" dirty="0"/>
-          </a:p>
-        </p:txBody>
-      </p:sp>
-      <p:sp>
-        <p:nvSpPr>
-          <p:cNvPr id="4" name="Прямоугольник 3"/>
-          <p:cNvSpPr/>
-          <p:nvPr/>
-        </p:nvSpPr>
-        <p:spPr>
-          <a:xfrm>
-            <a:off x="0" y="1285860"/>
-            <a:ext cx="9144000" cy="4524315"/>
+            <a:off x="0" y="0"/>
+            <a:ext cx="9144000" cy="3539430"/>
           </a:xfrm>
           <a:prstGeom prst="rect">
             <a:avLst/>
           </a:prstGeom>
-          <a:ln>
-            <a:noFill/>
-          </a:ln>
         </p:spPr>
         <p:txBody>
           <a:bodyPr wrap="square">
@@ -5139,123 +5598,318 @@
           <a:p>
             <a:pPr algn="just"/>
             <a:r>
-              <a:rPr lang="ru-RU" sz="2400" b="1" i="1" dirty="0" err="1" smtClean="0">
-                <a:latin typeface="Cambria" pitchFamily="18" charset="0"/>
-              </a:rPr>
-              <a:t>jQuery</a:t>
-            </a:r>
-            <a:r>
-              <a:rPr lang="ru-RU" sz="2400" b="1" i="1" dirty="0" smtClean="0">
-                <a:latin typeface="Cambria" pitchFamily="18" charset="0"/>
-              </a:rPr>
-              <a:t> </a:t>
-            </a:r>
-            <a:r>
-              <a:rPr lang="ru-RU" sz="2400" b="1" i="1" dirty="0" err="1" smtClean="0">
-                <a:latin typeface="Cambria" pitchFamily="18" charset="0"/>
-              </a:rPr>
-              <a:t>плагины</a:t>
-            </a:r>
-            <a:r>
-              <a:rPr lang="ru-RU" sz="2400" b="1" i="1" dirty="0" smtClean="0">
-                <a:latin typeface="Cambria" pitchFamily="18" charset="0"/>
-              </a:rPr>
-              <a:t> и расширения — как использовать и создавать свои</a:t>
-            </a:r>
-          </a:p>
-          <a:p>
-            <a:pPr algn="just"/>
-            <a:r>
-              <a:rPr lang="en-US" sz="2400" dirty="0" smtClean="0">
-                <a:latin typeface="Cambria" pitchFamily="18" charset="0"/>
-                <a:hlinkClick r:id="rId2"/>
-              </a:rPr>
-              <a:t>https://xtalk.pro/articles/153/urok-11-jquery-plaginy-i-rasshireniya-kak-ispolzovat-i-sozdavat-svoi</a:t>
-            </a:r>
-            <a:endParaRPr lang="ru-RU" sz="2400" dirty="0" smtClean="0">
-              <a:latin typeface="Cambria" pitchFamily="18" charset="0"/>
+              <a:rPr lang="en-US" sz="1400" dirty="0" smtClean="0">
+                <a:latin typeface="Courier New" pitchFamily="49" charset="0"/>
+                <a:cs typeface="Courier New" pitchFamily="49" charset="0"/>
+              </a:rPr>
+              <a:t>&lt;html&gt;</a:t>
+            </a:r>
+          </a:p>
+          <a:p>
+            <a:pPr algn="just"/>
+            <a:r>
+              <a:rPr lang="en-US" sz="1400" dirty="0" smtClean="0">
+                <a:latin typeface="Courier New" pitchFamily="49" charset="0"/>
+                <a:cs typeface="Courier New" pitchFamily="49" charset="0"/>
+              </a:rPr>
+              <a:t>&lt;head&gt;</a:t>
+            </a:r>
+          </a:p>
+          <a:p>
+            <a:pPr algn="just"/>
+            <a:r>
+              <a:rPr lang="en-US" sz="1400" dirty="0" smtClean="0">
+                <a:latin typeface="Courier New" pitchFamily="49" charset="0"/>
+                <a:cs typeface="Courier New" pitchFamily="49" charset="0"/>
+              </a:rPr>
+              <a:t>    &lt;title&gt;</a:t>
+            </a:r>
+            <a:r>
+              <a:rPr lang="ru-RU" sz="1400" dirty="0" smtClean="0">
+                <a:latin typeface="Courier New" pitchFamily="49" charset="0"/>
+                <a:cs typeface="Courier New" pitchFamily="49" charset="0"/>
+              </a:rPr>
+              <a:t>Приветствие&lt;/</a:t>
+            </a:r>
+            <a:r>
+              <a:rPr lang="en-US" sz="1400" dirty="0" smtClean="0">
+                <a:latin typeface="Courier New" pitchFamily="49" charset="0"/>
+                <a:cs typeface="Courier New" pitchFamily="49" charset="0"/>
+              </a:rPr>
+              <a:t>title&gt;</a:t>
+            </a:r>
+          </a:p>
+          <a:p>
+            <a:pPr algn="just"/>
+            <a:r>
+              <a:rPr lang="en-US" sz="1400" dirty="0" smtClean="0">
+                <a:latin typeface="Courier New" pitchFamily="49" charset="0"/>
+                <a:cs typeface="Courier New" pitchFamily="49" charset="0"/>
+              </a:rPr>
+              <a:t>&lt;/head&gt;</a:t>
+            </a:r>
+          </a:p>
+          <a:p>
+            <a:pPr algn="just"/>
+            <a:r>
+              <a:rPr lang="en-US" sz="1400" dirty="0" smtClean="0">
+                <a:latin typeface="Courier New" pitchFamily="49" charset="0"/>
+                <a:cs typeface="Courier New" pitchFamily="49" charset="0"/>
+              </a:rPr>
+              <a:t>&lt;body&gt;</a:t>
+            </a:r>
+          </a:p>
+          <a:p>
+            <a:pPr algn="just"/>
+            <a:r>
+              <a:rPr lang="en-US" sz="1400" dirty="0" smtClean="0">
+                <a:latin typeface="Courier New" pitchFamily="49" charset="0"/>
+                <a:cs typeface="Courier New" pitchFamily="49" charset="0"/>
+              </a:rPr>
+              <a:t>    &lt;script&gt;</a:t>
+            </a:r>
+          </a:p>
+          <a:p>
+            <a:pPr algn="just"/>
+            <a:r>
+              <a:rPr lang="en-US" sz="1400" dirty="0" smtClean="0">
+                <a:latin typeface="Courier New" pitchFamily="49" charset="0"/>
+                <a:cs typeface="Courier New" pitchFamily="49" charset="0"/>
+              </a:rPr>
+              <a:t>        const </a:t>
+            </a:r>
+            <a:r>
+              <a:rPr lang="en-US" sz="1400" dirty="0" err="1" smtClean="0">
+                <a:latin typeface="Courier New" pitchFamily="49" charset="0"/>
+                <a:cs typeface="Courier New" pitchFamily="49" charset="0"/>
+              </a:rPr>
+              <a:t>userName</a:t>
+            </a:r>
+            <a:r>
+              <a:rPr lang="en-US" sz="1400" dirty="0" smtClean="0">
+                <a:latin typeface="Courier New" pitchFamily="49" charset="0"/>
+                <a:cs typeface="Courier New" pitchFamily="49" charset="0"/>
+              </a:rPr>
+              <a:t> = prompt('</a:t>
+            </a:r>
+            <a:r>
+              <a:rPr lang="ru-RU" sz="1400" dirty="0" smtClean="0">
+                <a:latin typeface="Courier New" pitchFamily="49" charset="0"/>
+                <a:cs typeface="Courier New" pitchFamily="49" charset="0"/>
+              </a:rPr>
+              <a:t>Как вас зовут?');</a:t>
+            </a:r>
+          </a:p>
+          <a:p>
+            <a:pPr algn="just"/>
+            <a:endParaRPr lang="ru-RU" sz="1400" dirty="0" smtClean="0">
+              <a:latin typeface="Courier New" pitchFamily="49" charset="0"/>
+              <a:cs typeface="Courier New" pitchFamily="49" charset="0"/>
             </a:endParaRPr>
           </a:p>
           <a:p>
             <a:pPr algn="just"/>
             <a:r>
-              <a:rPr lang="en-US" sz="2400" dirty="0" smtClean="0">
-                <a:latin typeface="Cambria" pitchFamily="18" charset="0"/>
-                <a:hlinkClick r:id="rId3"/>
-              </a:rPr>
-              <a:t>https://anton.shevchuk.name/javascript/jquery-for-beginners-write-plugins/</a:t>
-            </a:r>
-            <a:endParaRPr lang="ru-RU" sz="2400" dirty="0" smtClean="0">
-              <a:latin typeface="Cambria" pitchFamily="18" charset="0"/>
+              <a:rPr lang="ru-RU" sz="1400" dirty="0" smtClean="0">
+                <a:latin typeface="Courier New" pitchFamily="49" charset="0"/>
+                <a:cs typeface="Courier New" pitchFamily="49" charset="0"/>
+              </a:rPr>
+              <a:t>        </a:t>
+            </a:r>
+            <a:r>
+              <a:rPr lang="en-US" sz="1400" dirty="0" smtClean="0">
+                <a:latin typeface="Courier New" pitchFamily="49" charset="0"/>
+                <a:cs typeface="Courier New" pitchFamily="49" charset="0"/>
+              </a:rPr>
+              <a:t>if (</a:t>
+            </a:r>
+            <a:r>
+              <a:rPr lang="en-US" sz="1400" dirty="0" err="1" smtClean="0">
+                <a:latin typeface="Courier New" pitchFamily="49" charset="0"/>
+                <a:cs typeface="Courier New" pitchFamily="49" charset="0"/>
+              </a:rPr>
+              <a:t>userName</a:t>
+            </a:r>
+            <a:r>
+              <a:rPr lang="en-US" sz="1400" dirty="0" smtClean="0">
+                <a:latin typeface="Courier New" pitchFamily="49" charset="0"/>
+                <a:cs typeface="Courier New" pitchFamily="49" charset="0"/>
+              </a:rPr>
+              <a:t> !== null &amp;&amp; </a:t>
+            </a:r>
+            <a:r>
+              <a:rPr lang="en-US" sz="1400" dirty="0" err="1" smtClean="0">
+                <a:latin typeface="Courier New" pitchFamily="49" charset="0"/>
+                <a:cs typeface="Courier New" pitchFamily="49" charset="0"/>
+              </a:rPr>
+              <a:t>userName.trim</a:t>
+            </a:r>
+            <a:r>
+              <a:rPr lang="en-US" sz="1400" dirty="0" smtClean="0">
+                <a:latin typeface="Courier New" pitchFamily="49" charset="0"/>
+                <a:cs typeface="Courier New" pitchFamily="49" charset="0"/>
+              </a:rPr>
+              <a:t>() !== '') {</a:t>
+            </a:r>
+          </a:p>
+          <a:p>
+            <a:pPr algn="just"/>
+            <a:r>
+              <a:rPr lang="en-US" sz="1400" dirty="0" smtClean="0">
+                <a:latin typeface="Courier New" pitchFamily="49" charset="0"/>
+                <a:cs typeface="Courier New" pitchFamily="49" charset="0"/>
+              </a:rPr>
+              <a:t>            alert('</a:t>
+            </a:r>
+            <a:r>
+              <a:rPr lang="ru-RU" sz="1400" dirty="0" smtClean="0">
+                <a:latin typeface="Courier New" pitchFamily="49" charset="0"/>
+                <a:cs typeface="Courier New" pitchFamily="49" charset="0"/>
+              </a:rPr>
+              <a:t>Привет, ' + </a:t>
+            </a:r>
+            <a:r>
+              <a:rPr lang="en-US" sz="1400" dirty="0" err="1" smtClean="0">
+                <a:latin typeface="Courier New" pitchFamily="49" charset="0"/>
+                <a:cs typeface="Courier New" pitchFamily="49" charset="0"/>
+              </a:rPr>
+              <a:t>userName</a:t>
+            </a:r>
+            <a:r>
+              <a:rPr lang="en-US" sz="1400" dirty="0" smtClean="0">
+                <a:latin typeface="Courier New" pitchFamily="49" charset="0"/>
+                <a:cs typeface="Courier New" pitchFamily="49" charset="0"/>
+              </a:rPr>
+              <a:t> + '! </a:t>
+            </a:r>
+            <a:r>
+              <a:rPr lang="ru-RU" sz="1400" dirty="0" smtClean="0">
+                <a:latin typeface="Courier New" pitchFamily="49" charset="0"/>
+                <a:cs typeface="Courier New" pitchFamily="49" charset="0"/>
+              </a:rPr>
+              <a:t>Добро пожаловать!');</a:t>
+            </a:r>
+          </a:p>
+          <a:p>
+            <a:pPr algn="just"/>
+            <a:r>
+              <a:rPr lang="ru-RU" sz="1400" dirty="0" smtClean="0">
+                <a:latin typeface="Courier New" pitchFamily="49" charset="0"/>
+                <a:cs typeface="Courier New" pitchFamily="49" charset="0"/>
+              </a:rPr>
+              <a:t>        } </a:t>
+            </a:r>
+            <a:r>
+              <a:rPr lang="en-US" sz="1400" dirty="0" smtClean="0">
+                <a:latin typeface="Courier New" pitchFamily="49" charset="0"/>
+                <a:cs typeface="Courier New" pitchFamily="49" charset="0"/>
+              </a:rPr>
+              <a:t>else {</a:t>
+            </a:r>
+          </a:p>
+          <a:p>
+            <a:pPr algn="just"/>
+            <a:r>
+              <a:rPr lang="en-US" sz="1400" dirty="0" smtClean="0">
+                <a:latin typeface="Courier New" pitchFamily="49" charset="0"/>
+                <a:cs typeface="Courier New" pitchFamily="49" charset="0"/>
+              </a:rPr>
+              <a:t>            alert('</a:t>
+            </a:r>
+            <a:r>
+              <a:rPr lang="ru-RU" sz="1400" dirty="0" smtClean="0">
+                <a:latin typeface="Courier New" pitchFamily="49" charset="0"/>
+                <a:cs typeface="Courier New" pitchFamily="49" charset="0"/>
+              </a:rPr>
+              <a:t>Похоже, вы не захотели назвать имя. Всё равно рады вас видеть!');</a:t>
+            </a:r>
+          </a:p>
+          <a:p>
+            <a:pPr algn="just"/>
+            <a:r>
+              <a:rPr lang="ru-RU" sz="1400" dirty="0" smtClean="0">
+                <a:latin typeface="Courier New" pitchFamily="49" charset="0"/>
+                <a:cs typeface="Courier New" pitchFamily="49" charset="0"/>
+              </a:rPr>
+              <a:t>        }</a:t>
+            </a:r>
+          </a:p>
+          <a:p>
+            <a:pPr algn="just"/>
+            <a:r>
+              <a:rPr lang="ru-RU" sz="1400" dirty="0" smtClean="0">
+                <a:latin typeface="Courier New" pitchFamily="49" charset="0"/>
+                <a:cs typeface="Courier New" pitchFamily="49" charset="0"/>
+              </a:rPr>
+              <a:t>    &lt;/</a:t>
+            </a:r>
+            <a:r>
+              <a:rPr lang="en-US" sz="1400" dirty="0" smtClean="0">
+                <a:latin typeface="Courier New" pitchFamily="49" charset="0"/>
+                <a:cs typeface="Courier New" pitchFamily="49" charset="0"/>
+              </a:rPr>
+              <a:t>script&gt;</a:t>
+            </a:r>
+          </a:p>
+          <a:p>
+            <a:pPr algn="just"/>
+            <a:r>
+              <a:rPr lang="en-US" sz="1400" dirty="0" smtClean="0">
+                <a:latin typeface="Courier New" pitchFamily="49" charset="0"/>
+                <a:cs typeface="Courier New" pitchFamily="49" charset="0"/>
+              </a:rPr>
+              <a:t>&lt;/body&gt;</a:t>
+            </a:r>
+          </a:p>
+          <a:p>
+            <a:pPr algn="just"/>
+            <a:r>
+              <a:rPr lang="en-US" sz="1400" dirty="0" smtClean="0">
+                <a:latin typeface="Courier New" pitchFamily="49" charset="0"/>
+                <a:cs typeface="Courier New" pitchFamily="49" charset="0"/>
+              </a:rPr>
+              <a:t>&lt;/html&gt;</a:t>
+            </a:r>
+            <a:endParaRPr lang="ru-RU" sz="1400" dirty="0">
+              <a:latin typeface="Courier New" pitchFamily="49" charset="0"/>
+              <a:cs typeface="Courier New" pitchFamily="49" charset="0"/>
             </a:endParaRPr>
           </a:p>
-          <a:p>
-            <a:pPr algn="just"/>
-            <a:endParaRPr lang="ru-RU" sz="2400" dirty="0" smtClean="0">
-              <a:latin typeface="Cambria" pitchFamily="18" charset="0"/>
-            </a:endParaRPr>
-          </a:p>
-          <a:p>
-            <a:pPr algn="just"/>
-            <a:r>
-              <a:rPr lang="en-US" sz="2400" b="1" i="1" dirty="0" smtClean="0">
-                <a:latin typeface="Cambria" pitchFamily="18" charset="0"/>
-              </a:rPr>
-              <a:t>10 Best Pagination Components In JavaScript (2025 Update)</a:t>
-            </a:r>
-          </a:p>
-          <a:p>
-            <a:pPr algn="just"/>
-            <a:r>
-              <a:rPr lang="en-US" sz="2400" i="1" dirty="0" smtClean="0">
-                <a:latin typeface="Cambria" pitchFamily="18" charset="0"/>
-                <a:hlinkClick r:id="rId4"/>
-              </a:rPr>
-              <a:t>https://www.jqueryscript.net/blog/best-pagination-plugins.html</a:t>
-            </a:r>
-            <a:endParaRPr lang="ru-RU" sz="2400" i="1" dirty="0" smtClean="0">
-              <a:latin typeface="Cambria" pitchFamily="18" charset="0"/>
-            </a:endParaRPr>
-          </a:p>
-          <a:p>
-            <a:pPr algn="just"/>
-            <a:endParaRPr lang="ru-RU" sz="2400" i="1" dirty="0" smtClean="0">
-              <a:latin typeface="Cambria" pitchFamily="18" charset="0"/>
-            </a:endParaRPr>
-          </a:p>
-          <a:p>
-            <a:pPr algn="just"/>
-            <a:r>
-              <a:rPr lang="en-US" sz="2400" b="1" i="1" dirty="0" err="1" smtClean="0">
-                <a:latin typeface="Cambria" pitchFamily="18" charset="0"/>
-              </a:rPr>
-              <a:t>jquery-plugin</a:t>
-            </a:r>
-            <a:endParaRPr lang="en-US" sz="2400" b="1" i="1" dirty="0" smtClean="0">
-              <a:latin typeface="Cambria" pitchFamily="18" charset="0"/>
-            </a:endParaRPr>
-          </a:p>
-          <a:p>
-            <a:pPr algn="just"/>
-            <a:r>
-              <a:rPr lang="en-US" sz="2400" i="1" dirty="0" smtClean="0">
-                <a:latin typeface="Cambria" pitchFamily="18" charset="0"/>
-                <a:hlinkClick r:id="rId5"/>
-              </a:rPr>
-              <a:t>https://codepen.io/tag/jquery-plugin?cursor=ZD0xJm89MCZwPTE</a:t>
-            </a:r>
-            <a:r>
-              <a:rPr lang="en-US" sz="2400" i="1" dirty="0" smtClean="0">
-                <a:latin typeface="Cambria" pitchFamily="18" charset="0"/>
-              </a:rPr>
-              <a:t>=</a:t>
-            </a:r>
-            <a:endParaRPr lang="ru-RU" sz="2400" i="1" dirty="0" smtClean="0">
-              <a:latin typeface="Cambria" pitchFamily="18" charset="0"/>
-            </a:endParaRPr>
-          </a:p>
-        </p:txBody>
-      </p:sp>
+        </p:txBody>
+      </p:sp>
+      <p:pic>
+        <p:nvPicPr>
+          <p:cNvPr id="2050" name="Picture 2"/>
+          <p:cNvPicPr>
+            <a:picLocks noChangeAspect="1" noChangeArrowheads="1"/>
+          </p:cNvPicPr>
+          <p:nvPr/>
+        </p:nvPicPr>
+        <p:blipFill>
+          <a:blip r:embed="rId2"/>
+          <a:srcRect/>
+          <a:stretch>
+            <a:fillRect/>
+          </a:stretch>
+        </p:blipFill>
+        <p:spPr bwMode="auto">
+          <a:xfrm>
+            <a:off x="2428860" y="3500438"/>
+            <a:ext cx="4295775" cy="1704975"/>
+          </a:xfrm>
+          <a:prstGeom prst="rect">
+            <a:avLst/>
+          </a:prstGeom>
+          <a:noFill/>
+          <a:ln w="9525">
+            <a:noFill/>
+            <a:miter lim="800000"/>
+            <a:headEnd/>
+            <a:tailEnd/>
+          </a:ln>
+          <a:effectLst/>
+        </p:spPr>
+      </p:pic>
     </p:spTree>
   </p:cSld>
   <p:clrMapOvr>
@@ -5293,7 +5947,7 @@
         </p:nvSpPr>
         <p:spPr>
           <a:xfrm>
-            <a:off x="500034" y="-285776"/>
+            <a:off x="285720" y="2571744"/>
             <a:ext cx="8229600" cy="1143000"/>
           </a:xfrm>
         </p:spPr>
@@ -5302,302 +5956,14 @@
           <a:lstStyle/>
           <a:p>
             <a:r>
-              <a:rPr lang="ru-RU" b="1" dirty="0" err="1" smtClean="0"/>
-              <a:t>Плагины</a:t>
-            </a:r>
-            <a:endParaRPr lang="ru-RU" b="1" dirty="0"/>
-          </a:p>
-        </p:txBody>
-      </p:sp>
-      <p:sp>
-        <p:nvSpPr>
-          <p:cNvPr id="14" name="Прямоугольник 13"/>
-          <p:cNvSpPr/>
-          <p:nvPr/>
-        </p:nvSpPr>
-        <p:spPr>
-          <a:xfrm>
-            <a:off x="0" y="857232"/>
-            <a:ext cx="9144000" cy="2214578"/>
-          </a:xfrm>
-          <a:prstGeom prst="rect">
-            <a:avLst/>
-          </a:prstGeom>
-          <a:solidFill>
-            <a:schemeClr val="bg2"/>
-          </a:solidFill>
-          <a:ln>
-            <a:noFill/>
-          </a:ln>
-        </p:spPr>
-        <p:style>
-          <a:lnRef idx="2">
-            <a:schemeClr val="accent1">
-              <a:shade val="50000"/>
-            </a:schemeClr>
-          </a:lnRef>
-          <a:fillRef idx="1">
-            <a:schemeClr val="accent1"/>
-          </a:fillRef>
-          <a:effectRef idx="0">
-            <a:schemeClr val="accent1"/>
-          </a:effectRef>
-          <a:fontRef idx="minor">
-            <a:schemeClr val="lt1"/>
-          </a:fontRef>
-        </p:style>
-        <p:txBody>
-          <a:bodyPr rtlCol="0" anchor="ctr"/>
-          <a:lstStyle/>
-          <a:p>
-            <a:pPr algn="ctr"/>
-            <a:endParaRPr lang="ru-RU"/>
-          </a:p>
-        </p:txBody>
-      </p:sp>
-      <p:sp>
-        <p:nvSpPr>
-          <p:cNvPr id="15" name="Прямоугольник 14"/>
-          <p:cNvSpPr/>
-          <p:nvPr/>
-        </p:nvSpPr>
-        <p:spPr>
-          <a:xfrm>
-            <a:off x="0" y="857232"/>
-            <a:ext cx="9144000" cy="2308324"/>
-          </a:xfrm>
-          <a:prstGeom prst="rect">
-            <a:avLst/>
-          </a:prstGeom>
-        </p:spPr>
-        <p:txBody>
-          <a:bodyPr wrap="square">
-            <a:spAutoFit/>
-          </a:bodyPr>
-          <a:lstStyle/>
-          <a:p>
-            <a:pPr algn="just"/>
-            <a:r>
-              <a:rPr lang="ru-RU" sz="2400" b="1" dirty="0" smtClean="0">
-                <a:latin typeface="Times New Roman" pitchFamily="18" charset="0"/>
-                <a:cs typeface="Times New Roman" pitchFamily="18" charset="0"/>
-              </a:rPr>
-              <a:t>В </a:t>
-            </a:r>
-            <a:r>
-              <a:rPr lang="ru-RU" sz="2400" b="1" dirty="0" err="1" smtClean="0">
-                <a:latin typeface="Times New Roman" pitchFamily="18" charset="0"/>
-                <a:cs typeface="Times New Roman" pitchFamily="18" charset="0"/>
-              </a:rPr>
-              <a:t>JavaScript</a:t>
-            </a:r>
-            <a:r>
-              <a:rPr lang="ru-RU" sz="2400" b="1" dirty="0" smtClean="0">
-                <a:latin typeface="Times New Roman" pitchFamily="18" charset="0"/>
-                <a:cs typeface="Times New Roman" pitchFamily="18" charset="0"/>
-              </a:rPr>
-              <a:t> </a:t>
-            </a:r>
-            <a:r>
-              <a:rPr lang="ru-RU" sz="2400" dirty="0" smtClean="0">
-                <a:latin typeface="Times New Roman" pitchFamily="18" charset="0"/>
-                <a:cs typeface="Times New Roman" pitchFamily="18" charset="0"/>
-              </a:rPr>
-              <a:t>существуют </a:t>
-            </a:r>
-            <a:r>
-              <a:rPr lang="ru-RU" sz="2400" b="1" dirty="0" err="1" smtClean="0">
-                <a:latin typeface="Times New Roman" pitchFamily="18" charset="0"/>
-                <a:cs typeface="Times New Roman" pitchFamily="18" charset="0"/>
-              </a:rPr>
-              <a:t>плагины</a:t>
-            </a:r>
-            <a:r>
-              <a:rPr lang="ru-RU" sz="2400" dirty="0" smtClean="0">
-                <a:latin typeface="Times New Roman" pitchFamily="18" charset="0"/>
-                <a:cs typeface="Times New Roman" pitchFamily="18" charset="0"/>
-              </a:rPr>
-              <a:t> (инструменты) для разных задач: вёрстки, работы с формами, анимации и тестирования. Они могут быть разработаны для разных библиотек, например </a:t>
-            </a:r>
-            <a:r>
-              <a:rPr lang="ru-RU" sz="2400" dirty="0" err="1" smtClean="0">
-                <a:latin typeface="Times New Roman" pitchFamily="18" charset="0"/>
-                <a:cs typeface="Times New Roman" pitchFamily="18" charset="0"/>
-              </a:rPr>
-              <a:t>jQuery</a:t>
-            </a:r>
-            <a:r>
-              <a:rPr lang="ru-RU" sz="2400" dirty="0" smtClean="0">
-                <a:latin typeface="Times New Roman" pitchFamily="18" charset="0"/>
-                <a:cs typeface="Times New Roman" pitchFamily="18" charset="0"/>
-              </a:rPr>
-              <a:t>, и встраиваться в основное приложение без изменения исходного кода.</a:t>
-            </a:r>
-            <a:r>
-              <a:rPr lang="en-US" sz="2400" dirty="0" smtClean="0">
-                <a:latin typeface="Times New Roman" pitchFamily="18" charset="0"/>
-                <a:cs typeface="Times New Roman" pitchFamily="18" charset="0"/>
-              </a:rPr>
-              <a:t> </a:t>
-            </a:r>
-            <a:r>
-              <a:rPr lang="ru-RU" sz="2400" b="1" dirty="0" err="1" smtClean="0">
-                <a:latin typeface="Times New Roman" pitchFamily="18" charset="0"/>
-                <a:cs typeface="Times New Roman" pitchFamily="18" charset="0"/>
-              </a:rPr>
-              <a:t>Плагины</a:t>
-            </a:r>
-            <a:r>
-              <a:rPr lang="ru-RU" sz="2400" b="1" dirty="0" smtClean="0">
-                <a:latin typeface="Times New Roman" pitchFamily="18" charset="0"/>
-                <a:cs typeface="Times New Roman" pitchFamily="18" charset="0"/>
-              </a:rPr>
-              <a:t> — это дополнение к программе, которое добавляет новые функции или улучшает уже существующие. </a:t>
-            </a:r>
-            <a:endParaRPr lang="ru-RU" sz="2400" b="1" dirty="0">
-              <a:latin typeface="Times New Roman" pitchFamily="18" charset="0"/>
-              <a:cs typeface="Times New Roman" pitchFamily="18" charset="0"/>
-            </a:endParaRPr>
-          </a:p>
-        </p:txBody>
-      </p:sp>
-      <p:sp>
-        <p:nvSpPr>
-          <p:cNvPr id="18" name="Прямоугольник 17"/>
-          <p:cNvSpPr/>
-          <p:nvPr/>
-        </p:nvSpPr>
-        <p:spPr>
-          <a:xfrm>
-            <a:off x="0" y="3429000"/>
-            <a:ext cx="9144000" cy="3046988"/>
-          </a:xfrm>
-          <a:prstGeom prst="rect">
-            <a:avLst/>
-          </a:prstGeom>
-          <a:solidFill>
-            <a:schemeClr val="accent3">
-              <a:lumMod val="20000"/>
-              <a:lumOff val="80000"/>
-            </a:schemeClr>
-          </a:solidFill>
-        </p:spPr>
-        <p:txBody>
-          <a:bodyPr wrap="square">
-            <a:spAutoFit/>
-          </a:bodyPr>
-          <a:lstStyle/>
-          <a:p>
-            <a:pPr algn="just"/>
-            <a:r>
-              <a:rPr lang="ru-RU" sz="2400" dirty="0" err="1" smtClean="0">
-                <a:latin typeface="Times New Roman" pitchFamily="18" charset="0"/>
-                <a:cs typeface="Times New Roman" pitchFamily="18" charset="0"/>
-              </a:rPr>
-              <a:t>Плагины</a:t>
-            </a:r>
-            <a:r>
-              <a:rPr lang="ru-RU" sz="2400" dirty="0" smtClean="0">
-                <a:latin typeface="Times New Roman" pitchFamily="18" charset="0"/>
-                <a:cs typeface="Times New Roman" pitchFamily="18" charset="0"/>
-              </a:rPr>
-              <a:t> обычно предоставляются в виде одного или нескольких JavaScript-файлов. Чтобы использовать </a:t>
-            </a:r>
-            <a:r>
-              <a:rPr lang="ru-RU" sz="2400" dirty="0" err="1" smtClean="0">
-                <a:latin typeface="Times New Roman" pitchFamily="18" charset="0"/>
-                <a:cs typeface="Times New Roman" pitchFamily="18" charset="0"/>
-              </a:rPr>
-              <a:t>плагин</a:t>
-            </a:r>
-            <a:r>
-              <a:rPr lang="ru-RU" sz="2400" dirty="0" smtClean="0">
-                <a:latin typeface="Times New Roman" pitchFamily="18" charset="0"/>
-                <a:cs typeface="Times New Roman" pitchFamily="18" charset="0"/>
-              </a:rPr>
-              <a:t> в проекте, необходимо:</a:t>
-            </a:r>
-          </a:p>
-          <a:p>
-            <a:pPr algn="just">
-              <a:buFont typeface="Arial" pitchFamily="34" charset="0"/>
-              <a:buChar char="•"/>
-            </a:pPr>
-            <a:r>
-              <a:rPr lang="ru-RU" sz="2400" dirty="0" smtClean="0">
-                <a:latin typeface="Times New Roman" pitchFamily="18" charset="0"/>
-                <a:cs typeface="Times New Roman" pitchFamily="18" charset="0"/>
-              </a:rPr>
-              <a:t>Скачать </a:t>
-            </a:r>
-            <a:r>
-              <a:rPr lang="ru-RU" sz="2400" dirty="0" err="1" smtClean="0">
-                <a:latin typeface="Times New Roman" pitchFamily="18" charset="0"/>
-                <a:cs typeface="Times New Roman" pitchFamily="18" charset="0"/>
-              </a:rPr>
-              <a:t>плагин</a:t>
-            </a:r>
-            <a:r>
-              <a:rPr lang="ru-RU" sz="2400" dirty="0" smtClean="0">
-                <a:latin typeface="Times New Roman" pitchFamily="18" charset="0"/>
-                <a:cs typeface="Times New Roman" pitchFamily="18" charset="0"/>
-              </a:rPr>
-              <a:t> и подключить его к проекту.</a:t>
-            </a:r>
-          </a:p>
-          <a:p>
-            <a:pPr algn="just">
-              <a:buFont typeface="Arial" pitchFamily="34" charset="0"/>
-              <a:buChar char="•"/>
-            </a:pPr>
-            <a:r>
-              <a:rPr lang="ru-RU" sz="2400" dirty="0" smtClean="0">
-                <a:latin typeface="Times New Roman" pitchFamily="18" charset="0"/>
-                <a:cs typeface="Times New Roman" pitchFamily="18" charset="0"/>
-              </a:rPr>
-              <a:t>Подключить CSS-стили (если необходимо) — многие </a:t>
-            </a:r>
-            <a:r>
-              <a:rPr lang="ru-RU" sz="2400" dirty="0" err="1" smtClean="0">
-                <a:latin typeface="Times New Roman" pitchFamily="18" charset="0"/>
-                <a:cs typeface="Times New Roman" pitchFamily="18" charset="0"/>
-              </a:rPr>
-              <a:t>плагины</a:t>
-            </a:r>
-            <a:r>
-              <a:rPr lang="ru-RU" sz="2400" dirty="0" smtClean="0">
-                <a:latin typeface="Times New Roman" pitchFamily="18" charset="0"/>
-                <a:cs typeface="Times New Roman" pitchFamily="18" charset="0"/>
-              </a:rPr>
-              <a:t> требуют этого для корректного отображения.</a:t>
-            </a:r>
-          </a:p>
-          <a:p>
-            <a:pPr algn="just">
-              <a:buFont typeface="Arial" pitchFamily="34" charset="0"/>
-              <a:buChar char="•"/>
-            </a:pPr>
-            <a:r>
-              <a:rPr lang="ru-RU" sz="2400" dirty="0" smtClean="0">
-                <a:latin typeface="Times New Roman" pitchFamily="18" charset="0"/>
-                <a:cs typeface="Times New Roman" pitchFamily="18" charset="0"/>
-              </a:rPr>
-              <a:t>Инициализировать </a:t>
-            </a:r>
-            <a:r>
-              <a:rPr lang="ru-RU" sz="2400" dirty="0" err="1" smtClean="0">
-                <a:latin typeface="Times New Roman" pitchFamily="18" charset="0"/>
-                <a:cs typeface="Times New Roman" pitchFamily="18" charset="0"/>
-              </a:rPr>
-              <a:t>плагин</a:t>
-            </a:r>
-            <a:r>
-              <a:rPr lang="ru-RU" sz="2400" dirty="0" smtClean="0">
-                <a:latin typeface="Times New Roman" pitchFamily="18" charset="0"/>
-                <a:cs typeface="Times New Roman" pitchFamily="18" charset="0"/>
-              </a:rPr>
-              <a:t> — после подключения необходимо его правильно вызвать, чтобы он начал работать.</a:t>
-            </a:r>
+              <a:rPr lang="ru-RU" dirty="0" smtClean="0"/>
+              <a:t>Задание 3. Работа с </a:t>
+            </a:r>
+            <a:r>
+              <a:rPr lang="ru-RU" dirty="0" err="1" smtClean="0"/>
+              <a:t>плагинами</a:t>
+            </a:r>
+            <a:endParaRPr lang="ru-RU" dirty="0"/>
           </a:p>
         </p:txBody>
       </p:sp>
@@ -6056,6 +6422,547 @@
       </p:grpSpPr>
       <p:sp>
         <p:nvSpPr>
+          <p:cNvPr id="2" name="Заголовок 1"/>
+          <p:cNvSpPr>
+            <a:spLocks noGrp="1"/>
+          </p:cNvSpPr>
+          <p:nvPr>
+            <p:ph type="title"/>
+          </p:nvPr>
+        </p:nvSpPr>
+        <p:spPr>
+          <a:xfrm>
+            <a:off x="500034" y="0"/>
+            <a:ext cx="8229600" cy="1143000"/>
+          </a:xfrm>
+        </p:spPr>
+        <p:txBody>
+          <a:bodyPr/>
+          <a:lstStyle/>
+          <a:p>
+            <a:r>
+              <a:rPr lang="ru-RU" b="1" dirty="0" smtClean="0"/>
+              <a:t>Дополнительные материалы</a:t>
+            </a:r>
+            <a:endParaRPr lang="ru-RU" b="1" dirty="0"/>
+          </a:p>
+        </p:txBody>
+      </p:sp>
+      <p:sp>
+        <p:nvSpPr>
+          <p:cNvPr id="4" name="Прямоугольник 3"/>
+          <p:cNvSpPr/>
+          <p:nvPr/>
+        </p:nvSpPr>
+        <p:spPr>
+          <a:xfrm>
+            <a:off x="0" y="1285860"/>
+            <a:ext cx="9144000" cy="4524315"/>
+          </a:xfrm>
+          <a:prstGeom prst="rect">
+            <a:avLst/>
+          </a:prstGeom>
+          <a:ln>
+            <a:noFill/>
+          </a:ln>
+        </p:spPr>
+        <p:txBody>
+          <a:bodyPr wrap="square">
+            <a:spAutoFit/>
+          </a:bodyPr>
+          <a:lstStyle/>
+          <a:p>
+            <a:pPr algn="just"/>
+            <a:r>
+              <a:rPr lang="ru-RU" sz="2400" b="1" i="1" dirty="0" err="1" smtClean="0">
+                <a:latin typeface="Cambria" pitchFamily="18" charset="0"/>
+              </a:rPr>
+              <a:t>jQuery</a:t>
+            </a:r>
+            <a:r>
+              <a:rPr lang="ru-RU" sz="2400" b="1" i="1" dirty="0" smtClean="0">
+                <a:latin typeface="Cambria" pitchFamily="18" charset="0"/>
+              </a:rPr>
+              <a:t> </a:t>
+            </a:r>
+            <a:r>
+              <a:rPr lang="ru-RU" sz="2400" b="1" i="1" dirty="0" err="1" smtClean="0">
+                <a:latin typeface="Cambria" pitchFamily="18" charset="0"/>
+              </a:rPr>
+              <a:t>плагины</a:t>
+            </a:r>
+            <a:r>
+              <a:rPr lang="ru-RU" sz="2400" b="1" i="1" dirty="0" smtClean="0">
+                <a:latin typeface="Cambria" pitchFamily="18" charset="0"/>
+              </a:rPr>
+              <a:t> и расширения — как использовать и создавать свои</a:t>
+            </a:r>
+          </a:p>
+          <a:p>
+            <a:pPr algn="just"/>
+            <a:r>
+              <a:rPr lang="en-US" sz="2400" dirty="0" smtClean="0">
+                <a:latin typeface="Cambria" pitchFamily="18" charset="0"/>
+                <a:hlinkClick r:id="rId2"/>
+              </a:rPr>
+              <a:t>https://xtalk.pro/articles/153/urok-11-jquery-plaginy-i-rasshireniya-kak-ispolzovat-i-sozdavat-svoi</a:t>
+            </a:r>
+            <a:endParaRPr lang="ru-RU" sz="2400" dirty="0" smtClean="0">
+              <a:latin typeface="Cambria" pitchFamily="18" charset="0"/>
+            </a:endParaRPr>
+          </a:p>
+          <a:p>
+            <a:pPr algn="just"/>
+            <a:r>
+              <a:rPr lang="en-US" sz="2400" dirty="0" smtClean="0">
+                <a:latin typeface="Cambria" pitchFamily="18" charset="0"/>
+                <a:hlinkClick r:id="rId3"/>
+              </a:rPr>
+              <a:t>https://anton.shevchuk.name/javascript/jquery-for-beginners-write-plugins/</a:t>
+            </a:r>
+            <a:endParaRPr lang="ru-RU" sz="2400" dirty="0" smtClean="0">
+              <a:latin typeface="Cambria" pitchFamily="18" charset="0"/>
+            </a:endParaRPr>
+          </a:p>
+          <a:p>
+            <a:pPr algn="just"/>
+            <a:endParaRPr lang="ru-RU" sz="2400" dirty="0" smtClean="0">
+              <a:latin typeface="Cambria" pitchFamily="18" charset="0"/>
+            </a:endParaRPr>
+          </a:p>
+          <a:p>
+            <a:pPr algn="just"/>
+            <a:r>
+              <a:rPr lang="en-US" sz="2400" b="1" i="1" dirty="0" smtClean="0">
+                <a:latin typeface="Cambria" pitchFamily="18" charset="0"/>
+              </a:rPr>
+              <a:t>10 Best Pagination Components In JavaScript (2025 Update)</a:t>
+            </a:r>
+          </a:p>
+          <a:p>
+            <a:pPr algn="just"/>
+            <a:r>
+              <a:rPr lang="en-US" sz="2400" i="1" dirty="0" smtClean="0">
+                <a:latin typeface="Cambria" pitchFamily="18" charset="0"/>
+                <a:hlinkClick r:id="rId4"/>
+              </a:rPr>
+              <a:t>https://www.jqueryscript.net/blog/best-pagination-plugins.html</a:t>
+            </a:r>
+            <a:endParaRPr lang="ru-RU" sz="2400" i="1" dirty="0" smtClean="0">
+              <a:latin typeface="Cambria" pitchFamily="18" charset="0"/>
+            </a:endParaRPr>
+          </a:p>
+          <a:p>
+            <a:pPr algn="just"/>
+            <a:endParaRPr lang="ru-RU" sz="2400" i="1" dirty="0" smtClean="0">
+              <a:latin typeface="Cambria" pitchFamily="18" charset="0"/>
+            </a:endParaRPr>
+          </a:p>
+          <a:p>
+            <a:pPr algn="just"/>
+            <a:r>
+              <a:rPr lang="en-US" sz="2400" b="1" i="1" dirty="0" err="1" smtClean="0">
+                <a:latin typeface="Cambria" pitchFamily="18" charset="0"/>
+              </a:rPr>
+              <a:t>jquery-plugin</a:t>
+            </a:r>
+            <a:endParaRPr lang="en-US" sz="2400" b="1" i="1" dirty="0" smtClean="0">
+              <a:latin typeface="Cambria" pitchFamily="18" charset="0"/>
+            </a:endParaRPr>
+          </a:p>
+          <a:p>
+            <a:pPr algn="just"/>
+            <a:r>
+              <a:rPr lang="en-US" sz="2400" i="1" dirty="0" smtClean="0">
+                <a:latin typeface="Cambria" pitchFamily="18" charset="0"/>
+                <a:hlinkClick r:id="rId5"/>
+              </a:rPr>
+              <a:t>https://codepen.io/tag/jquery-plugin?cursor=ZD0xJm89MCZwPTE</a:t>
+            </a:r>
+            <a:r>
+              <a:rPr lang="en-US" sz="2400" i="1" dirty="0" smtClean="0">
+                <a:latin typeface="Cambria" pitchFamily="18" charset="0"/>
+              </a:rPr>
+              <a:t>=</a:t>
+            </a:r>
+            <a:endParaRPr lang="ru-RU" sz="2400" i="1" dirty="0" smtClean="0">
+              <a:latin typeface="Cambria" pitchFamily="18" charset="0"/>
+            </a:endParaRPr>
+          </a:p>
+        </p:txBody>
+      </p:sp>
+    </p:spTree>
+  </p:cSld>
+  <p:clrMapOvr>
+    <a:masterClrMapping/>
+  </p:clrMapOvr>
+</p:sld>
+</file>
+
+<file path=ppt/slides/slide21.xml><?xml version="1.0" encoding="utf-8"?>
+<p:sld xmlns:a="http://schemas.openxmlformats.org/drawingml/2006/main" xmlns:r="http://schemas.openxmlformats.org/officeDocument/2006/relationships" xmlns:p="http://schemas.openxmlformats.org/presentationml/2006/main">
+  <p:cSld>
+    <p:spTree>
+      <p:nvGrpSpPr>
+        <p:cNvPr id="1" name=""/>
+        <p:cNvGrpSpPr/>
+        <p:nvPr/>
+      </p:nvGrpSpPr>
+      <p:grpSpPr>
+        <a:xfrm>
+          <a:off x="0" y="0"/>
+          <a:ext cx="0" cy="0"/>
+          <a:chOff x="0" y="0"/>
+          <a:chExt cx="0" cy="0"/>
+        </a:xfrm>
+      </p:grpSpPr>
+      <p:sp>
+        <p:nvSpPr>
+          <p:cNvPr id="2" name="Заголовок 1"/>
+          <p:cNvSpPr>
+            <a:spLocks noGrp="1"/>
+          </p:cNvSpPr>
+          <p:nvPr>
+            <p:ph type="title"/>
+          </p:nvPr>
+        </p:nvSpPr>
+        <p:spPr>
+          <a:xfrm>
+            <a:off x="500034" y="-285776"/>
+            <a:ext cx="8229600" cy="1143000"/>
+          </a:xfrm>
+        </p:spPr>
+        <p:txBody>
+          <a:bodyPr/>
+          <a:lstStyle/>
+          <a:p>
+            <a:r>
+              <a:rPr lang="ru-RU" b="1" dirty="0" err="1" smtClean="0"/>
+              <a:t>Плагины</a:t>
+            </a:r>
+            <a:endParaRPr lang="ru-RU" b="1" dirty="0"/>
+          </a:p>
+        </p:txBody>
+      </p:sp>
+      <p:sp>
+        <p:nvSpPr>
+          <p:cNvPr id="14" name="Прямоугольник 13"/>
+          <p:cNvSpPr/>
+          <p:nvPr/>
+        </p:nvSpPr>
+        <p:spPr>
+          <a:xfrm>
+            <a:off x="0" y="857232"/>
+            <a:ext cx="9144000" cy="2214578"/>
+          </a:xfrm>
+          <a:prstGeom prst="rect">
+            <a:avLst/>
+          </a:prstGeom>
+          <a:solidFill>
+            <a:schemeClr val="bg2"/>
+          </a:solidFill>
+          <a:ln>
+            <a:noFill/>
+          </a:ln>
+        </p:spPr>
+        <p:style>
+          <a:lnRef idx="2">
+            <a:schemeClr val="accent1">
+              <a:shade val="50000"/>
+            </a:schemeClr>
+          </a:lnRef>
+          <a:fillRef idx="1">
+            <a:schemeClr val="accent1"/>
+          </a:fillRef>
+          <a:effectRef idx="0">
+            <a:schemeClr val="accent1"/>
+          </a:effectRef>
+          <a:fontRef idx="minor">
+            <a:schemeClr val="lt1"/>
+          </a:fontRef>
+        </p:style>
+        <p:txBody>
+          <a:bodyPr rtlCol="0" anchor="ctr"/>
+          <a:lstStyle/>
+          <a:p>
+            <a:pPr algn="ctr"/>
+            <a:endParaRPr lang="ru-RU"/>
+          </a:p>
+        </p:txBody>
+      </p:sp>
+      <p:sp>
+        <p:nvSpPr>
+          <p:cNvPr id="15" name="Прямоугольник 14"/>
+          <p:cNvSpPr/>
+          <p:nvPr/>
+        </p:nvSpPr>
+        <p:spPr>
+          <a:xfrm>
+            <a:off x="0" y="857232"/>
+            <a:ext cx="9144000" cy="2308324"/>
+          </a:xfrm>
+          <a:prstGeom prst="rect">
+            <a:avLst/>
+          </a:prstGeom>
+        </p:spPr>
+        <p:txBody>
+          <a:bodyPr wrap="square">
+            <a:spAutoFit/>
+          </a:bodyPr>
+          <a:lstStyle/>
+          <a:p>
+            <a:pPr algn="just"/>
+            <a:r>
+              <a:rPr lang="ru-RU" sz="2400" b="1" dirty="0" smtClean="0">
+                <a:latin typeface="Times New Roman" pitchFamily="18" charset="0"/>
+                <a:cs typeface="Times New Roman" pitchFamily="18" charset="0"/>
+              </a:rPr>
+              <a:t>В </a:t>
+            </a:r>
+            <a:r>
+              <a:rPr lang="ru-RU" sz="2400" b="1" dirty="0" err="1" smtClean="0">
+                <a:latin typeface="Times New Roman" pitchFamily="18" charset="0"/>
+                <a:cs typeface="Times New Roman" pitchFamily="18" charset="0"/>
+              </a:rPr>
+              <a:t>JavaScript</a:t>
+            </a:r>
+            <a:r>
+              <a:rPr lang="ru-RU" sz="2400" b="1" dirty="0" smtClean="0">
+                <a:latin typeface="Times New Roman" pitchFamily="18" charset="0"/>
+                <a:cs typeface="Times New Roman" pitchFamily="18" charset="0"/>
+              </a:rPr>
+              <a:t> </a:t>
+            </a:r>
+            <a:r>
+              <a:rPr lang="ru-RU" sz="2400" dirty="0" smtClean="0">
+                <a:latin typeface="Times New Roman" pitchFamily="18" charset="0"/>
+                <a:cs typeface="Times New Roman" pitchFamily="18" charset="0"/>
+              </a:rPr>
+              <a:t>существуют </a:t>
+            </a:r>
+            <a:r>
+              <a:rPr lang="ru-RU" sz="2400" b="1" dirty="0" err="1" smtClean="0">
+                <a:latin typeface="Times New Roman" pitchFamily="18" charset="0"/>
+                <a:cs typeface="Times New Roman" pitchFamily="18" charset="0"/>
+              </a:rPr>
+              <a:t>плагины</a:t>
+            </a:r>
+            <a:r>
+              <a:rPr lang="ru-RU" sz="2400" dirty="0" smtClean="0">
+                <a:latin typeface="Times New Roman" pitchFamily="18" charset="0"/>
+                <a:cs typeface="Times New Roman" pitchFamily="18" charset="0"/>
+              </a:rPr>
+              <a:t> (инструменты) для разных задач: вёрстки, работы с формами, анимации и тестирования. Они могут быть разработаны для разных библиотек, например </a:t>
+            </a:r>
+            <a:r>
+              <a:rPr lang="ru-RU" sz="2400" dirty="0" err="1" smtClean="0">
+                <a:latin typeface="Times New Roman" pitchFamily="18" charset="0"/>
+                <a:cs typeface="Times New Roman" pitchFamily="18" charset="0"/>
+              </a:rPr>
+              <a:t>jQuery</a:t>
+            </a:r>
+            <a:r>
+              <a:rPr lang="ru-RU" sz="2400" dirty="0" smtClean="0">
+                <a:latin typeface="Times New Roman" pitchFamily="18" charset="0"/>
+                <a:cs typeface="Times New Roman" pitchFamily="18" charset="0"/>
+              </a:rPr>
+              <a:t>, и встраиваться в основное приложение без изменения исходного кода.</a:t>
+            </a:r>
+            <a:r>
+              <a:rPr lang="en-US" sz="2400" dirty="0" smtClean="0">
+                <a:latin typeface="Times New Roman" pitchFamily="18" charset="0"/>
+                <a:cs typeface="Times New Roman" pitchFamily="18" charset="0"/>
+              </a:rPr>
+              <a:t> </a:t>
+            </a:r>
+            <a:r>
+              <a:rPr lang="ru-RU" sz="2400" b="1" dirty="0" err="1" smtClean="0">
+                <a:latin typeface="Times New Roman" pitchFamily="18" charset="0"/>
+                <a:cs typeface="Times New Roman" pitchFamily="18" charset="0"/>
+              </a:rPr>
+              <a:t>Плагины</a:t>
+            </a:r>
+            <a:r>
+              <a:rPr lang="ru-RU" sz="2400" b="1" dirty="0" smtClean="0">
+                <a:latin typeface="Times New Roman" pitchFamily="18" charset="0"/>
+                <a:cs typeface="Times New Roman" pitchFamily="18" charset="0"/>
+              </a:rPr>
+              <a:t> — это дополнение к программе, которое добавляет новые функции или улучшает уже существующие. </a:t>
+            </a:r>
+            <a:endParaRPr lang="ru-RU" sz="2400" b="1" dirty="0">
+              <a:latin typeface="Times New Roman" pitchFamily="18" charset="0"/>
+              <a:cs typeface="Times New Roman" pitchFamily="18" charset="0"/>
+            </a:endParaRPr>
+          </a:p>
+        </p:txBody>
+      </p:sp>
+      <p:sp>
+        <p:nvSpPr>
+          <p:cNvPr id="18" name="Прямоугольник 17"/>
+          <p:cNvSpPr/>
+          <p:nvPr/>
+        </p:nvSpPr>
+        <p:spPr>
+          <a:xfrm>
+            <a:off x="0" y="3429000"/>
+            <a:ext cx="9144000" cy="3046988"/>
+          </a:xfrm>
+          <a:prstGeom prst="rect">
+            <a:avLst/>
+          </a:prstGeom>
+          <a:solidFill>
+            <a:schemeClr val="accent3">
+              <a:lumMod val="20000"/>
+              <a:lumOff val="80000"/>
+            </a:schemeClr>
+          </a:solidFill>
+        </p:spPr>
+        <p:txBody>
+          <a:bodyPr wrap="square">
+            <a:spAutoFit/>
+          </a:bodyPr>
+          <a:lstStyle/>
+          <a:p>
+            <a:pPr algn="just"/>
+            <a:r>
+              <a:rPr lang="ru-RU" sz="2400" dirty="0" err="1" smtClean="0">
+                <a:latin typeface="Times New Roman" pitchFamily="18" charset="0"/>
+                <a:cs typeface="Times New Roman" pitchFamily="18" charset="0"/>
+              </a:rPr>
+              <a:t>Плагины</a:t>
+            </a:r>
+            <a:r>
+              <a:rPr lang="ru-RU" sz="2400" dirty="0" smtClean="0">
+                <a:latin typeface="Times New Roman" pitchFamily="18" charset="0"/>
+                <a:cs typeface="Times New Roman" pitchFamily="18" charset="0"/>
+              </a:rPr>
+              <a:t> обычно предоставляются в виде одного или нескольких JavaScript-файлов. Чтобы использовать </a:t>
+            </a:r>
+            <a:r>
+              <a:rPr lang="ru-RU" sz="2400" dirty="0" err="1" smtClean="0">
+                <a:latin typeface="Times New Roman" pitchFamily="18" charset="0"/>
+                <a:cs typeface="Times New Roman" pitchFamily="18" charset="0"/>
+              </a:rPr>
+              <a:t>плагин</a:t>
+            </a:r>
+            <a:r>
+              <a:rPr lang="ru-RU" sz="2400" dirty="0" smtClean="0">
+                <a:latin typeface="Times New Roman" pitchFamily="18" charset="0"/>
+                <a:cs typeface="Times New Roman" pitchFamily="18" charset="0"/>
+              </a:rPr>
+              <a:t> в проекте, необходимо:</a:t>
+            </a:r>
+          </a:p>
+          <a:p>
+            <a:pPr algn="just">
+              <a:buFont typeface="Arial" pitchFamily="34" charset="0"/>
+              <a:buChar char="•"/>
+            </a:pPr>
+            <a:r>
+              <a:rPr lang="ru-RU" sz="2400" dirty="0" smtClean="0">
+                <a:latin typeface="Times New Roman" pitchFamily="18" charset="0"/>
+                <a:cs typeface="Times New Roman" pitchFamily="18" charset="0"/>
+              </a:rPr>
+              <a:t>Скачать </a:t>
+            </a:r>
+            <a:r>
+              <a:rPr lang="ru-RU" sz="2400" dirty="0" err="1" smtClean="0">
+                <a:latin typeface="Times New Roman" pitchFamily="18" charset="0"/>
+                <a:cs typeface="Times New Roman" pitchFamily="18" charset="0"/>
+              </a:rPr>
+              <a:t>плагин</a:t>
+            </a:r>
+            <a:r>
+              <a:rPr lang="ru-RU" sz="2400" dirty="0" smtClean="0">
+                <a:latin typeface="Times New Roman" pitchFamily="18" charset="0"/>
+                <a:cs typeface="Times New Roman" pitchFamily="18" charset="0"/>
+              </a:rPr>
+              <a:t> и подключить его к проекту.</a:t>
+            </a:r>
+          </a:p>
+          <a:p>
+            <a:pPr algn="just">
+              <a:buFont typeface="Arial" pitchFamily="34" charset="0"/>
+              <a:buChar char="•"/>
+            </a:pPr>
+            <a:r>
+              <a:rPr lang="ru-RU" sz="2400" dirty="0" smtClean="0">
+                <a:latin typeface="Times New Roman" pitchFamily="18" charset="0"/>
+                <a:cs typeface="Times New Roman" pitchFamily="18" charset="0"/>
+              </a:rPr>
+              <a:t>Подключить CSS-стили (если необходимо) — многие </a:t>
+            </a:r>
+            <a:r>
+              <a:rPr lang="ru-RU" sz="2400" dirty="0" err="1" smtClean="0">
+                <a:latin typeface="Times New Roman" pitchFamily="18" charset="0"/>
+                <a:cs typeface="Times New Roman" pitchFamily="18" charset="0"/>
+              </a:rPr>
+              <a:t>плагины</a:t>
+            </a:r>
+            <a:r>
+              <a:rPr lang="ru-RU" sz="2400" dirty="0" smtClean="0">
+                <a:latin typeface="Times New Roman" pitchFamily="18" charset="0"/>
+                <a:cs typeface="Times New Roman" pitchFamily="18" charset="0"/>
+              </a:rPr>
+              <a:t> требуют этого для корректного отображения.</a:t>
+            </a:r>
+          </a:p>
+          <a:p>
+            <a:pPr algn="just">
+              <a:buFont typeface="Arial" pitchFamily="34" charset="0"/>
+              <a:buChar char="•"/>
+            </a:pPr>
+            <a:r>
+              <a:rPr lang="ru-RU" sz="2400" dirty="0" smtClean="0">
+                <a:latin typeface="Times New Roman" pitchFamily="18" charset="0"/>
+                <a:cs typeface="Times New Roman" pitchFamily="18" charset="0"/>
+              </a:rPr>
+              <a:t>Инициализировать </a:t>
+            </a:r>
+            <a:r>
+              <a:rPr lang="ru-RU" sz="2400" dirty="0" err="1" smtClean="0">
+                <a:latin typeface="Times New Roman" pitchFamily="18" charset="0"/>
+                <a:cs typeface="Times New Roman" pitchFamily="18" charset="0"/>
+              </a:rPr>
+              <a:t>плагин</a:t>
+            </a:r>
+            <a:r>
+              <a:rPr lang="ru-RU" sz="2400" dirty="0" smtClean="0">
+                <a:latin typeface="Times New Roman" pitchFamily="18" charset="0"/>
+                <a:cs typeface="Times New Roman" pitchFamily="18" charset="0"/>
+              </a:rPr>
+              <a:t> — после подключения необходимо его правильно вызвать, чтобы он начал работать.</a:t>
+            </a:r>
+          </a:p>
+        </p:txBody>
+      </p:sp>
+    </p:spTree>
+  </p:cSld>
+  <p:clrMapOvr>
+    <a:masterClrMapping/>
+  </p:clrMapOvr>
+</p:sld>
+</file>
+
+<file path=ppt/slides/slide22.xml><?xml version="1.0" encoding="utf-8"?>
+<p:sld xmlns:a="http://schemas.openxmlformats.org/drawingml/2006/main" xmlns:r="http://schemas.openxmlformats.org/officeDocument/2006/relationships" xmlns:p="http://schemas.openxmlformats.org/presentationml/2006/main">
+  <p:cSld>
+    <p:spTree>
+      <p:nvGrpSpPr>
+        <p:cNvPr id="1" name=""/>
+        <p:cNvGrpSpPr/>
+        <p:nvPr/>
+      </p:nvGrpSpPr>
+      <p:grpSpPr>
+        <a:xfrm>
+          <a:off x="0" y="0"/>
+          <a:ext cx="0" cy="0"/>
+          <a:chOff x="0" y="0"/>
+          <a:chExt cx="0" cy="0"/>
+        </a:xfrm>
+      </p:grpSpPr>
+      <p:sp>
+        <p:nvSpPr>
           <p:cNvPr id="11" name="Прямоугольник 10"/>
           <p:cNvSpPr/>
           <p:nvPr/>
@@ -6503,7 +7410,7 @@
 </p:sld>
 </file>
 
-<file path=ppt/slides/slide21.xml><?xml version="1.0" encoding="utf-8"?>
+<file path=ppt/slides/slide23.xml><?xml version="1.0" encoding="utf-8"?>
 <p:sld xmlns:a="http://schemas.openxmlformats.org/drawingml/2006/main" xmlns:r="http://schemas.openxmlformats.org/officeDocument/2006/relationships" xmlns:p="http://schemas.openxmlformats.org/presentationml/2006/main">
   <p:cSld>
     <p:spTree>
@@ -7027,349 +7934,6 @@
 </p:sld>
 </file>
 
-<file path=ppt/slides/slide22.xml><?xml version="1.0" encoding="utf-8"?>
-<p:sld xmlns:a="http://schemas.openxmlformats.org/drawingml/2006/main" xmlns:r="http://schemas.openxmlformats.org/officeDocument/2006/relationships" xmlns:p="http://schemas.openxmlformats.org/presentationml/2006/main">
-  <p:cSld>
-    <p:spTree>
-      <p:nvGrpSpPr>
-        <p:cNvPr id="1" name=""/>
-        <p:cNvGrpSpPr/>
-        <p:nvPr/>
-      </p:nvGrpSpPr>
-      <p:grpSpPr>
-        <a:xfrm>
-          <a:off x="0" y="0"/>
-          <a:ext cx="0" cy="0"/>
-          <a:chOff x="0" y="0"/>
-          <a:chExt cx="0" cy="0"/>
-        </a:xfrm>
-      </p:grpSpPr>
-      <p:sp>
-        <p:nvSpPr>
-          <p:cNvPr id="2" name="Заголовок 1"/>
-          <p:cNvSpPr>
-            <a:spLocks noGrp="1"/>
-          </p:cNvSpPr>
-          <p:nvPr>
-            <p:ph type="title"/>
-          </p:nvPr>
-        </p:nvSpPr>
-        <p:spPr>
-          <a:xfrm>
-            <a:off x="500034" y="-285776"/>
-            <a:ext cx="8229600" cy="1143000"/>
-          </a:xfrm>
-        </p:spPr>
-        <p:txBody>
-          <a:bodyPr/>
-          <a:lstStyle/>
-          <a:p>
-            <a:r>
-              <a:rPr lang="ru-RU" b="1" dirty="0" err="1" smtClean="0"/>
-              <a:t>Плагины</a:t>
-            </a:r>
-            <a:endParaRPr lang="ru-RU" b="1" dirty="0"/>
-          </a:p>
-        </p:txBody>
-      </p:sp>
-      <p:sp>
-        <p:nvSpPr>
-          <p:cNvPr id="13" name="Прямоугольник 12"/>
-          <p:cNvSpPr/>
-          <p:nvPr/>
-        </p:nvSpPr>
-        <p:spPr>
-          <a:xfrm>
-            <a:off x="0" y="642918"/>
-            <a:ext cx="9144000" cy="6001643"/>
-          </a:xfrm>
-          <a:prstGeom prst="rect">
-            <a:avLst/>
-          </a:prstGeom>
-          <a:solidFill>
-            <a:schemeClr val="accent3">
-              <a:lumMod val="20000"/>
-              <a:lumOff val="80000"/>
-            </a:schemeClr>
-          </a:solidFill>
-        </p:spPr>
-        <p:txBody>
-          <a:bodyPr wrap="square">
-            <a:spAutoFit/>
-          </a:bodyPr>
-          <a:lstStyle/>
-          <a:p>
-            <a:pPr algn="just"/>
-            <a:r>
-              <a:rPr lang="ru-RU" sz="2400" b="1" dirty="0" err="1" smtClean="0">
-                <a:latin typeface="Times New Roman" pitchFamily="18" charset="0"/>
-                <a:cs typeface="Times New Roman" pitchFamily="18" charset="0"/>
-              </a:rPr>
-              <a:t>Плагины</a:t>
-            </a:r>
-            <a:r>
-              <a:rPr lang="ru-RU" sz="2400" dirty="0" smtClean="0">
-                <a:latin typeface="Times New Roman" pitchFamily="18" charset="0"/>
-                <a:cs typeface="Times New Roman" pitchFamily="18" charset="0"/>
-              </a:rPr>
-              <a:t> могут значительно улучшить твою работу с программами, но как и любое другое расширение, они имеют свои плюсы и минусы.</a:t>
-            </a:r>
-          </a:p>
-          <a:p>
-            <a:pPr algn="just"/>
-            <a:endParaRPr lang="en-US" sz="2400" b="1" dirty="0" smtClean="0">
-              <a:latin typeface="Times New Roman" pitchFamily="18" charset="0"/>
-              <a:cs typeface="Times New Roman" pitchFamily="18" charset="0"/>
-            </a:endParaRPr>
-          </a:p>
-          <a:p>
-            <a:pPr algn="just"/>
-            <a:r>
-              <a:rPr lang="ru-RU" sz="2400" b="1" dirty="0" smtClean="0">
-                <a:latin typeface="Times New Roman" pitchFamily="18" charset="0"/>
-                <a:cs typeface="Times New Roman" pitchFamily="18" charset="0"/>
-              </a:rPr>
-              <a:t>Преимущества</a:t>
-            </a:r>
-            <a:r>
-              <a:rPr lang="ru-RU" sz="2400" dirty="0" smtClean="0">
-                <a:latin typeface="Times New Roman" pitchFamily="18" charset="0"/>
-                <a:cs typeface="Times New Roman" pitchFamily="18" charset="0"/>
-              </a:rPr>
-              <a:t>:</a:t>
-            </a:r>
-          </a:p>
-          <a:p>
-            <a:pPr algn="just"/>
-            <a:r>
-              <a:rPr lang="ru-RU" sz="2400" b="1" dirty="0" smtClean="0">
-                <a:latin typeface="Times New Roman" pitchFamily="18" charset="0"/>
-                <a:cs typeface="Times New Roman" pitchFamily="18" charset="0"/>
-              </a:rPr>
-              <a:t>Экономия времени и усилий</a:t>
-            </a:r>
-            <a:r>
-              <a:rPr lang="ru-RU" sz="2400" dirty="0" smtClean="0">
-                <a:latin typeface="Times New Roman" pitchFamily="18" charset="0"/>
-                <a:cs typeface="Times New Roman" pitchFamily="18" charset="0"/>
-              </a:rPr>
-              <a:t>: автоматизация рутинных задач.</a:t>
-            </a:r>
-          </a:p>
-          <a:p>
-            <a:pPr algn="just"/>
-            <a:r>
-              <a:rPr lang="ru-RU" sz="2400" b="1" dirty="0" smtClean="0">
-                <a:latin typeface="Times New Roman" pitchFamily="18" charset="0"/>
-                <a:cs typeface="Times New Roman" pitchFamily="18" charset="0"/>
-              </a:rPr>
-              <a:t>Гибкость и индивидуализация</a:t>
-            </a:r>
-            <a:r>
-              <a:rPr lang="ru-RU" sz="2400" dirty="0" smtClean="0">
-                <a:latin typeface="Times New Roman" pitchFamily="18" charset="0"/>
-                <a:cs typeface="Times New Roman" pitchFamily="18" charset="0"/>
-              </a:rPr>
-              <a:t>: настройка программ под личные нужды.</a:t>
-            </a:r>
-          </a:p>
-          <a:p>
-            <a:pPr algn="just"/>
-            <a:r>
-              <a:rPr lang="ru-RU" sz="2400" b="1" dirty="0" smtClean="0">
-                <a:latin typeface="Times New Roman" pitchFamily="18" charset="0"/>
-                <a:cs typeface="Times New Roman" pitchFamily="18" charset="0"/>
-              </a:rPr>
-              <a:t>Легкость и быстрота</a:t>
-            </a:r>
-            <a:r>
-              <a:rPr lang="ru-RU" sz="2400" dirty="0" smtClean="0">
-                <a:latin typeface="Times New Roman" pitchFamily="18" charset="0"/>
-                <a:cs typeface="Times New Roman" pitchFamily="18" charset="0"/>
-              </a:rPr>
-              <a:t>: программы остаются легкими и быстрыми, так как </a:t>
-            </a:r>
-            <a:r>
-              <a:rPr lang="ru-RU" sz="2400" dirty="0" err="1" smtClean="0">
-                <a:latin typeface="Times New Roman" pitchFamily="18" charset="0"/>
-                <a:cs typeface="Times New Roman" pitchFamily="18" charset="0"/>
-              </a:rPr>
-              <a:t>плагины</a:t>
-            </a:r>
-            <a:r>
-              <a:rPr lang="ru-RU" sz="2400" dirty="0" smtClean="0">
-                <a:latin typeface="Times New Roman" pitchFamily="18" charset="0"/>
-                <a:cs typeface="Times New Roman" pitchFamily="18" charset="0"/>
-              </a:rPr>
-              <a:t> можно устанавливать и удалять по необходимости.</a:t>
-            </a:r>
-            <a:endParaRPr lang="en-US" sz="2400" dirty="0" smtClean="0">
-              <a:latin typeface="Times New Roman" pitchFamily="18" charset="0"/>
-              <a:cs typeface="Times New Roman" pitchFamily="18" charset="0"/>
-            </a:endParaRPr>
-          </a:p>
-          <a:p>
-            <a:pPr algn="just"/>
-            <a:endParaRPr lang="ru-RU" sz="2400" dirty="0" smtClean="0">
-              <a:latin typeface="Times New Roman" pitchFamily="18" charset="0"/>
-              <a:cs typeface="Times New Roman" pitchFamily="18" charset="0"/>
-            </a:endParaRPr>
-          </a:p>
-          <a:p>
-            <a:pPr algn="just"/>
-            <a:r>
-              <a:rPr lang="ru-RU" sz="2400" b="1" dirty="0" smtClean="0">
-                <a:latin typeface="Times New Roman" pitchFamily="18" charset="0"/>
-                <a:cs typeface="Times New Roman" pitchFamily="18" charset="0"/>
-              </a:rPr>
-              <a:t>Недостатки</a:t>
-            </a:r>
-            <a:r>
-              <a:rPr lang="ru-RU" sz="2400" dirty="0" smtClean="0">
-                <a:latin typeface="Times New Roman" pitchFamily="18" charset="0"/>
-                <a:cs typeface="Times New Roman" pitchFamily="18" charset="0"/>
-              </a:rPr>
-              <a:t>:</a:t>
-            </a:r>
-          </a:p>
-          <a:p>
-            <a:pPr algn="just"/>
-            <a:r>
-              <a:rPr lang="ru-RU" sz="2400" b="1" dirty="0" smtClean="0">
-                <a:latin typeface="Times New Roman" pitchFamily="18" charset="0"/>
-                <a:cs typeface="Times New Roman" pitchFamily="18" charset="0"/>
-              </a:rPr>
-              <a:t>Возможные проблемы с совместимостью</a:t>
-            </a:r>
-            <a:r>
-              <a:rPr lang="ru-RU" sz="2400" dirty="0" smtClean="0">
-                <a:latin typeface="Times New Roman" pitchFamily="18" charset="0"/>
-                <a:cs typeface="Times New Roman" pitchFamily="18" charset="0"/>
-              </a:rPr>
-              <a:t>: особенно при обновлениях основной программы или </a:t>
-            </a:r>
-            <a:r>
-              <a:rPr lang="ru-RU" sz="2400" dirty="0" err="1" smtClean="0">
-                <a:latin typeface="Times New Roman" pitchFamily="18" charset="0"/>
-                <a:cs typeface="Times New Roman" pitchFamily="18" charset="0"/>
-              </a:rPr>
-              <a:t>плагина</a:t>
-            </a:r>
-            <a:r>
-              <a:rPr lang="ru-RU" sz="2400" dirty="0" smtClean="0">
-                <a:latin typeface="Times New Roman" pitchFamily="18" charset="0"/>
-                <a:cs typeface="Times New Roman" pitchFamily="18" charset="0"/>
-              </a:rPr>
-              <a:t>.</a:t>
-            </a:r>
-          </a:p>
-          <a:p>
-            <a:pPr algn="just"/>
-            <a:r>
-              <a:rPr lang="ru-RU" sz="2400" b="1" dirty="0" smtClean="0">
-                <a:latin typeface="Times New Roman" pitchFamily="18" charset="0"/>
-                <a:cs typeface="Times New Roman" pitchFamily="18" charset="0"/>
-              </a:rPr>
-              <a:t>Риск безопасности</a:t>
-            </a:r>
-            <a:r>
-              <a:rPr lang="ru-RU" sz="2400" dirty="0" smtClean="0">
-                <a:latin typeface="Times New Roman" pitchFamily="18" charset="0"/>
-                <a:cs typeface="Times New Roman" pitchFamily="18" charset="0"/>
-              </a:rPr>
-              <a:t>: при скачивании </a:t>
-            </a:r>
-            <a:r>
-              <a:rPr lang="ru-RU" sz="2400" dirty="0" err="1" smtClean="0">
-                <a:latin typeface="Times New Roman" pitchFamily="18" charset="0"/>
-                <a:cs typeface="Times New Roman" pitchFamily="18" charset="0"/>
-              </a:rPr>
-              <a:t>плагинов</a:t>
-            </a:r>
-            <a:r>
-              <a:rPr lang="ru-RU" sz="2400" dirty="0" smtClean="0">
-                <a:latin typeface="Times New Roman" pitchFamily="18" charset="0"/>
-                <a:cs typeface="Times New Roman" pitchFamily="18" charset="0"/>
-              </a:rPr>
-              <a:t> из ненадежных источников.</a:t>
-            </a:r>
-            <a:endParaRPr lang="ru-RU" sz="2400" dirty="0">
-              <a:latin typeface="Times New Roman" pitchFamily="18" charset="0"/>
-              <a:cs typeface="Times New Roman" pitchFamily="18" charset="0"/>
-            </a:endParaRPr>
-          </a:p>
-        </p:txBody>
-      </p:sp>
-    </p:spTree>
-  </p:cSld>
-  <p:clrMapOvr>
-    <a:masterClrMapping/>
-  </p:clrMapOvr>
-</p:sld>
-</file>
-
-<file path=ppt/slides/slide23.xml><?xml version="1.0" encoding="utf-8"?>
-<p:sld xmlns:a="http://schemas.openxmlformats.org/drawingml/2006/main" xmlns:r="http://schemas.openxmlformats.org/officeDocument/2006/relationships" xmlns:p="http://schemas.openxmlformats.org/presentationml/2006/main">
-  <p:cSld>
-    <p:spTree>
-      <p:nvGrpSpPr>
-        <p:cNvPr id="1" name=""/>
-        <p:cNvGrpSpPr/>
-        <p:nvPr/>
-      </p:nvGrpSpPr>
-      <p:grpSpPr>
-        <a:xfrm>
-          <a:off x="0" y="0"/>
-          <a:ext cx="0" cy="0"/>
-          <a:chOff x="0" y="0"/>
-          <a:chExt cx="0" cy="0"/>
-        </a:xfrm>
-      </p:grpSpPr>
-      <p:sp>
-        <p:nvSpPr>
-          <p:cNvPr id="2" name="Заголовок 1"/>
-          <p:cNvSpPr>
-            <a:spLocks noGrp="1"/>
-          </p:cNvSpPr>
-          <p:nvPr>
-            <p:ph type="title"/>
-          </p:nvPr>
-        </p:nvSpPr>
-        <p:spPr>
-          <a:xfrm>
-            <a:off x="500034" y="2643182"/>
-            <a:ext cx="8229600" cy="1143000"/>
-          </a:xfrm>
-        </p:spPr>
-        <p:txBody>
-          <a:bodyPr>
-            <a:normAutofit fontScale="90000"/>
-          </a:bodyPr>
-          <a:lstStyle/>
-          <a:p>
-            <a:r>
-              <a:rPr lang="ru-RU" dirty="0" smtClean="0"/>
-              <a:t>Дополнительное задание</a:t>
-            </a:r>
-            <a:br>
-              <a:rPr lang="ru-RU" dirty="0" smtClean="0"/>
-            </a:br>
-            <a:r>
-              <a:rPr lang="en-US" dirty="0" err="1" smtClean="0"/>
-              <a:t>EmailJS</a:t>
-            </a:r>
-            <a:endParaRPr lang="ru-RU" dirty="0"/>
-          </a:p>
-        </p:txBody>
-      </p:sp>
-    </p:spTree>
-  </p:cSld>
-  <p:clrMapOvr>
-    <a:masterClrMapping/>
-  </p:clrMapOvr>
-</p:sld>
-</file>
-
 <file path=ppt/slides/slide24.xml><?xml version="1.0" encoding="utf-8"?>
 <p:sld xmlns:a="http://schemas.openxmlformats.org/drawingml/2006/main" xmlns:r="http://schemas.openxmlformats.org/officeDocument/2006/relationships" xmlns:p="http://schemas.openxmlformats.org/presentationml/2006/main">
   <p:cSld>
@@ -7399,7 +7963,7 @@
         </p:nvSpPr>
         <p:spPr>
           <a:xfrm>
-            <a:off x="500034" y="0"/>
+            <a:off x="500034" y="-285776"/>
             <a:ext cx="8229600" cy="1143000"/>
           </a:xfrm>
         </p:spPr>
@@ -7408,8 +7972,8 @@
           <a:lstStyle/>
           <a:p>
             <a:r>
-              <a:rPr lang="ru-RU" b="1" dirty="0" smtClean="0"/>
-              <a:t>Дополнительные материалы</a:t>
+              <a:rPr lang="ru-RU" b="1" dirty="0" err="1" smtClean="0"/>
+              <a:t>Плагины</a:t>
             </a:r>
             <a:endParaRPr lang="ru-RU" b="1" dirty="0"/>
           </a:p>
@@ -7417,21 +7981,24 @@
       </p:sp>
       <p:sp>
         <p:nvSpPr>
-          <p:cNvPr id="4" name="Прямоугольник 3"/>
+          <p:cNvPr id="13" name="Прямоугольник 12"/>
           <p:cNvSpPr/>
           <p:nvPr/>
         </p:nvSpPr>
         <p:spPr>
           <a:xfrm>
-            <a:off x="0" y="1285860"/>
-            <a:ext cx="9144000" cy="4154984"/>
+            <a:off x="0" y="642918"/>
+            <a:ext cx="9144000" cy="6001643"/>
           </a:xfrm>
           <a:prstGeom prst="rect">
             <a:avLst/>
           </a:prstGeom>
-          <a:ln>
-            <a:noFill/>
-          </a:ln>
+          <a:solidFill>
+            <a:schemeClr val="accent3">
+              <a:lumMod val="20000"/>
+              <a:lumOff val="80000"/>
+            </a:schemeClr>
+          </a:solidFill>
         </p:spPr>
         <p:txBody>
           <a:bodyPr wrap="square">
@@ -7441,109 +8008,201 @@
           <a:p>
             <a:pPr algn="just"/>
             <a:r>
-              <a:rPr lang="en-US" sz="2400" b="1" i="1" dirty="0" err="1" smtClean="0">
-                <a:latin typeface="Cambria" pitchFamily="18" charset="0"/>
-              </a:rPr>
-              <a:t>EmailJS</a:t>
-            </a:r>
-            <a:endParaRPr lang="en-US" sz="2400" b="1" i="1" dirty="0" smtClean="0">
-              <a:latin typeface="Cambria" pitchFamily="18" charset="0"/>
+              <a:rPr lang="ru-RU" sz="2400" b="1" dirty="0" err="1" smtClean="0">
+                <a:latin typeface="Times New Roman" pitchFamily="18" charset="0"/>
+                <a:cs typeface="Times New Roman" pitchFamily="18" charset="0"/>
+              </a:rPr>
+              <a:t>Плагины</a:t>
+            </a:r>
+            <a:r>
+              <a:rPr lang="ru-RU" sz="2400" dirty="0" smtClean="0">
+                <a:latin typeface="Times New Roman" pitchFamily="18" charset="0"/>
+                <a:cs typeface="Times New Roman" pitchFamily="18" charset="0"/>
+              </a:rPr>
+              <a:t> могут значительно улучшить твою работу с программами, но как и любое другое расширение, они имеют свои плюсы и минусы.</a:t>
+            </a:r>
+          </a:p>
+          <a:p>
+            <a:pPr algn="just"/>
+            <a:endParaRPr lang="en-US" sz="2400" b="1" dirty="0" smtClean="0">
+              <a:latin typeface="Times New Roman" pitchFamily="18" charset="0"/>
+              <a:cs typeface="Times New Roman" pitchFamily="18" charset="0"/>
             </a:endParaRPr>
           </a:p>
           <a:p>
             <a:pPr algn="just"/>
             <a:r>
-              <a:rPr lang="en-US" sz="2400" b="1" i="1" dirty="0" smtClean="0">
-                <a:latin typeface="Cambria" pitchFamily="18" charset="0"/>
-                <a:hlinkClick r:id="rId2"/>
-              </a:rPr>
-              <a:t>https://www.emailjs.com/</a:t>
-            </a:r>
-            <a:endParaRPr lang="en-US" sz="2400" b="1" i="1" dirty="0" smtClean="0">
-              <a:latin typeface="Cambria" pitchFamily="18" charset="0"/>
+              <a:rPr lang="ru-RU" sz="2400" b="1" dirty="0" smtClean="0">
+                <a:latin typeface="Times New Roman" pitchFamily="18" charset="0"/>
+                <a:cs typeface="Times New Roman" pitchFamily="18" charset="0"/>
+              </a:rPr>
+              <a:t>Преимущества</a:t>
+            </a:r>
+            <a:r>
+              <a:rPr lang="ru-RU" sz="2400" dirty="0" smtClean="0">
+                <a:latin typeface="Times New Roman" pitchFamily="18" charset="0"/>
+                <a:cs typeface="Times New Roman" pitchFamily="18" charset="0"/>
+              </a:rPr>
+              <a:t>:</a:t>
+            </a:r>
+          </a:p>
+          <a:p>
+            <a:pPr algn="just"/>
+            <a:r>
+              <a:rPr lang="ru-RU" sz="2400" b="1" dirty="0" smtClean="0">
+                <a:latin typeface="Times New Roman" pitchFamily="18" charset="0"/>
+                <a:cs typeface="Times New Roman" pitchFamily="18" charset="0"/>
+              </a:rPr>
+              <a:t>Экономия времени и усилий</a:t>
+            </a:r>
+            <a:r>
+              <a:rPr lang="ru-RU" sz="2400" dirty="0" smtClean="0">
+                <a:latin typeface="Times New Roman" pitchFamily="18" charset="0"/>
+                <a:cs typeface="Times New Roman" pitchFamily="18" charset="0"/>
+              </a:rPr>
+              <a:t>: автоматизация рутинных задач.</a:t>
+            </a:r>
+          </a:p>
+          <a:p>
+            <a:pPr algn="just"/>
+            <a:r>
+              <a:rPr lang="ru-RU" sz="2400" b="1" dirty="0" smtClean="0">
+                <a:latin typeface="Times New Roman" pitchFamily="18" charset="0"/>
+                <a:cs typeface="Times New Roman" pitchFamily="18" charset="0"/>
+              </a:rPr>
+              <a:t>Гибкость и индивидуализация</a:t>
+            </a:r>
+            <a:r>
+              <a:rPr lang="ru-RU" sz="2400" dirty="0" smtClean="0">
+                <a:latin typeface="Times New Roman" pitchFamily="18" charset="0"/>
+                <a:cs typeface="Times New Roman" pitchFamily="18" charset="0"/>
+              </a:rPr>
+              <a:t>: настройка программ под личные нужды.</a:t>
+            </a:r>
+          </a:p>
+          <a:p>
+            <a:pPr algn="just"/>
+            <a:r>
+              <a:rPr lang="ru-RU" sz="2400" b="1" dirty="0" smtClean="0">
+                <a:latin typeface="Times New Roman" pitchFamily="18" charset="0"/>
+                <a:cs typeface="Times New Roman" pitchFamily="18" charset="0"/>
+              </a:rPr>
+              <a:t>Легкость и быстрота</a:t>
+            </a:r>
+            <a:r>
+              <a:rPr lang="ru-RU" sz="2400" dirty="0" smtClean="0">
+                <a:latin typeface="Times New Roman" pitchFamily="18" charset="0"/>
+                <a:cs typeface="Times New Roman" pitchFamily="18" charset="0"/>
+              </a:rPr>
+              <a:t>: программы остаются легкими и быстрыми, так как </a:t>
+            </a:r>
+            <a:r>
+              <a:rPr lang="ru-RU" sz="2400" dirty="0" err="1" smtClean="0">
+                <a:latin typeface="Times New Roman" pitchFamily="18" charset="0"/>
+                <a:cs typeface="Times New Roman" pitchFamily="18" charset="0"/>
+              </a:rPr>
+              <a:t>плагины</a:t>
+            </a:r>
+            <a:r>
+              <a:rPr lang="ru-RU" sz="2400" dirty="0" smtClean="0">
+                <a:latin typeface="Times New Roman" pitchFamily="18" charset="0"/>
+                <a:cs typeface="Times New Roman" pitchFamily="18" charset="0"/>
+              </a:rPr>
+              <a:t> можно устанавливать и удалять по необходимости.</a:t>
+            </a:r>
+            <a:endParaRPr lang="en-US" sz="2400" dirty="0" smtClean="0">
+              <a:latin typeface="Times New Roman" pitchFamily="18" charset="0"/>
+              <a:cs typeface="Times New Roman" pitchFamily="18" charset="0"/>
             </a:endParaRPr>
           </a:p>
           <a:p>
             <a:pPr algn="just"/>
-            <a:endParaRPr lang="en-US" sz="2400" b="1" i="1" dirty="0" smtClean="0">
-              <a:latin typeface="Cambria" pitchFamily="18" charset="0"/>
+            <a:endParaRPr lang="ru-RU" sz="2400" dirty="0" smtClean="0">
+              <a:latin typeface="Times New Roman" pitchFamily="18" charset="0"/>
+              <a:cs typeface="Times New Roman" pitchFamily="18" charset="0"/>
             </a:endParaRPr>
           </a:p>
           <a:p>
             <a:pPr algn="just"/>
             <a:r>
-              <a:rPr lang="ru-RU" sz="2400" b="1" i="1" dirty="0" smtClean="0">
-                <a:latin typeface="Cambria" pitchFamily="18" charset="0"/>
-              </a:rPr>
-              <a:t>Формы и </a:t>
-            </a:r>
-            <a:r>
-              <a:rPr lang="en-US" sz="2400" b="1" i="1" dirty="0" err="1" smtClean="0">
-                <a:latin typeface="Cambria" pitchFamily="18" charset="0"/>
-              </a:rPr>
-              <a:t>javascript</a:t>
-            </a:r>
-            <a:r>
-              <a:rPr lang="en-US" sz="2400" b="1" i="1" dirty="0" smtClean="0">
-                <a:latin typeface="Cambria" pitchFamily="18" charset="0"/>
-              </a:rPr>
-              <a:t>. FORM</a:t>
-            </a:r>
-          </a:p>
-          <a:p>
-            <a:pPr algn="just"/>
-            <a:r>
-              <a:rPr lang="en-US" sz="2400" b="1" i="1" dirty="0" smtClean="0">
-                <a:latin typeface="Cambria" pitchFamily="18" charset="0"/>
-                <a:hlinkClick r:id="rId3"/>
-              </a:rPr>
-              <a:t>https://htmlweb.ru/java/forms.php?ysclid=mg3njo7les571227432</a:t>
-            </a:r>
-            <a:endParaRPr lang="en-US" sz="2400" b="1" i="1" dirty="0" smtClean="0">
-              <a:latin typeface="Cambria" pitchFamily="18" charset="0"/>
-            </a:endParaRPr>
-          </a:p>
-          <a:p>
-            <a:pPr algn="just"/>
-            <a:endParaRPr lang="en-US" sz="2400" b="1" i="1" dirty="0" smtClean="0">
-              <a:latin typeface="Cambria" pitchFamily="18" charset="0"/>
-            </a:endParaRPr>
-          </a:p>
-          <a:p>
-            <a:pPr algn="just"/>
-            <a:r>
-              <a:rPr lang="en-US" sz="2400" b="1" i="1" dirty="0" err="1" smtClean="0">
-                <a:latin typeface="Cambria" pitchFamily="18" charset="0"/>
-              </a:rPr>
-              <a:t>EmailJS</a:t>
-            </a:r>
-            <a:r>
-              <a:rPr lang="en-US" sz="2400" b="1" i="1" dirty="0" smtClean="0">
-                <a:latin typeface="Cambria" pitchFamily="18" charset="0"/>
-              </a:rPr>
-              <a:t> Create a contact form</a:t>
-            </a:r>
-            <a:endParaRPr lang="ru-RU" sz="2400" b="1" i="1" dirty="0" smtClean="0">
-              <a:latin typeface="Cambria" pitchFamily="18" charset="0"/>
-            </a:endParaRPr>
-          </a:p>
-          <a:p>
-            <a:pPr algn="just"/>
-            <a:r>
-              <a:rPr lang="en-US" sz="2400" b="1" dirty="0" smtClean="0">
-                <a:latin typeface="Cambria" pitchFamily="18" charset="0"/>
-                <a:hlinkClick r:id="rId4"/>
-              </a:rPr>
-              <a:t>https://www.emailjs.com/docs/tutorial/creating-contact-form/</a:t>
-            </a:r>
-            <a:endParaRPr lang="en-US" sz="2400" b="1" dirty="0" smtClean="0">
-              <a:latin typeface="Cambria" pitchFamily="18" charset="0"/>
-            </a:endParaRPr>
-          </a:p>
-          <a:p>
-            <a:pPr algn="just"/>
-            <a:endParaRPr lang="ru-RU" sz="2400" dirty="0" smtClean="0">
-              <a:latin typeface="Cambria" pitchFamily="18" charset="0"/>
+              <a:rPr lang="ru-RU" sz="2400" b="1" dirty="0" smtClean="0">
+                <a:latin typeface="Times New Roman" pitchFamily="18" charset="0"/>
+                <a:cs typeface="Times New Roman" pitchFamily="18" charset="0"/>
+              </a:rPr>
+              <a:t>Недостатки</a:t>
+            </a:r>
+            <a:r>
+              <a:rPr lang="ru-RU" sz="2400" dirty="0" smtClean="0">
+                <a:latin typeface="Times New Roman" pitchFamily="18" charset="0"/>
+                <a:cs typeface="Times New Roman" pitchFamily="18" charset="0"/>
+              </a:rPr>
+              <a:t>:</a:t>
+            </a:r>
+          </a:p>
+          <a:p>
+            <a:pPr algn="just"/>
+            <a:r>
+              <a:rPr lang="ru-RU" sz="2400" b="1" dirty="0" smtClean="0">
+                <a:latin typeface="Times New Roman" pitchFamily="18" charset="0"/>
+                <a:cs typeface="Times New Roman" pitchFamily="18" charset="0"/>
+              </a:rPr>
+              <a:t>Возможные проблемы с совместимостью</a:t>
+            </a:r>
+            <a:r>
+              <a:rPr lang="ru-RU" sz="2400" dirty="0" smtClean="0">
+                <a:latin typeface="Times New Roman" pitchFamily="18" charset="0"/>
+                <a:cs typeface="Times New Roman" pitchFamily="18" charset="0"/>
+              </a:rPr>
+              <a:t>: особенно при обновлениях основной программы или </a:t>
+            </a:r>
+            <a:r>
+              <a:rPr lang="ru-RU" sz="2400" dirty="0" err="1" smtClean="0">
+                <a:latin typeface="Times New Roman" pitchFamily="18" charset="0"/>
+                <a:cs typeface="Times New Roman" pitchFamily="18" charset="0"/>
+              </a:rPr>
+              <a:t>плагина</a:t>
+            </a:r>
+            <a:r>
+              <a:rPr lang="ru-RU" sz="2400" dirty="0" smtClean="0">
+                <a:latin typeface="Times New Roman" pitchFamily="18" charset="0"/>
+                <a:cs typeface="Times New Roman" pitchFamily="18" charset="0"/>
+              </a:rPr>
+              <a:t>.</a:t>
+            </a:r>
+          </a:p>
+          <a:p>
+            <a:pPr algn="just"/>
+            <a:r>
+              <a:rPr lang="ru-RU" sz="2400" b="1" dirty="0" smtClean="0">
+                <a:latin typeface="Times New Roman" pitchFamily="18" charset="0"/>
+                <a:cs typeface="Times New Roman" pitchFamily="18" charset="0"/>
+              </a:rPr>
+              <a:t>Риск безопасности</a:t>
+            </a:r>
+            <a:r>
+              <a:rPr lang="ru-RU" sz="2400" dirty="0" smtClean="0">
+                <a:latin typeface="Times New Roman" pitchFamily="18" charset="0"/>
+                <a:cs typeface="Times New Roman" pitchFamily="18" charset="0"/>
+              </a:rPr>
+              <a:t>: при скачивании </a:t>
+            </a:r>
+            <a:r>
+              <a:rPr lang="ru-RU" sz="2400" dirty="0" err="1" smtClean="0">
+                <a:latin typeface="Times New Roman" pitchFamily="18" charset="0"/>
+                <a:cs typeface="Times New Roman" pitchFamily="18" charset="0"/>
+              </a:rPr>
+              <a:t>плагинов</a:t>
+            </a:r>
+            <a:r>
+              <a:rPr lang="ru-RU" sz="2400" dirty="0" smtClean="0">
+                <a:latin typeface="Times New Roman" pitchFamily="18" charset="0"/>
+                <a:cs typeface="Times New Roman" pitchFamily="18" charset="0"/>
+              </a:rPr>
+              <a:t> из ненадежных источников.</a:t>
+            </a:r>
+            <a:endParaRPr lang="ru-RU" sz="2400" dirty="0">
+              <a:latin typeface="Times New Roman" pitchFamily="18" charset="0"/>
+              <a:cs typeface="Times New Roman" pitchFamily="18" charset="0"/>
             </a:endParaRPr>
           </a:p>
         </p:txBody>
@@ -7585,360 +8244,28 @@
         </p:nvSpPr>
         <p:spPr>
           <a:xfrm>
-            <a:off x="500034" y="-285776"/>
+            <a:off x="500034" y="2643182"/>
             <a:ext cx="8229600" cy="1143000"/>
           </a:xfrm>
         </p:spPr>
         <p:txBody>
-          <a:bodyPr/>
-          <a:lstStyle/>
-          <a:p>
-            <a:r>
-              <a:rPr lang="ru-RU" b="1" dirty="0" smtClean="0"/>
-              <a:t>Основные разделы сайта</a:t>
-            </a:r>
-            <a:endParaRPr lang="ru-RU" b="1" dirty="0"/>
-          </a:p>
-        </p:txBody>
-      </p:sp>
-      <p:sp>
-        <p:nvSpPr>
-          <p:cNvPr id="14" name="Прямоугольник 13"/>
-          <p:cNvSpPr/>
-          <p:nvPr/>
-        </p:nvSpPr>
-        <p:spPr>
-          <a:xfrm>
-            <a:off x="0" y="857232"/>
-            <a:ext cx="9144000" cy="2286016"/>
-          </a:xfrm>
-          <a:prstGeom prst="rect">
-            <a:avLst/>
-          </a:prstGeom>
-          <a:solidFill>
-            <a:schemeClr val="bg2"/>
-          </a:solidFill>
-          <a:ln>
-            <a:noFill/>
-          </a:ln>
-        </p:spPr>
-        <p:style>
-          <a:lnRef idx="2">
-            <a:schemeClr val="accent1">
-              <a:shade val="50000"/>
-            </a:schemeClr>
-          </a:lnRef>
-          <a:fillRef idx="1">
-            <a:schemeClr val="accent1"/>
-          </a:fillRef>
-          <a:effectRef idx="0">
-            <a:schemeClr val="accent1"/>
-          </a:effectRef>
-          <a:fontRef idx="minor">
-            <a:schemeClr val="lt1"/>
-          </a:fontRef>
-        </p:style>
-        <p:txBody>
-          <a:bodyPr rtlCol="0" anchor="ctr"/>
-          <a:lstStyle/>
-          <a:p>
-            <a:pPr algn="ctr"/>
-            <a:endParaRPr lang="ru-RU"/>
-          </a:p>
-        </p:txBody>
-      </p:sp>
-      <p:sp>
-        <p:nvSpPr>
-          <p:cNvPr id="15" name="Прямоугольник 14"/>
-          <p:cNvSpPr/>
-          <p:nvPr/>
-        </p:nvSpPr>
-        <p:spPr>
-          <a:xfrm>
-            <a:off x="0" y="857232"/>
-            <a:ext cx="6572264" cy="2246769"/>
-          </a:xfrm>
-          <a:prstGeom prst="rect">
-            <a:avLst/>
-          </a:prstGeom>
-        </p:spPr>
-        <p:txBody>
-          <a:bodyPr wrap="square">
-            <a:spAutoFit/>
+          <a:bodyPr>
+            <a:normAutofit fontScale="90000"/>
           </a:bodyPr>
           <a:lstStyle/>
           <a:p>
-            <a:pPr algn="just"/>
-            <a:r>
-              <a:rPr lang="ru-RU" sz="2000" b="1" dirty="0" err="1" smtClean="0">
-                <a:latin typeface="Times New Roman" pitchFamily="18" charset="0"/>
-                <a:cs typeface="Times New Roman" pitchFamily="18" charset="0"/>
-              </a:rPr>
+            <a:r>
+              <a:rPr lang="ru-RU" dirty="0" smtClean="0"/>
+              <a:t>Дополнительное задание</a:t>
+            </a:r>
+            <a:br>
+              <a:rPr lang="ru-RU" dirty="0" smtClean="0"/>
+            </a:br>
+            <a:r>
+              <a:rPr lang="en-US" dirty="0" err="1" smtClean="0"/>
               <a:t>EmailJS</a:t>
             </a:r>
-            <a:r>
-              <a:rPr lang="ru-RU" sz="2000" b="1" dirty="0" smtClean="0">
-                <a:latin typeface="Times New Roman" pitchFamily="18" charset="0"/>
-                <a:cs typeface="Times New Roman" pitchFamily="18" charset="0"/>
-              </a:rPr>
-              <a:t> — </a:t>
-            </a:r>
-            <a:r>
-              <a:rPr lang="ru-RU" sz="2000" dirty="0" smtClean="0">
-                <a:latin typeface="Times New Roman" pitchFamily="18" charset="0"/>
-                <a:cs typeface="Times New Roman" pitchFamily="18" charset="0"/>
-              </a:rPr>
-              <a:t>сервис на основе облачных технологий, который позволяет отправлять электронные письма напрямую из кода </a:t>
-            </a:r>
-            <a:r>
-              <a:rPr lang="ru-RU" sz="2000" dirty="0" err="1" smtClean="0">
-                <a:latin typeface="Times New Roman" pitchFamily="18" charset="0"/>
-                <a:cs typeface="Times New Roman" pitchFamily="18" charset="0"/>
-              </a:rPr>
-              <a:t>JavaScript</a:t>
-            </a:r>
-            <a:r>
-              <a:rPr lang="ru-RU" sz="2000" dirty="0" smtClean="0">
-                <a:latin typeface="Times New Roman" pitchFamily="18" charset="0"/>
-                <a:cs typeface="Times New Roman" pitchFamily="18" charset="0"/>
-              </a:rPr>
-              <a:t> без использования серверного </a:t>
-            </a:r>
-            <a:r>
-              <a:rPr lang="ru-RU" sz="2000" dirty="0" err="1" smtClean="0">
-                <a:latin typeface="Times New Roman" pitchFamily="18" charset="0"/>
-                <a:cs typeface="Times New Roman" pitchFamily="18" charset="0"/>
-              </a:rPr>
-              <a:t>скрипта</a:t>
-            </a:r>
-            <a:r>
-              <a:rPr lang="ru-RU" sz="2000" dirty="0" smtClean="0">
-                <a:latin typeface="Times New Roman" pitchFamily="18" charset="0"/>
-                <a:cs typeface="Times New Roman" pitchFamily="18" charset="0"/>
-              </a:rPr>
-              <a:t>. Это инструмент для разработчиков, которые хотят интегрировать функциональность отправки писем в свои приложения без необходимости настраивать сервер для обработки писем. </a:t>
-            </a:r>
-            <a:endParaRPr lang="ru-RU" sz="2000" dirty="0">
-              <a:latin typeface="Times New Roman" pitchFamily="18" charset="0"/>
-              <a:cs typeface="Times New Roman" pitchFamily="18" charset="0"/>
-            </a:endParaRPr>
-          </a:p>
-        </p:txBody>
-      </p:sp>
-      <p:pic>
-        <p:nvPicPr>
-          <p:cNvPr id="8194" name="Picture 2" descr="EmailJS Guide eM Client"/>
-          <p:cNvPicPr>
-            <a:picLocks noChangeAspect="1" noChangeArrowheads="1"/>
-          </p:cNvPicPr>
-          <p:nvPr/>
-        </p:nvPicPr>
-        <p:blipFill>
-          <a:blip r:embed="rId2"/>
-          <a:srcRect/>
-          <a:stretch>
-            <a:fillRect/>
-          </a:stretch>
-        </p:blipFill>
-        <p:spPr bwMode="auto">
-          <a:xfrm>
-            <a:off x="6572264" y="1142984"/>
-            <a:ext cx="2571736" cy="1381126"/>
-          </a:xfrm>
-          <a:prstGeom prst="rect">
-            <a:avLst/>
-          </a:prstGeom>
-          <a:noFill/>
-        </p:spPr>
-      </p:pic>
-      <p:sp>
-        <p:nvSpPr>
-          <p:cNvPr id="7" name="Прямоугольник 6"/>
-          <p:cNvSpPr/>
-          <p:nvPr/>
-        </p:nvSpPr>
-        <p:spPr>
-          <a:xfrm>
-            <a:off x="0" y="3214686"/>
-            <a:ext cx="9144000" cy="3477875"/>
-          </a:xfrm>
-          <a:prstGeom prst="rect">
-            <a:avLst/>
-          </a:prstGeom>
-          <a:solidFill>
-            <a:schemeClr val="accent3">
-              <a:lumMod val="20000"/>
-              <a:lumOff val="80000"/>
-            </a:schemeClr>
-          </a:solidFill>
-        </p:spPr>
-        <p:txBody>
-          <a:bodyPr wrap="square">
-            <a:spAutoFit/>
-          </a:bodyPr>
-          <a:lstStyle/>
-          <a:p>
-            <a:pPr algn="just"/>
-            <a:r>
-              <a:rPr lang="ru-RU" sz="2000" b="1" dirty="0" smtClean="0">
-                <a:latin typeface="Times New Roman" pitchFamily="18" charset="0"/>
-                <a:cs typeface="Times New Roman" pitchFamily="18" charset="0"/>
-              </a:rPr>
-              <a:t>Функции</a:t>
-            </a:r>
-          </a:p>
-          <a:p>
-            <a:pPr algn="just"/>
-            <a:r>
-              <a:rPr lang="ru-RU" sz="2000" b="1" dirty="0" smtClean="0">
-                <a:latin typeface="Times New Roman" pitchFamily="18" charset="0"/>
-                <a:cs typeface="Times New Roman" pitchFamily="18" charset="0"/>
-              </a:rPr>
-              <a:t>Упрощение разработки. </a:t>
-            </a:r>
-            <a:r>
-              <a:rPr lang="ru-RU" sz="2000" dirty="0" err="1" smtClean="0">
-                <a:latin typeface="Times New Roman" pitchFamily="18" charset="0"/>
-                <a:cs typeface="Times New Roman" pitchFamily="18" charset="0"/>
-              </a:rPr>
-              <a:t>EmailJS</a:t>
-            </a:r>
-            <a:r>
-              <a:rPr lang="ru-RU" sz="2000" dirty="0" smtClean="0">
-                <a:latin typeface="Times New Roman" pitchFamily="18" charset="0"/>
-                <a:cs typeface="Times New Roman" pitchFamily="18" charset="0"/>
-              </a:rPr>
-              <a:t> позволяет отправлять электронные письма напрямую с клиентской стороны, без необходимости настраивать сервер, что упрощает процесс разработки.</a:t>
-            </a:r>
-            <a:endParaRPr lang="en-US" sz="2000" b="1" dirty="0" smtClean="0">
-              <a:latin typeface="Times New Roman" pitchFamily="18" charset="0"/>
-              <a:cs typeface="Times New Roman" pitchFamily="18" charset="0"/>
-            </a:endParaRPr>
-          </a:p>
-          <a:p>
-            <a:pPr algn="just"/>
-            <a:r>
-              <a:rPr lang="ru-RU" sz="2000" b="1" dirty="0" smtClean="0">
-                <a:latin typeface="Times New Roman" pitchFamily="18" charset="0"/>
-                <a:cs typeface="Times New Roman" pitchFamily="18" charset="0"/>
-              </a:rPr>
-              <a:t>Поддержка сервисов электронной почты</a:t>
-            </a:r>
-            <a:r>
-              <a:rPr lang="ru-RU" sz="2000" dirty="0" smtClean="0">
-                <a:latin typeface="Times New Roman" pitchFamily="18" charset="0"/>
-                <a:cs typeface="Times New Roman" pitchFamily="18" charset="0"/>
-              </a:rPr>
-              <a:t> — </a:t>
-            </a:r>
-            <a:r>
-              <a:rPr lang="ru-RU" sz="2000" dirty="0" err="1" smtClean="0">
-                <a:latin typeface="Times New Roman" pitchFamily="18" charset="0"/>
-                <a:cs typeface="Times New Roman" pitchFamily="18" charset="0"/>
-              </a:rPr>
-              <a:t>Gmail</a:t>
-            </a:r>
-            <a:r>
-              <a:rPr lang="ru-RU" sz="2000" dirty="0" smtClean="0">
-                <a:latin typeface="Times New Roman" pitchFamily="18" charset="0"/>
-                <a:cs typeface="Times New Roman" pitchFamily="18" charset="0"/>
-              </a:rPr>
-              <a:t>, </a:t>
-            </a:r>
-            <a:r>
-              <a:rPr lang="ru-RU" sz="2000" dirty="0" err="1" smtClean="0">
-                <a:latin typeface="Times New Roman" pitchFamily="18" charset="0"/>
-                <a:cs typeface="Times New Roman" pitchFamily="18" charset="0"/>
-              </a:rPr>
-              <a:t>Outlook</a:t>
-            </a:r>
-            <a:r>
-              <a:rPr lang="ru-RU" sz="2000" dirty="0" smtClean="0">
-                <a:latin typeface="Times New Roman" pitchFamily="18" charset="0"/>
-                <a:cs typeface="Times New Roman" pitchFamily="18" charset="0"/>
-              </a:rPr>
-              <a:t>, </a:t>
-            </a:r>
-            <a:r>
-              <a:rPr lang="ru-RU" sz="2000" dirty="0" err="1" smtClean="0">
-                <a:latin typeface="Times New Roman" pitchFamily="18" charset="0"/>
-                <a:cs typeface="Times New Roman" pitchFamily="18" charset="0"/>
-              </a:rPr>
-              <a:t>SendGrid</a:t>
-            </a:r>
-            <a:r>
-              <a:rPr lang="ru-RU" sz="2000" dirty="0" smtClean="0">
-                <a:latin typeface="Times New Roman" pitchFamily="18" charset="0"/>
-                <a:cs typeface="Times New Roman" pitchFamily="18" charset="0"/>
-              </a:rPr>
-              <a:t> и других. Сервис позволяет использовать функции этих провайдеров, используя </a:t>
-            </a:r>
-            <a:r>
-              <a:rPr lang="ru-RU" sz="2000" dirty="0" err="1" smtClean="0">
-                <a:latin typeface="Times New Roman" pitchFamily="18" charset="0"/>
-                <a:cs typeface="Times New Roman" pitchFamily="18" charset="0"/>
-              </a:rPr>
-              <a:t>EmailJS</a:t>
-            </a:r>
-            <a:r>
-              <a:rPr lang="ru-RU" sz="2000" dirty="0" smtClean="0">
-                <a:latin typeface="Times New Roman" pitchFamily="18" charset="0"/>
-                <a:cs typeface="Times New Roman" pitchFamily="18" charset="0"/>
-              </a:rPr>
-              <a:t> как интерфейс для отправки писем. </a:t>
-            </a:r>
-          </a:p>
-          <a:p>
-            <a:pPr algn="just"/>
-            <a:r>
-              <a:rPr lang="ru-RU" sz="2000" b="1" dirty="0" smtClean="0">
-                <a:latin typeface="Times New Roman" pitchFamily="18" charset="0"/>
-                <a:cs typeface="Times New Roman" pitchFamily="18" charset="0"/>
-              </a:rPr>
-              <a:t>Поддержка шаблонов</a:t>
-            </a:r>
-            <a:r>
-              <a:rPr lang="ru-RU" sz="2000" dirty="0" smtClean="0">
-                <a:latin typeface="Times New Roman" pitchFamily="18" charset="0"/>
-                <a:cs typeface="Times New Roman" pitchFamily="18" charset="0"/>
-              </a:rPr>
-              <a:t> — разработчики могут создавать настраиваемые шаблоны писем, которые могут включать динамический </a:t>
-            </a:r>
-            <a:r>
-              <a:rPr lang="ru-RU" sz="2000" dirty="0" err="1" smtClean="0">
-                <a:latin typeface="Times New Roman" pitchFamily="18" charset="0"/>
-                <a:cs typeface="Times New Roman" pitchFamily="18" charset="0"/>
-              </a:rPr>
-              <a:t>контент</a:t>
-            </a:r>
-            <a:r>
-              <a:rPr lang="ru-RU" sz="2000" dirty="0" smtClean="0">
-                <a:latin typeface="Times New Roman" pitchFamily="18" charset="0"/>
-                <a:cs typeface="Times New Roman" pitchFamily="18" charset="0"/>
-              </a:rPr>
-              <a:t>. </a:t>
-            </a:r>
-          </a:p>
-          <a:p>
-            <a:pPr algn="just"/>
-            <a:r>
-              <a:rPr lang="ru-RU" sz="2000" b="1" dirty="0" smtClean="0">
-                <a:latin typeface="Times New Roman" pitchFamily="18" charset="0"/>
-                <a:cs typeface="Times New Roman" pitchFamily="18" charset="0"/>
-              </a:rPr>
-              <a:t>Встроенная проверка электронной почты</a:t>
-            </a:r>
-            <a:r>
-              <a:rPr lang="ru-RU" sz="2000" dirty="0" smtClean="0">
-                <a:latin typeface="Times New Roman" pitchFamily="18" charset="0"/>
-                <a:cs typeface="Times New Roman" pitchFamily="18" charset="0"/>
-              </a:rPr>
-              <a:t> — обеспечивает правильный формат адресов.</a:t>
-            </a:r>
-            <a:endParaRPr lang="ru-RU" sz="2000" dirty="0">
-              <a:latin typeface="Times New Roman" pitchFamily="18" charset="0"/>
-              <a:cs typeface="Times New Roman" pitchFamily="18" charset="0"/>
-            </a:endParaRPr>
+            <a:endParaRPr lang="ru-RU" dirty="0"/>
           </a:p>
         </p:txBody>
       </p:sp>
@@ -7979,45 +8306,36 @@
         </p:nvSpPr>
         <p:spPr>
           <a:xfrm>
-            <a:off x="500034" y="-214338"/>
+            <a:off x="500034" y="0"/>
             <a:ext cx="8229600" cy="1143000"/>
           </a:xfrm>
         </p:spPr>
         <p:txBody>
-          <a:bodyPr>
-            <a:normAutofit/>
-          </a:bodyPr>
+          <a:bodyPr/>
           <a:lstStyle/>
           <a:p>
             <a:r>
-              <a:rPr lang="en-US" sz="4000" b="1" dirty="0" smtClean="0"/>
-              <a:t>JavaScript: </a:t>
-            </a:r>
-            <a:r>
-              <a:rPr lang="ru-RU" sz="4000" b="1" dirty="0" smtClean="0"/>
-              <a:t>формы</a:t>
-            </a:r>
-            <a:endParaRPr lang="ru-RU" sz="4000" b="1" dirty="0"/>
-          </a:p>
-        </p:txBody>
-      </p:sp>
-      <p:sp>
-        <p:nvSpPr>
-          <p:cNvPr id="6" name="Прямоугольник 5"/>
+              <a:rPr lang="ru-RU" b="1" dirty="0" smtClean="0"/>
+              <a:t>Дополнительные материалы</a:t>
+            </a:r>
+            <a:endParaRPr lang="ru-RU" b="1" dirty="0"/>
+          </a:p>
+        </p:txBody>
+      </p:sp>
+      <p:sp>
+        <p:nvSpPr>
+          <p:cNvPr id="4" name="Прямоугольник 3"/>
           <p:cNvSpPr/>
           <p:nvPr/>
         </p:nvSpPr>
         <p:spPr>
           <a:xfrm>
-            <a:off x="4643438" y="714356"/>
-            <a:ext cx="4500562" cy="1169551"/>
+            <a:off x="0" y="1285860"/>
+            <a:ext cx="9144000" cy="5262979"/>
           </a:xfrm>
           <a:prstGeom prst="rect">
             <a:avLst/>
           </a:prstGeom>
-          <a:solidFill>
-            <a:schemeClr val="bg2"/>
-          </a:solidFill>
           <a:ln>
             <a:noFill/>
           </a:ln>
@@ -8030,482 +8348,161 @@
           <a:p>
             <a:pPr algn="just"/>
             <a:r>
-              <a:rPr lang="ru-RU" sz="1400" dirty="0" smtClean="0">
-                <a:latin typeface="Times New Roman" pitchFamily="18" charset="0"/>
-                <a:cs typeface="Times New Roman" pitchFamily="18" charset="0"/>
-              </a:rPr>
-              <a:t>Переключатели применяются в том случае, когда необходимо предоставить пользователю возможность выбора одного параметра из группы. В связи с этим переключатели всегда используются в группе. Вся группа должна иметь одно и то же название.</a:t>
-            </a:r>
-          </a:p>
-        </p:txBody>
-      </p:sp>
-      <p:pic>
-        <p:nvPicPr>
-          <p:cNvPr id="7170" name="Picture 2"/>
-          <p:cNvPicPr>
-            <a:picLocks noChangeAspect="1" noChangeArrowheads="1"/>
-          </p:cNvPicPr>
-          <p:nvPr/>
-        </p:nvPicPr>
-        <p:blipFill>
-          <a:blip r:embed="rId2"/>
-          <a:srcRect/>
-          <a:stretch>
-            <a:fillRect/>
-          </a:stretch>
-        </p:blipFill>
-        <p:spPr bwMode="auto">
-          <a:xfrm>
-            <a:off x="4643439" y="1785926"/>
-            <a:ext cx="4500562" cy="600075"/>
-          </a:xfrm>
-          <a:prstGeom prst="rect">
-            <a:avLst/>
-          </a:prstGeom>
-          <a:noFill/>
-          <a:ln w="9525">
-            <a:noFill/>
-            <a:miter lim="800000"/>
-            <a:headEnd/>
-            <a:tailEnd/>
-          </a:ln>
-          <a:effectLst/>
-        </p:spPr>
-      </p:pic>
-      <p:pic>
-        <p:nvPicPr>
-          <p:cNvPr id="7171" name="Picture 3"/>
-          <p:cNvPicPr>
-            <a:picLocks noChangeAspect="1" noChangeArrowheads="1"/>
-          </p:cNvPicPr>
-          <p:nvPr/>
-        </p:nvPicPr>
-        <p:blipFill>
-          <a:blip r:embed="rId3"/>
-          <a:srcRect/>
-          <a:stretch>
-            <a:fillRect/>
-          </a:stretch>
-        </p:blipFill>
-        <p:spPr bwMode="auto">
-          <a:xfrm>
-            <a:off x="4911420" y="3000372"/>
-            <a:ext cx="4232580" cy="1485906"/>
-          </a:xfrm>
-          <a:prstGeom prst="rect">
-            <a:avLst/>
-          </a:prstGeom>
-          <a:noFill/>
-          <a:ln w="9525">
-            <a:noFill/>
-            <a:miter lim="800000"/>
-            <a:headEnd/>
-            <a:tailEnd/>
-          </a:ln>
-          <a:effectLst/>
-        </p:spPr>
-      </p:pic>
-      <p:sp>
-        <p:nvSpPr>
-          <p:cNvPr id="12" name="Прямоугольник 11"/>
-          <p:cNvSpPr/>
-          <p:nvPr/>
-        </p:nvSpPr>
-        <p:spPr>
-          <a:xfrm>
-            <a:off x="4857752" y="2500306"/>
-            <a:ext cx="4286248" cy="369332"/>
-          </a:xfrm>
-          <a:prstGeom prst="rect">
-            <a:avLst/>
-          </a:prstGeom>
-          <a:solidFill>
-            <a:schemeClr val="accent3">
-              <a:lumMod val="20000"/>
-              <a:lumOff val="80000"/>
-            </a:schemeClr>
-          </a:solidFill>
-        </p:spPr>
-        <p:txBody>
-          <a:bodyPr wrap="square">
-            <a:spAutoFit/>
-          </a:bodyPr>
-          <a:lstStyle/>
-          <a:p>
-            <a:pPr algn="ctr"/>
-            <a:r>
-              <a:rPr lang="ru-RU" b="1" dirty="0" smtClean="0">
-                <a:latin typeface="Times New Roman" pitchFamily="18" charset="0"/>
-                <a:cs typeface="Times New Roman" pitchFamily="18" charset="0"/>
-              </a:rPr>
-              <a:t>Создание переключателя</a:t>
-            </a:r>
-            <a:endParaRPr lang="ru-RU" dirty="0"/>
-          </a:p>
-        </p:txBody>
-      </p:sp>
-      <p:sp>
-        <p:nvSpPr>
-          <p:cNvPr id="13" name="Прямоугольник 12"/>
-          <p:cNvSpPr/>
-          <p:nvPr/>
-        </p:nvSpPr>
-        <p:spPr>
-          <a:xfrm>
-            <a:off x="4857752" y="4429132"/>
-            <a:ext cx="4286248" cy="523220"/>
-          </a:xfrm>
-          <a:prstGeom prst="rect">
-            <a:avLst/>
-          </a:prstGeom>
-          <a:solidFill>
-            <a:schemeClr val="accent3">
-              <a:lumMod val="20000"/>
-              <a:lumOff val="80000"/>
-            </a:schemeClr>
-          </a:solidFill>
-        </p:spPr>
-        <p:txBody>
-          <a:bodyPr wrap="square">
-            <a:spAutoFit/>
-          </a:bodyPr>
-          <a:lstStyle/>
-          <a:p>
-            <a:pPr algn="ctr"/>
-            <a:r>
-              <a:rPr lang="ru-RU" sz="1400" b="1" dirty="0" smtClean="0">
-                <a:latin typeface="Times New Roman" pitchFamily="18" charset="0"/>
-                <a:cs typeface="Times New Roman" pitchFamily="18" charset="0"/>
-              </a:rPr>
-              <a:t>Функция для получения значения переключателя и вывода на экран</a:t>
-            </a:r>
-            <a:endParaRPr lang="ru-RU" sz="1400" dirty="0"/>
-          </a:p>
-        </p:txBody>
-      </p:sp>
-      <p:pic>
-        <p:nvPicPr>
-          <p:cNvPr id="8" name="Picture 5"/>
-          <p:cNvPicPr>
-            <a:picLocks noChangeAspect="1" noChangeArrowheads="1"/>
-          </p:cNvPicPr>
-          <p:nvPr/>
-        </p:nvPicPr>
-        <p:blipFill>
-          <a:blip r:embed="rId4"/>
-          <a:srcRect/>
-          <a:stretch>
-            <a:fillRect/>
-          </a:stretch>
-        </p:blipFill>
-        <p:spPr bwMode="auto">
-          <a:xfrm>
-            <a:off x="0" y="2000240"/>
-            <a:ext cx="3905250" cy="1095375"/>
-          </a:xfrm>
-          <a:prstGeom prst="rect">
-            <a:avLst/>
-          </a:prstGeom>
-          <a:noFill/>
-          <a:ln w="9525">
-            <a:noFill/>
-            <a:miter lim="800000"/>
-            <a:headEnd/>
-            <a:tailEnd/>
-          </a:ln>
-          <a:effectLst/>
-        </p:spPr>
-      </p:pic>
-      <p:sp>
-        <p:nvSpPr>
-          <p:cNvPr id="9" name="Прямоугольник 8"/>
-          <p:cNvSpPr/>
-          <p:nvPr/>
-        </p:nvSpPr>
-        <p:spPr>
-          <a:xfrm>
-            <a:off x="0" y="714356"/>
-            <a:ext cx="4572000" cy="1169551"/>
-          </a:xfrm>
-          <a:prstGeom prst="rect">
-            <a:avLst/>
-          </a:prstGeom>
-          <a:solidFill>
-            <a:schemeClr val="bg2"/>
-          </a:solidFill>
-        </p:spPr>
-        <p:txBody>
-          <a:bodyPr>
-            <a:spAutoFit/>
-          </a:bodyPr>
-          <a:lstStyle/>
-          <a:p>
-            <a:pPr algn="just"/>
-            <a:r>
-              <a:rPr lang="ru-RU" sz="1400" b="1" dirty="0" smtClean="0">
-                <a:latin typeface="Times New Roman" pitchFamily="18" charset="0"/>
-                <a:cs typeface="Times New Roman" pitchFamily="18" charset="0"/>
-              </a:rPr>
-              <a:t>Элемент &lt;</a:t>
-            </a:r>
-            <a:r>
-              <a:rPr lang="ru-RU" sz="1400" b="1" dirty="0" err="1" smtClean="0">
-                <a:latin typeface="Times New Roman" pitchFamily="18" charset="0"/>
-                <a:cs typeface="Times New Roman" pitchFamily="18" charset="0"/>
-              </a:rPr>
-              <a:t>select</a:t>
-            </a:r>
-            <a:r>
-              <a:rPr lang="ru-RU" sz="1400" b="1" dirty="0" smtClean="0">
-                <a:latin typeface="Times New Roman" pitchFamily="18" charset="0"/>
-                <a:cs typeface="Times New Roman" pitchFamily="18" charset="0"/>
-              </a:rPr>
-              <a:t>&gt; в </a:t>
-            </a:r>
-            <a:r>
-              <a:rPr lang="ru-RU" sz="1400" b="1" dirty="0" err="1" smtClean="0">
-                <a:latin typeface="Times New Roman" pitchFamily="18" charset="0"/>
-                <a:cs typeface="Times New Roman" pitchFamily="18" charset="0"/>
-              </a:rPr>
-              <a:t>JavaScript</a:t>
-            </a:r>
-            <a:r>
-              <a:rPr lang="ru-RU" sz="1400" dirty="0" smtClean="0">
-                <a:latin typeface="Times New Roman" pitchFamily="18" charset="0"/>
-                <a:cs typeface="Times New Roman" pitchFamily="18" charset="0"/>
-              </a:rPr>
-              <a:t> — компонент форм на </a:t>
-            </a:r>
-            <a:r>
-              <a:rPr lang="ru-RU" sz="1400" dirty="0" err="1" smtClean="0">
-                <a:latin typeface="Times New Roman" pitchFamily="18" charset="0"/>
-                <a:cs typeface="Times New Roman" pitchFamily="18" charset="0"/>
-              </a:rPr>
-              <a:t>веб-страницах</a:t>
-            </a:r>
-            <a:r>
-              <a:rPr lang="ru-RU" sz="1400" dirty="0" smtClean="0">
-                <a:latin typeface="Times New Roman" pitchFamily="18" charset="0"/>
-                <a:cs typeface="Times New Roman" pitchFamily="18" charset="0"/>
-              </a:rPr>
-              <a:t>, представляющий </a:t>
-            </a:r>
-            <a:r>
-              <a:rPr lang="ru-RU" sz="1400" b="1" dirty="0" smtClean="0">
-                <a:latin typeface="Times New Roman" pitchFamily="18" charset="0"/>
-                <a:cs typeface="Times New Roman" pitchFamily="18" charset="0"/>
-              </a:rPr>
-              <a:t>выпадающий список с вариантами выбора</a:t>
-            </a:r>
-            <a:r>
-              <a:rPr lang="ru-RU" sz="1400" dirty="0" smtClean="0">
-                <a:latin typeface="Times New Roman" pitchFamily="18" charset="0"/>
-                <a:cs typeface="Times New Roman" pitchFamily="18" charset="0"/>
-              </a:rPr>
-              <a:t>. Используется для отображения списка предопределённых значений, где пользователь может выбрать нужное.</a:t>
-            </a:r>
-            <a:endParaRPr lang="ru-RU" sz="1400" dirty="0">
-              <a:latin typeface="Times New Roman" pitchFamily="18" charset="0"/>
-              <a:cs typeface="Times New Roman" pitchFamily="18" charset="0"/>
+              <a:rPr lang="en-US" sz="2400" b="1" i="1" dirty="0" err="1" smtClean="0">
+                <a:latin typeface="Cambria" pitchFamily="18" charset="0"/>
+              </a:rPr>
+              <a:t>EmailJS</a:t>
+            </a:r>
+            <a:endParaRPr lang="en-US" sz="2400" b="1" i="1" dirty="0" smtClean="0">
+              <a:latin typeface="Cambria" pitchFamily="18" charset="0"/>
             </a:endParaRPr>
           </a:p>
-        </p:txBody>
-      </p:sp>
-      <p:pic>
-        <p:nvPicPr>
-          <p:cNvPr id="1026" name="Picture 2"/>
-          <p:cNvPicPr>
-            <a:picLocks noChangeAspect="1" noChangeArrowheads="1"/>
-          </p:cNvPicPr>
-          <p:nvPr/>
-        </p:nvPicPr>
-        <p:blipFill>
-          <a:blip r:embed="rId5"/>
-          <a:srcRect/>
-          <a:stretch>
-            <a:fillRect/>
-          </a:stretch>
-        </p:blipFill>
-        <p:spPr bwMode="auto">
-          <a:xfrm>
-            <a:off x="0" y="3448050"/>
-            <a:ext cx="4762500" cy="3409950"/>
-          </a:xfrm>
-          <a:prstGeom prst="rect">
-            <a:avLst/>
-          </a:prstGeom>
-          <a:noFill/>
-          <a:ln w="9525">
-            <a:noFill/>
-            <a:miter lim="800000"/>
-            <a:headEnd/>
-            <a:tailEnd/>
-          </a:ln>
-          <a:effectLst/>
-        </p:spPr>
-      </p:pic>
-      <p:sp>
-        <p:nvSpPr>
-          <p:cNvPr id="1027" name="Rectangle 3"/>
-          <p:cNvSpPr>
-            <a:spLocks noChangeArrowheads="1"/>
-          </p:cNvSpPr>
-          <p:nvPr/>
-        </p:nvSpPr>
-        <p:spPr bwMode="auto">
-          <a:xfrm>
-            <a:off x="4786314" y="5929330"/>
-            <a:ext cx="4357686" cy="923330"/>
-          </a:xfrm>
-          <a:prstGeom prst="rect">
-            <a:avLst/>
-          </a:prstGeom>
-          <a:noFill/>
-          <a:ln w="9525">
-            <a:noFill/>
-            <a:miter lim="800000"/>
-            <a:headEnd/>
-            <a:tailEnd/>
-          </a:ln>
-          <a:effectLst/>
-        </p:spPr>
-        <p:txBody>
-          <a:bodyPr vert="horz" wrap="square" lIns="91440" tIns="45720" rIns="91440" bIns="45720" numCol="1" anchor="ctr" anchorCtr="0" compatLnSpc="1">
-            <a:prstTxWarp prst="textNoShape">
-              <a:avLst/>
-            </a:prstTxWarp>
-            <a:spAutoFit/>
-          </a:bodyPr>
-          <a:lstStyle/>
-          <a:p>
-            <a:pPr marL="0" marR="0" lvl="0" indent="0" algn="just" defTabSz="914400" rtl="0" eaLnBrk="1" fontAlgn="base" latinLnBrk="0" hangingPunct="1">
-              <a:lnSpc>
-                <a:spcPct val="100000"/>
-              </a:lnSpc>
-              <a:spcBef>
-                <a:spcPct val="0"/>
-              </a:spcBef>
-              <a:spcAft>
-                <a:spcPct val="0"/>
-              </a:spcAft>
-              <a:buClrTx/>
-              <a:buSzTx/>
-              <a:buFontTx/>
-              <a:buNone/>
-              <a:tabLst/>
-            </a:pPr>
-            <a:r>
-              <a:rPr kumimoji="0" lang="ru-RU" b="1" i="1" u="none" strike="noStrike" cap="none" normalizeH="0" baseline="0" dirty="0" smtClean="0">
-                <a:ln>
-                  <a:noFill/>
-                </a:ln>
-                <a:solidFill>
-                  <a:srgbClr val="000000"/>
-                </a:solidFill>
-                <a:effectLst/>
-                <a:latin typeface="Times New Roman" pitchFamily="18" charset="0"/>
-                <a:cs typeface="Times New Roman" pitchFamily="18" charset="0"/>
-              </a:rPr>
-              <a:t>Для ввода простейшей текстовой информации предназначены элементы &lt;</a:t>
-            </a:r>
-            <a:r>
-              <a:rPr kumimoji="0" lang="ru-RU" b="1" i="1" u="none" strike="noStrike" cap="none" normalizeH="0" baseline="0" dirty="0" err="1" smtClean="0">
-                <a:ln>
-                  <a:noFill/>
-                </a:ln>
-                <a:solidFill>
-                  <a:srgbClr val="000000"/>
-                </a:solidFill>
-                <a:effectLst/>
-                <a:latin typeface="Times New Roman" pitchFamily="18" charset="0"/>
-                <a:cs typeface="Times New Roman" pitchFamily="18" charset="0"/>
-              </a:rPr>
-              <a:t>input</a:t>
-            </a:r>
-            <a:r>
-              <a:rPr kumimoji="0" lang="ru-RU" b="1" i="1" u="none" strike="noStrike" cap="none" normalizeH="0" baseline="0" dirty="0" smtClean="0">
-                <a:ln>
-                  <a:noFill/>
-                </a:ln>
-                <a:solidFill>
-                  <a:srgbClr val="000000"/>
-                </a:solidFill>
-                <a:effectLst/>
-                <a:latin typeface="Times New Roman" pitchFamily="18" charset="0"/>
-                <a:cs typeface="Times New Roman" pitchFamily="18" charset="0"/>
-              </a:rPr>
-              <a:t> </a:t>
-            </a:r>
-            <a:r>
-              <a:rPr kumimoji="0" lang="ru-RU" b="1" i="1" u="none" strike="noStrike" cap="none" normalizeH="0" baseline="0" dirty="0" err="1" smtClean="0">
-                <a:ln>
-                  <a:noFill/>
-                </a:ln>
-                <a:solidFill>
-                  <a:srgbClr val="000000"/>
-                </a:solidFill>
-                <a:effectLst/>
-                <a:latin typeface="Times New Roman" pitchFamily="18" charset="0"/>
-                <a:cs typeface="Times New Roman" pitchFamily="18" charset="0"/>
-              </a:rPr>
-              <a:t>type=</a:t>
-            </a:r>
-            <a:r>
-              <a:rPr kumimoji="0" lang="ru-RU" b="1" i="1" u="none" strike="noStrike" cap="none" normalizeH="0" baseline="0" dirty="0" smtClean="0">
-                <a:ln>
-                  <a:noFill/>
-                </a:ln>
-                <a:solidFill>
-                  <a:srgbClr val="000000"/>
-                </a:solidFill>
-                <a:effectLst/>
-                <a:latin typeface="Times New Roman" pitchFamily="18" charset="0"/>
-                <a:cs typeface="Times New Roman" pitchFamily="18" charset="0"/>
-              </a:rPr>
-              <a:t>"</a:t>
-            </a:r>
-            <a:r>
-              <a:rPr kumimoji="0" lang="ru-RU" b="1" i="1" u="none" strike="noStrike" cap="none" normalizeH="0" baseline="0" dirty="0" err="1" smtClean="0">
-                <a:ln>
-                  <a:noFill/>
-                </a:ln>
-                <a:solidFill>
-                  <a:srgbClr val="000000"/>
-                </a:solidFill>
-                <a:effectLst/>
-                <a:latin typeface="Times New Roman" pitchFamily="18" charset="0"/>
-                <a:cs typeface="Times New Roman" pitchFamily="18" charset="0"/>
-              </a:rPr>
-              <a:t>text</a:t>
-            </a:r>
-            <a:r>
-              <a:rPr kumimoji="0" lang="ru-RU" b="1" i="1" u="none" strike="noStrike" cap="none" normalizeH="0" baseline="0" dirty="0" smtClean="0">
-                <a:ln>
-                  <a:noFill/>
-                </a:ln>
-                <a:solidFill>
-                  <a:srgbClr val="000000"/>
-                </a:solidFill>
-                <a:effectLst/>
-                <a:latin typeface="Times New Roman" pitchFamily="18" charset="0"/>
-                <a:cs typeface="Times New Roman" pitchFamily="18" charset="0"/>
-              </a:rPr>
-              <a:t>"</a:t>
-            </a:r>
-            <a:r>
-              <a:rPr kumimoji="0" lang="ru-RU" b="1" i="1" u="none" strike="noStrike" cap="none" normalizeH="0" baseline="0" dirty="0" smtClean="0">
-                <a:ln>
-                  <a:noFill/>
-                </a:ln>
-                <a:solidFill>
-                  <a:schemeClr val="tx1"/>
-                </a:solidFill>
-                <a:effectLst/>
-                <a:latin typeface="Times New Roman" pitchFamily="18" charset="0"/>
-                <a:cs typeface="Times New Roman" pitchFamily="18" charset="0"/>
-              </a:rPr>
-              <a:t> </a:t>
-            </a:r>
+          <a:p>
+            <a:pPr algn="just"/>
+            <a:r>
+              <a:rPr lang="en-US" sz="2400" b="1" i="1" dirty="0" smtClean="0">
+                <a:latin typeface="Cambria" pitchFamily="18" charset="0"/>
+                <a:hlinkClick r:id="rId2"/>
+              </a:rPr>
+              <a:t>https://www.emailjs.com/</a:t>
+            </a:r>
+            <a:endParaRPr lang="en-US" sz="2400" b="1" i="1" dirty="0" smtClean="0">
+              <a:latin typeface="Cambria" pitchFamily="18" charset="0"/>
+            </a:endParaRPr>
+          </a:p>
+          <a:p>
+            <a:pPr algn="just"/>
+            <a:endParaRPr lang="en-US" sz="2400" b="1" i="1" dirty="0" smtClean="0">
+              <a:latin typeface="Cambria" pitchFamily="18" charset="0"/>
+            </a:endParaRPr>
+          </a:p>
+          <a:p>
+            <a:pPr algn="just"/>
+            <a:r>
+              <a:rPr lang="ru-RU" sz="2400" b="1" i="1" dirty="0" smtClean="0">
+                <a:latin typeface="Cambria" pitchFamily="18" charset="0"/>
+              </a:rPr>
+              <a:t>Формы и </a:t>
+            </a:r>
+            <a:r>
+              <a:rPr lang="en-US" sz="2400" b="1" i="1" dirty="0" err="1" smtClean="0">
+                <a:latin typeface="Cambria" pitchFamily="18" charset="0"/>
+              </a:rPr>
+              <a:t>javascript</a:t>
+            </a:r>
+            <a:r>
+              <a:rPr lang="en-US" sz="2400" b="1" i="1" dirty="0" smtClean="0">
+                <a:latin typeface="Cambria" pitchFamily="18" charset="0"/>
+              </a:rPr>
+              <a:t>. FORM</a:t>
+            </a:r>
+          </a:p>
+          <a:p>
+            <a:pPr algn="just"/>
+            <a:r>
+              <a:rPr lang="en-US" sz="2400" b="1" i="1" dirty="0" smtClean="0">
+                <a:latin typeface="Cambria" pitchFamily="18" charset="0"/>
+                <a:hlinkClick r:id="rId3"/>
+              </a:rPr>
+              <a:t>https://htmlweb.ru/java/forms.php?ysclid=mg3njo7les571227432</a:t>
+            </a:r>
+            <a:endParaRPr lang="en-US" sz="2400" b="1" i="1" dirty="0" smtClean="0">
+              <a:latin typeface="Cambria" pitchFamily="18" charset="0"/>
+            </a:endParaRPr>
+          </a:p>
+          <a:p>
+            <a:pPr algn="just"/>
+            <a:endParaRPr lang="en-US" sz="2400" b="1" i="1" dirty="0" smtClean="0">
+              <a:latin typeface="Cambria" pitchFamily="18" charset="0"/>
+            </a:endParaRPr>
+          </a:p>
+          <a:p>
+            <a:pPr algn="just"/>
+            <a:r>
+              <a:rPr lang="en-US" sz="2400" b="1" i="1" dirty="0" err="1" smtClean="0">
+                <a:latin typeface="Cambria" pitchFamily="18" charset="0"/>
+              </a:rPr>
+              <a:t>EmailJS</a:t>
+            </a:r>
+            <a:r>
+              <a:rPr lang="en-US" sz="2400" b="1" i="1" dirty="0" smtClean="0">
+                <a:latin typeface="Cambria" pitchFamily="18" charset="0"/>
+              </a:rPr>
+              <a:t> Create a contact form</a:t>
+            </a:r>
+            <a:endParaRPr lang="ru-RU" sz="2400" b="1" i="1" dirty="0" smtClean="0">
+              <a:latin typeface="Cambria" pitchFamily="18" charset="0"/>
+            </a:endParaRPr>
+          </a:p>
+          <a:p>
+            <a:pPr algn="just"/>
+            <a:r>
+              <a:rPr lang="en-US" sz="2400" b="1" dirty="0" smtClean="0">
+                <a:latin typeface="Cambria" pitchFamily="18" charset="0"/>
+                <a:hlinkClick r:id="rId4"/>
+              </a:rPr>
+              <a:t>https://www.emailjs.com/docs/tutorial/creating-contact-form</a:t>
+            </a:r>
+            <a:r>
+              <a:rPr lang="en-US" sz="2400" b="1" dirty="0" smtClean="0">
+                <a:latin typeface="Cambria" pitchFamily="18" charset="0"/>
+                <a:hlinkClick r:id="rId4"/>
+              </a:rPr>
+              <a:t>/</a:t>
+            </a:r>
+            <a:endParaRPr lang="en-US" sz="2400" b="1" dirty="0" smtClean="0">
+              <a:latin typeface="Cambria" pitchFamily="18" charset="0"/>
+            </a:endParaRPr>
+          </a:p>
+          <a:p>
+            <a:pPr algn="just"/>
+            <a:endParaRPr lang="en-US" sz="2400" b="1" dirty="0" smtClean="0">
+              <a:latin typeface="Cambria" pitchFamily="18" charset="0"/>
+            </a:endParaRPr>
+          </a:p>
+          <a:p>
+            <a:pPr algn="just"/>
+            <a:r>
+              <a:rPr lang="en-US" sz="2400" b="1" dirty="0" smtClean="0">
+                <a:latin typeface="Cambria" pitchFamily="18" charset="0"/>
+              </a:rPr>
+              <a:t>Send Email from HTML Form for Free | </a:t>
+            </a:r>
+            <a:r>
+              <a:rPr lang="en-US" sz="2400" b="1" dirty="0" err="1" smtClean="0">
+                <a:latin typeface="Cambria" pitchFamily="18" charset="0"/>
+              </a:rPr>
+              <a:t>EmailJS</a:t>
+            </a:r>
+            <a:endParaRPr lang="en-US" sz="2400" b="1" dirty="0" smtClean="0">
+              <a:latin typeface="Cambria" pitchFamily="18" charset="0"/>
+            </a:endParaRPr>
+          </a:p>
+          <a:p>
+            <a:pPr algn="just"/>
+            <a:r>
+              <a:rPr lang="en-US" sz="2400" b="1" dirty="0" smtClean="0">
+                <a:latin typeface="Cambria" pitchFamily="18" charset="0"/>
+                <a:hlinkClick r:id="rId5"/>
+              </a:rPr>
+              <a:t>https://rutube.ru/video/ddccdfc7cadfc60d3cc6a0af1ded5cc5</a:t>
+            </a:r>
+            <a:r>
+              <a:rPr lang="en-US" sz="2400" b="1" dirty="0" smtClean="0">
+                <a:latin typeface="Cambria" pitchFamily="18" charset="0"/>
+                <a:hlinkClick r:id="rId5"/>
+              </a:rPr>
+              <a:t>/</a:t>
+            </a:r>
+            <a:endParaRPr lang="en-US" sz="2400" b="1" dirty="0" smtClean="0">
+              <a:latin typeface="Cambria" pitchFamily="18" charset="0"/>
+            </a:endParaRPr>
+          </a:p>
+          <a:p>
+            <a:pPr algn="just"/>
+            <a:endParaRPr lang="en-US" sz="2400" b="1" dirty="0" smtClean="0">
+              <a:latin typeface="Cambria" pitchFamily="18" charset="0"/>
+            </a:endParaRPr>
           </a:p>
         </p:txBody>
       </p:sp>
@@ -8555,15 +8552,140 @@
           <a:lstStyle/>
           <a:p>
             <a:r>
-              <a:rPr lang="en-US" b="1" dirty="0" smtClean="0"/>
-              <a:t>Email Services</a:t>
-            </a:r>
+              <a:rPr lang="ru-RU" b="1" dirty="0" smtClean="0"/>
+              <a:t>Основные разделы сайта</a:t>
+            </a:r>
+            <a:endParaRPr lang="ru-RU" b="1" dirty="0"/>
+          </a:p>
+        </p:txBody>
+      </p:sp>
+      <p:sp>
+        <p:nvSpPr>
+          <p:cNvPr id="14" name="Прямоугольник 13"/>
+          <p:cNvSpPr/>
+          <p:nvPr/>
+        </p:nvSpPr>
+        <p:spPr>
+          <a:xfrm>
+            <a:off x="0" y="857232"/>
+            <a:ext cx="9144000" cy="2286016"/>
+          </a:xfrm>
+          <a:prstGeom prst="rect">
+            <a:avLst/>
+          </a:prstGeom>
+          <a:solidFill>
+            <a:schemeClr val="bg2"/>
+          </a:solidFill>
+          <a:ln>
+            <a:noFill/>
+          </a:ln>
+        </p:spPr>
+        <p:style>
+          <a:lnRef idx="2">
+            <a:schemeClr val="accent1">
+              <a:shade val="50000"/>
+            </a:schemeClr>
+          </a:lnRef>
+          <a:fillRef idx="1">
+            <a:schemeClr val="accent1"/>
+          </a:fillRef>
+          <a:effectRef idx="0">
+            <a:schemeClr val="accent1"/>
+          </a:effectRef>
+          <a:fontRef idx="minor">
+            <a:schemeClr val="lt1"/>
+          </a:fontRef>
+        </p:style>
+        <p:txBody>
+          <a:bodyPr rtlCol="0" anchor="ctr"/>
+          <a:lstStyle/>
+          <a:p>
+            <a:pPr algn="ctr"/>
+            <a:endParaRPr lang="ru-RU"/>
+          </a:p>
+        </p:txBody>
+      </p:sp>
+      <p:sp>
+        <p:nvSpPr>
+          <p:cNvPr id="15" name="Прямоугольник 14"/>
+          <p:cNvSpPr/>
+          <p:nvPr/>
+        </p:nvSpPr>
+        <p:spPr>
+          <a:xfrm>
+            <a:off x="0" y="857232"/>
+            <a:ext cx="6572264" cy="2246769"/>
+          </a:xfrm>
+          <a:prstGeom prst="rect">
+            <a:avLst/>
+          </a:prstGeom>
+        </p:spPr>
+        <p:txBody>
+          <a:bodyPr wrap="square">
+            <a:spAutoFit/>
+          </a:bodyPr>
+          <a:lstStyle/>
+          <a:p>
+            <a:pPr algn="just"/>
+            <a:r>
+              <a:rPr lang="ru-RU" sz="2000" b="1" dirty="0" err="1" smtClean="0">
+                <a:latin typeface="Times New Roman" pitchFamily="18" charset="0"/>
+                <a:cs typeface="Times New Roman" pitchFamily="18" charset="0"/>
+              </a:rPr>
+              <a:t>EmailJS</a:t>
+            </a:r>
+            <a:r>
+              <a:rPr lang="ru-RU" sz="2000" b="1" dirty="0" smtClean="0">
+                <a:latin typeface="Times New Roman" pitchFamily="18" charset="0"/>
+                <a:cs typeface="Times New Roman" pitchFamily="18" charset="0"/>
+              </a:rPr>
+              <a:t> — </a:t>
+            </a:r>
+            <a:r>
+              <a:rPr lang="ru-RU" sz="2000" dirty="0" smtClean="0">
+                <a:latin typeface="Times New Roman" pitchFamily="18" charset="0"/>
+                <a:cs typeface="Times New Roman" pitchFamily="18" charset="0"/>
+              </a:rPr>
+              <a:t>сервис на основе облачных технологий, который позволяет отправлять электронные письма напрямую из кода </a:t>
+            </a:r>
+            <a:r>
+              <a:rPr lang="ru-RU" sz="2000" dirty="0" err="1" smtClean="0">
+                <a:latin typeface="Times New Roman" pitchFamily="18" charset="0"/>
+                <a:cs typeface="Times New Roman" pitchFamily="18" charset="0"/>
+              </a:rPr>
+              <a:t>JavaScript</a:t>
+            </a:r>
+            <a:r>
+              <a:rPr lang="ru-RU" sz="2000" dirty="0" smtClean="0">
+                <a:latin typeface="Times New Roman" pitchFamily="18" charset="0"/>
+                <a:cs typeface="Times New Roman" pitchFamily="18" charset="0"/>
+              </a:rPr>
+              <a:t> без использования серверного </a:t>
+            </a:r>
+            <a:r>
+              <a:rPr lang="ru-RU" sz="2000" dirty="0" err="1" smtClean="0">
+                <a:latin typeface="Times New Roman" pitchFamily="18" charset="0"/>
+                <a:cs typeface="Times New Roman" pitchFamily="18" charset="0"/>
+              </a:rPr>
+              <a:t>скрипта</a:t>
+            </a:r>
+            <a:r>
+              <a:rPr lang="ru-RU" sz="2000" dirty="0" smtClean="0">
+                <a:latin typeface="Times New Roman" pitchFamily="18" charset="0"/>
+                <a:cs typeface="Times New Roman" pitchFamily="18" charset="0"/>
+              </a:rPr>
+              <a:t>. Это инструмент для разработчиков, которые хотят интегрировать функциональность отправки писем в свои приложения без необходимости настраивать сервер для обработки писем. </a:t>
+            </a:r>
+            <a:endParaRPr lang="ru-RU" sz="2000" dirty="0">
+              <a:latin typeface="Times New Roman" pitchFamily="18" charset="0"/>
+              <a:cs typeface="Times New Roman" pitchFamily="18" charset="0"/>
+            </a:endParaRPr>
           </a:p>
         </p:txBody>
       </p:sp>
       <p:pic>
         <p:nvPicPr>
-          <p:cNvPr id="24578" name="Picture 2"/>
+          <p:cNvPr id="8194" name="Picture 2" descr="EmailJS Guide eM Client"/>
           <p:cNvPicPr>
             <a:picLocks noChangeAspect="1" noChangeArrowheads="1"/>
           </p:cNvPicPr>
@@ -8578,150 +8700,25 @@
         </p:blipFill>
         <p:spPr bwMode="auto">
           <a:xfrm>
-            <a:off x="0" y="2571744"/>
-            <a:ext cx="3038475" cy="2276475"/>
+            <a:off x="6572264" y="1142984"/>
+            <a:ext cx="2571736" cy="1381126"/>
           </a:xfrm>
           <a:prstGeom prst="rect">
             <a:avLst/>
           </a:prstGeom>
           <a:noFill/>
-          <a:ln w="9525">
-            <a:noFill/>
-            <a:miter lim="800000"/>
-            <a:headEnd/>
-            <a:tailEnd/>
-          </a:ln>
-          <a:effectLst/>
         </p:spPr>
       </p:pic>
-      <p:pic>
-        <p:nvPicPr>
-          <p:cNvPr id="24579" name="Picture 3"/>
-          <p:cNvPicPr>
-            <a:picLocks noChangeAspect="1" noChangeArrowheads="1"/>
-          </p:cNvPicPr>
-          <p:nvPr/>
-        </p:nvPicPr>
-        <p:blipFill>
-          <a:blip r:embed="rId3"/>
-          <a:srcRect/>
-          <a:stretch>
-            <a:fillRect/>
-          </a:stretch>
-        </p:blipFill>
-        <p:spPr bwMode="auto">
-          <a:xfrm>
-            <a:off x="5429256" y="2660657"/>
-            <a:ext cx="3714744" cy="4197343"/>
-          </a:xfrm>
-          <a:prstGeom prst="rect">
-            <a:avLst/>
-          </a:prstGeom>
-          <a:noFill/>
-          <a:ln w="9525">
-            <a:noFill/>
-            <a:miter lim="800000"/>
-            <a:headEnd/>
-            <a:tailEnd/>
-          </a:ln>
-          <a:effectLst/>
-        </p:spPr>
-      </p:pic>
-      <p:sp>
-        <p:nvSpPr>
-          <p:cNvPr id="9" name="Прямоугольник 8"/>
+      <p:sp>
+        <p:nvSpPr>
+          <p:cNvPr id="7" name="Прямоугольник 6"/>
           <p:cNvSpPr/>
           <p:nvPr/>
         </p:nvSpPr>
         <p:spPr>
           <a:xfrm>
-            <a:off x="0" y="4919008"/>
-            <a:ext cx="4786314" cy="1938992"/>
-          </a:xfrm>
-          <a:prstGeom prst="rect">
-            <a:avLst/>
-          </a:prstGeom>
-        </p:spPr>
-        <p:txBody>
-          <a:bodyPr wrap="square">
-            <a:spAutoFit/>
-          </a:bodyPr>
-          <a:lstStyle/>
-          <a:p>
-            <a:pPr algn="just"/>
-            <a:r>
-              <a:rPr lang="ru-RU" sz="2000" b="1" dirty="0" smtClean="0">
-                <a:latin typeface="Times New Roman" pitchFamily="18" charset="0"/>
-                <a:cs typeface="Times New Roman" pitchFamily="18" charset="0"/>
-              </a:rPr>
-              <a:t>Можно выбрать любую почту, но для взаимодействия с </a:t>
-            </a:r>
-            <a:r>
-              <a:rPr lang="en-US" sz="2000" b="1" dirty="0" smtClean="0">
-                <a:latin typeface="Times New Roman" pitchFamily="18" charset="0"/>
-                <a:cs typeface="Times New Roman" pitchFamily="18" charset="0"/>
-              </a:rPr>
-              <a:t>Mail </a:t>
-            </a:r>
-            <a:r>
-              <a:rPr lang="ru-RU" sz="2000" b="1" dirty="0" smtClean="0">
-                <a:latin typeface="Times New Roman" pitchFamily="18" charset="0"/>
-                <a:cs typeface="Times New Roman" pitchFamily="18" charset="0"/>
-              </a:rPr>
-              <a:t>или </a:t>
-            </a:r>
-            <a:r>
-              <a:rPr lang="en-US" sz="2000" b="1" dirty="0" err="1" smtClean="0">
-                <a:latin typeface="Times New Roman" pitchFamily="18" charset="0"/>
-                <a:cs typeface="Times New Roman" pitchFamily="18" charset="0"/>
-              </a:rPr>
-              <a:t>Yandex</a:t>
-            </a:r>
-            <a:r>
-              <a:rPr lang="en-US" sz="2000" b="1" dirty="0" smtClean="0">
-                <a:latin typeface="Times New Roman" pitchFamily="18" charset="0"/>
-                <a:cs typeface="Times New Roman" pitchFamily="18" charset="0"/>
-              </a:rPr>
-              <a:t> </a:t>
-            </a:r>
-            <a:r>
-              <a:rPr lang="ru-RU" sz="2000" b="1" dirty="0" smtClean="0">
-                <a:latin typeface="Times New Roman" pitchFamily="18" charset="0"/>
-                <a:cs typeface="Times New Roman" pitchFamily="18" charset="0"/>
-              </a:rPr>
-              <a:t>необходимо создать временный пароль для доступа к почте сторонних приложений. (</a:t>
-            </a:r>
-            <a:r>
-              <a:rPr lang="ru-RU" sz="2000" b="1" dirty="0" err="1" smtClean="0">
-                <a:latin typeface="Times New Roman" pitchFamily="18" charset="0"/>
-                <a:cs typeface="Times New Roman" pitchFamily="18" charset="0"/>
-              </a:rPr>
-              <a:t>EmailJS</a:t>
-            </a:r>
-            <a:r>
-              <a:rPr lang="ru-RU" sz="2000" b="1" dirty="0" smtClean="0">
-                <a:latin typeface="Times New Roman" pitchFamily="18" charset="0"/>
-                <a:cs typeface="Times New Roman" pitchFamily="18" charset="0"/>
-              </a:rPr>
-              <a:t> показывает ссылку, где это можно сделать)</a:t>
-            </a:r>
-            <a:endParaRPr lang="ru-RU" sz="2000" dirty="0">
-              <a:latin typeface="Times New Roman" pitchFamily="18" charset="0"/>
-              <a:cs typeface="Times New Roman" pitchFamily="18" charset="0"/>
-            </a:endParaRPr>
-          </a:p>
-        </p:txBody>
-      </p:sp>
-      <p:sp>
-        <p:nvSpPr>
-          <p:cNvPr id="6" name="Прямоугольник 5"/>
-          <p:cNvSpPr/>
-          <p:nvPr/>
-        </p:nvSpPr>
-        <p:spPr>
-          <a:xfrm>
-            <a:off x="0" y="500042"/>
-            <a:ext cx="9144000" cy="2031325"/>
+            <a:off x="0" y="3214686"/>
+            <a:ext cx="9144000" cy="3477875"/>
           </a:xfrm>
           <a:prstGeom prst="rect">
             <a:avLst/>
@@ -8732,9 +8729,6 @@
               <a:lumOff val="80000"/>
             </a:schemeClr>
           </a:solidFill>
-          <a:ln>
-            <a:noFill/>
-          </a:ln>
         </p:spPr>
         <p:txBody>
           <a:bodyPr wrap="square">
@@ -8744,144 +8738,162 @@
           <a:p>
             <a:pPr algn="just"/>
             <a:r>
-              <a:rPr lang="ru-RU" b="1" dirty="0" err="1" smtClean="0">
-                <a:latin typeface="Times New Roman" pitchFamily="18" charset="0"/>
-                <a:cs typeface="Times New Roman" pitchFamily="18" charset="0"/>
-              </a:rPr>
-              <a:t>Email</a:t>
-            </a:r>
-            <a:r>
-              <a:rPr lang="ru-RU" b="1" dirty="0" smtClean="0">
-                <a:latin typeface="Times New Roman" pitchFamily="18" charset="0"/>
-                <a:cs typeface="Times New Roman" pitchFamily="18" charset="0"/>
-              </a:rPr>
-              <a:t> </a:t>
-            </a:r>
-            <a:r>
-              <a:rPr lang="ru-RU" b="1" dirty="0" err="1" smtClean="0">
-                <a:latin typeface="Times New Roman" pitchFamily="18" charset="0"/>
-                <a:cs typeface="Times New Roman" pitchFamily="18" charset="0"/>
-              </a:rPr>
-              <a:t>Services</a:t>
-            </a:r>
-            <a:r>
-              <a:rPr lang="ru-RU" dirty="0" smtClean="0">
-                <a:latin typeface="Times New Roman" pitchFamily="18" charset="0"/>
-                <a:cs typeface="Times New Roman" pitchFamily="18" charset="0"/>
-              </a:rPr>
-              <a:t> — раздел настройки сервисов электронной почты в </a:t>
-            </a:r>
-            <a:r>
-              <a:rPr lang="ru-RU" dirty="0" err="1" smtClean="0">
+              <a:rPr lang="ru-RU" sz="2000" b="1" dirty="0" smtClean="0">
+                <a:latin typeface="Times New Roman" pitchFamily="18" charset="0"/>
+                <a:cs typeface="Times New Roman" pitchFamily="18" charset="0"/>
+              </a:rPr>
+              <a:t>Функции</a:t>
+            </a:r>
+          </a:p>
+          <a:p>
+            <a:pPr algn="just"/>
+            <a:r>
+              <a:rPr lang="ru-RU" sz="2000" b="1" dirty="0" smtClean="0">
+                <a:latin typeface="Times New Roman" pitchFamily="18" charset="0"/>
+                <a:cs typeface="Times New Roman" pitchFamily="18" charset="0"/>
+              </a:rPr>
+              <a:t>Упрощение разработки. </a:t>
+            </a:r>
+            <a:r>
+              <a:rPr lang="ru-RU" sz="2000" dirty="0" err="1" smtClean="0">
                 <a:latin typeface="Times New Roman" pitchFamily="18" charset="0"/>
                 <a:cs typeface="Times New Roman" pitchFamily="18" charset="0"/>
               </a:rPr>
               <a:t>EmailJS</a:t>
             </a:r>
             <a:r>
-              <a:rPr lang="ru-RU" dirty="0" smtClean="0">
-                <a:latin typeface="Times New Roman" pitchFamily="18" charset="0"/>
-                <a:cs typeface="Times New Roman" pitchFamily="18" charset="0"/>
-              </a:rPr>
-              <a:t>. Чтобы настроить сервис, нужно:</a:t>
-            </a:r>
-          </a:p>
-          <a:p>
-            <a:pPr algn="just"/>
-            <a:r>
-              <a:rPr lang="ru-RU" dirty="0" smtClean="0">
-                <a:latin typeface="Times New Roman" pitchFamily="18" charset="0"/>
-                <a:cs typeface="Times New Roman" pitchFamily="18" charset="0"/>
-              </a:rPr>
-              <a:t>Перейти в раздел «</a:t>
-            </a:r>
-            <a:r>
-              <a:rPr lang="ru-RU" dirty="0" err="1" smtClean="0">
-                <a:latin typeface="Times New Roman" pitchFamily="18" charset="0"/>
-                <a:cs typeface="Times New Roman" pitchFamily="18" charset="0"/>
-              </a:rPr>
-              <a:t>Email</a:t>
-            </a:r>
-            <a:r>
-              <a:rPr lang="ru-RU" dirty="0" smtClean="0">
-                <a:latin typeface="Times New Roman" pitchFamily="18" charset="0"/>
-                <a:cs typeface="Times New Roman" pitchFamily="18" charset="0"/>
-              </a:rPr>
-              <a:t> </a:t>
-            </a:r>
-            <a:r>
-              <a:rPr lang="ru-RU" dirty="0" err="1" smtClean="0">
-                <a:latin typeface="Times New Roman" pitchFamily="18" charset="0"/>
-                <a:cs typeface="Times New Roman" pitchFamily="18" charset="0"/>
-              </a:rPr>
-              <a:t>Services</a:t>
-            </a:r>
-            <a:r>
-              <a:rPr lang="ru-RU" dirty="0" smtClean="0">
-                <a:latin typeface="Times New Roman" pitchFamily="18" charset="0"/>
-                <a:cs typeface="Times New Roman" pitchFamily="18" charset="0"/>
-              </a:rPr>
-              <a:t>» на панели управления </a:t>
-            </a:r>
-            <a:r>
-              <a:rPr lang="ru-RU" dirty="0" err="1" smtClean="0">
+              <a:rPr lang="ru-RU" sz="2000" dirty="0" smtClean="0">
+                <a:latin typeface="Times New Roman" pitchFamily="18" charset="0"/>
+                <a:cs typeface="Times New Roman" pitchFamily="18" charset="0"/>
+              </a:rPr>
+              <a:t> позволяет отправлять электронные письма напрямую с клиентской стороны, без необходимости настраивать сервер, что упрощает процесс разработки.</a:t>
+            </a:r>
+            <a:endParaRPr lang="en-US" sz="2000" b="1" dirty="0" smtClean="0">
+              <a:latin typeface="Times New Roman" pitchFamily="18" charset="0"/>
+              <a:cs typeface="Times New Roman" pitchFamily="18" charset="0"/>
+            </a:endParaRPr>
+          </a:p>
+          <a:p>
+            <a:pPr algn="just"/>
+            <a:r>
+              <a:rPr lang="ru-RU" sz="2000" b="1" dirty="0" smtClean="0">
+                <a:latin typeface="Times New Roman" pitchFamily="18" charset="0"/>
+                <a:cs typeface="Times New Roman" pitchFamily="18" charset="0"/>
+              </a:rPr>
+              <a:t>Поддержка сервисов электронной почты</a:t>
+            </a:r>
+            <a:r>
+              <a:rPr lang="ru-RU" sz="2000" dirty="0" smtClean="0">
+                <a:latin typeface="Times New Roman" pitchFamily="18" charset="0"/>
+                <a:cs typeface="Times New Roman" pitchFamily="18" charset="0"/>
+              </a:rPr>
+              <a:t> — </a:t>
+            </a:r>
+            <a:r>
+              <a:rPr lang="ru-RU" sz="2000" dirty="0" err="1" smtClean="0">
+                <a:latin typeface="Times New Roman" pitchFamily="18" charset="0"/>
+                <a:cs typeface="Times New Roman" pitchFamily="18" charset="0"/>
+              </a:rPr>
+              <a:t>Gmail</a:t>
+            </a:r>
+            <a:r>
+              <a:rPr lang="ru-RU" sz="2000" dirty="0" smtClean="0">
+                <a:latin typeface="Times New Roman" pitchFamily="18" charset="0"/>
+                <a:cs typeface="Times New Roman" pitchFamily="18" charset="0"/>
+              </a:rPr>
+              <a:t>, </a:t>
+            </a:r>
+            <a:r>
+              <a:rPr lang="ru-RU" sz="2000" dirty="0" err="1" smtClean="0">
+                <a:latin typeface="Times New Roman" pitchFamily="18" charset="0"/>
+                <a:cs typeface="Times New Roman" pitchFamily="18" charset="0"/>
+              </a:rPr>
+              <a:t>Outlook</a:t>
+            </a:r>
+            <a:r>
+              <a:rPr lang="ru-RU" sz="2000" dirty="0" smtClean="0">
+                <a:latin typeface="Times New Roman" pitchFamily="18" charset="0"/>
+                <a:cs typeface="Times New Roman" pitchFamily="18" charset="0"/>
+              </a:rPr>
+              <a:t>, </a:t>
+            </a:r>
+            <a:r>
+              <a:rPr lang="ru-RU" sz="2000" dirty="0" err="1" smtClean="0">
+                <a:latin typeface="Times New Roman" pitchFamily="18" charset="0"/>
+                <a:cs typeface="Times New Roman" pitchFamily="18" charset="0"/>
+              </a:rPr>
+              <a:t>SendGrid</a:t>
+            </a:r>
+            <a:r>
+              <a:rPr lang="ru-RU" sz="2000" dirty="0" smtClean="0">
+                <a:latin typeface="Times New Roman" pitchFamily="18" charset="0"/>
+                <a:cs typeface="Times New Roman" pitchFamily="18" charset="0"/>
+              </a:rPr>
+              <a:t> и других. Сервис позволяет использовать функции этих провайдеров, используя </a:t>
+            </a:r>
+            <a:r>
+              <a:rPr lang="ru-RU" sz="2000" dirty="0" err="1" smtClean="0">
                 <a:latin typeface="Times New Roman" pitchFamily="18" charset="0"/>
                 <a:cs typeface="Times New Roman" pitchFamily="18" charset="0"/>
               </a:rPr>
               <a:t>EmailJS</a:t>
             </a:r>
             <a:r>
-              <a:rPr lang="ru-RU" dirty="0" smtClean="0">
-                <a:latin typeface="Times New Roman" pitchFamily="18" charset="0"/>
-                <a:cs typeface="Times New Roman" pitchFamily="18" charset="0"/>
-              </a:rPr>
-              <a:t>.</a:t>
-            </a:r>
-          </a:p>
-          <a:p>
-            <a:pPr algn="just"/>
-            <a:r>
-              <a:rPr lang="ru-RU" dirty="0" smtClean="0">
-                <a:latin typeface="Times New Roman" pitchFamily="18" charset="0"/>
-                <a:cs typeface="Times New Roman" pitchFamily="18" charset="0"/>
-              </a:rPr>
-              <a:t>Нажать «Добавить новое обслуживание».</a:t>
-            </a:r>
-          </a:p>
-          <a:p>
-            <a:pPr algn="just"/>
-            <a:r>
-              <a:rPr lang="ru-RU" dirty="0" smtClean="0">
-                <a:latin typeface="Times New Roman" pitchFamily="18" charset="0"/>
-                <a:cs typeface="Times New Roman" pitchFamily="18" charset="0"/>
-              </a:rPr>
-              <a:t>Выбрать предпочитаемый сервис электронной почты.</a:t>
-            </a:r>
-          </a:p>
-          <a:p>
-            <a:pPr algn="just"/>
-            <a:r>
-              <a:rPr lang="ru-RU" dirty="0" smtClean="0">
-                <a:latin typeface="Times New Roman" pitchFamily="18" charset="0"/>
-                <a:cs typeface="Times New Roman" pitchFamily="18" charset="0"/>
-              </a:rPr>
-              <a:t>Следовать инструкциям, чтобы связать учётную запись электронной почты (обычно нужны ключи API или </a:t>
-            </a:r>
-            <a:r>
-              <a:rPr lang="ru-RU" dirty="0" err="1" smtClean="0">
-                <a:latin typeface="Times New Roman" pitchFamily="18" charset="0"/>
-                <a:cs typeface="Times New Roman" pitchFamily="18" charset="0"/>
-              </a:rPr>
-              <a:t>токены</a:t>
-            </a:r>
-            <a:r>
-              <a:rPr lang="ru-RU" dirty="0" smtClean="0">
-                <a:latin typeface="Times New Roman" pitchFamily="18" charset="0"/>
-                <a:cs typeface="Times New Roman" pitchFamily="18" charset="0"/>
-              </a:rPr>
-              <a:t> доступа).</a:t>
-            </a:r>
-            <a:endParaRPr lang="ru-RU" dirty="0">
+              <a:rPr lang="ru-RU" sz="2000" dirty="0" smtClean="0">
+                <a:latin typeface="Times New Roman" pitchFamily="18" charset="0"/>
+                <a:cs typeface="Times New Roman" pitchFamily="18" charset="0"/>
+              </a:rPr>
+              <a:t> как интерфейс для отправки писем. </a:t>
+            </a:r>
+          </a:p>
+          <a:p>
+            <a:pPr algn="just"/>
+            <a:r>
+              <a:rPr lang="ru-RU" sz="2000" b="1" dirty="0" smtClean="0">
+                <a:latin typeface="Times New Roman" pitchFamily="18" charset="0"/>
+                <a:cs typeface="Times New Roman" pitchFamily="18" charset="0"/>
+              </a:rPr>
+              <a:t>Поддержка шаблонов</a:t>
+            </a:r>
+            <a:r>
+              <a:rPr lang="ru-RU" sz="2000" dirty="0" smtClean="0">
+                <a:latin typeface="Times New Roman" pitchFamily="18" charset="0"/>
+                <a:cs typeface="Times New Roman" pitchFamily="18" charset="0"/>
+              </a:rPr>
+              <a:t> — разработчики могут создавать настраиваемые шаблоны писем, которые могут включать динамический </a:t>
+            </a:r>
+            <a:r>
+              <a:rPr lang="ru-RU" sz="2000" dirty="0" err="1" smtClean="0">
+                <a:latin typeface="Times New Roman" pitchFamily="18" charset="0"/>
+                <a:cs typeface="Times New Roman" pitchFamily="18" charset="0"/>
+              </a:rPr>
+              <a:t>контент</a:t>
+            </a:r>
+            <a:r>
+              <a:rPr lang="ru-RU" sz="2000" dirty="0" smtClean="0">
+                <a:latin typeface="Times New Roman" pitchFamily="18" charset="0"/>
+                <a:cs typeface="Times New Roman" pitchFamily="18" charset="0"/>
+              </a:rPr>
+              <a:t>. </a:t>
+            </a:r>
+          </a:p>
+          <a:p>
+            <a:pPr algn="just"/>
+            <a:r>
+              <a:rPr lang="ru-RU" sz="2000" b="1" dirty="0" smtClean="0">
+                <a:latin typeface="Times New Roman" pitchFamily="18" charset="0"/>
+                <a:cs typeface="Times New Roman" pitchFamily="18" charset="0"/>
+              </a:rPr>
+              <a:t>Встроенная проверка электронной почты</a:t>
+            </a:r>
+            <a:r>
+              <a:rPr lang="ru-RU" sz="2000" dirty="0" smtClean="0">
+                <a:latin typeface="Times New Roman" pitchFamily="18" charset="0"/>
+                <a:cs typeface="Times New Roman" pitchFamily="18" charset="0"/>
+              </a:rPr>
+              <a:t> — обеспечивает правильный формат адресов.</a:t>
+            </a:r>
+            <a:endParaRPr lang="ru-RU" sz="2000" dirty="0">
               <a:latin typeface="Times New Roman" pitchFamily="18" charset="0"/>
               <a:cs typeface="Times New Roman" pitchFamily="18" charset="0"/>
             </a:endParaRPr>
@@ -8925,24 +8937,69 @@
         </p:nvSpPr>
         <p:spPr>
           <a:xfrm>
-            <a:off x="500034" y="-285776"/>
+            <a:off x="500034" y="-214338"/>
             <a:ext cx="8229600" cy="1143000"/>
           </a:xfrm>
         </p:spPr>
         <p:txBody>
-          <a:bodyPr/>
+          <a:bodyPr>
+            <a:normAutofit/>
+          </a:bodyPr>
           <a:lstStyle/>
           <a:p>
             <a:r>
-              <a:rPr lang="en-US" b="1" dirty="0" smtClean="0"/>
-              <a:t>Email Templates</a:t>
+              <a:rPr lang="en-US" sz="4000" b="1" dirty="0" smtClean="0"/>
+              <a:t>JavaScript: </a:t>
+            </a:r>
+            <a:r>
+              <a:rPr lang="ru-RU" sz="4000" b="1" dirty="0" smtClean="0"/>
+              <a:t>формы</a:t>
+            </a:r>
+            <a:endParaRPr lang="ru-RU" sz="4000" b="1" dirty="0"/>
+          </a:p>
+        </p:txBody>
+      </p:sp>
+      <p:sp>
+        <p:nvSpPr>
+          <p:cNvPr id="6" name="Прямоугольник 5"/>
+          <p:cNvSpPr/>
+          <p:nvPr/>
+        </p:nvSpPr>
+        <p:spPr>
+          <a:xfrm>
+            <a:off x="4643438" y="714356"/>
+            <a:ext cx="4500562" cy="1169551"/>
+          </a:xfrm>
+          <a:prstGeom prst="rect">
+            <a:avLst/>
+          </a:prstGeom>
+          <a:solidFill>
+            <a:schemeClr val="bg2"/>
+          </a:solidFill>
+          <a:ln>
+            <a:noFill/>
+          </a:ln>
+        </p:spPr>
+        <p:txBody>
+          <a:bodyPr wrap="square">
+            <a:spAutoFit/>
+          </a:bodyPr>
+          <a:lstStyle/>
+          <a:p>
+            <a:pPr algn="just"/>
+            <a:r>
+              <a:rPr lang="ru-RU" sz="1400" dirty="0" smtClean="0">
+                <a:latin typeface="Times New Roman" pitchFamily="18" charset="0"/>
+                <a:cs typeface="Times New Roman" pitchFamily="18" charset="0"/>
+              </a:rPr>
+              <a:t>Переключатели применяются в том случае, когда необходимо предоставить пользователю возможность выбора одного параметра из группы. В связи с этим переключатели всегда используются в группе. Вся группа должна иметь одно и то же название.</a:t>
             </a:r>
           </a:p>
         </p:txBody>
       </p:sp>
       <p:pic>
         <p:nvPicPr>
-          <p:cNvPr id="23555" name="Picture 3"/>
+          <p:cNvPr id="7170" name="Picture 2"/>
           <p:cNvPicPr>
             <a:picLocks noChangeAspect="1" noChangeArrowheads="1"/>
           </p:cNvPicPr>
@@ -8957,8 +9014,8 @@
         </p:blipFill>
         <p:spPr bwMode="auto">
           <a:xfrm>
-            <a:off x="0" y="2000240"/>
-            <a:ext cx="9144000" cy="4714875"/>
+            <a:off x="4643439" y="1785926"/>
+            <a:ext cx="4500562" cy="600075"/>
           </a:xfrm>
           <a:prstGeom prst="rect">
             <a:avLst/>
@@ -8973,105 +9030,9 @@
           <a:effectLst/>
         </p:spPr>
       </p:pic>
-      <p:cxnSp>
-        <p:nvCxnSpPr>
-          <p:cNvPr id="10" name="Прямая со стрелкой 9"/>
-          <p:cNvCxnSpPr/>
-          <p:nvPr/>
-        </p:nvCxnSpPr>
-        <p:spPr>
-          <a:xfrm rot="10800000">
-            <a:off x="1500166" y="5786454"/>
-            <a:ext cx="1643074" cy="142876"/>
-          </a:xfrm>
-          <a:prstGeom prst="straightConnector1">
-            <a:avLst/>
-          </a:prstGeom>
-          <a:ln w="25400">
-            <a:solidFill>
-              <a:srgbClr val="FF0000"/>
-            </a:solidFill>
-            <a:tailEnd type="arrow"/>
-          </a:ln>
-        </p:spPr>
-        <p:style>
-          <a:lnRef idx="1">
-            <a:schemeClr val="accent1"/>
-          </a:lnRef>
-          <a:fillRef idx="0">
-            <a:schemeClr val="accent1"/>
-          </a:fillRef>
-          <a:effectRef idx="0">
-            <a:schemeClr val="accent1"/>
-          </a:effectRef>
-          <a:fontRef idx="minor">
-            <a:schemeClr val="tx1"/>
-          </a:fontRef>
-        </p:style>
-      </p:cxnSp>
-      <p:sp>
-        <p:nvSpPr>
-          <p:cNvPr id="14" name="Прямоугольник 13"/>
-          <p:cNvSpPr/>
-          <p:nvPr/>
-        </p:nvSpPr>
-        <p:spPr>
-          <a:xfrm>
-            <a:off x="3143240" y="5715016"/>
-            <a:ext cx="6000760" cy="369332"/>
-          </a:xfrm>
-          <a:prstGeom prst="rect">
-            <a:avLst/>
-          </a:prstGeom>
-        </p:spPr>
-        <p:txBody>
-          <a:bodyPr wrap="square">
-            <a:spAutoFit/>
-          </a:bodyPr>
-          <a:lstStyle/>
-          <a:p>
-            <a:r>
-              <a:rPr lang="ru-RU" b="1" dirty="0" smtClean="0">
-                <a:latin typeface="Times New Roman" pitchFamily="18" charset="0"/>
-                <a:cs typeface="Times New Roman" pitchFamily="18" charset="0"/>
-              </a:rPr>
-              <a:t>Писать нужно также, какое значение </a:t>
-            </a:r>
-            <a:r>
-              <a:rPr lang="en-US" b="1" dirty="0" smtClean="0">
-                <a:latin typeface="Times New Roman" pitchFamily="18" charset="0"/>
-                <a:cs typeface="Times New Roman" pitchFamily="18" charset="0"/>
-              </a:rPr>
-              <a:t>name </a:t>
-            </a:r>
-            <a:r>
-              <a:rPr lang="ru-RU" b="1" dirty="0" smtClean="0">
-                <a:latin typeface="Times New Roman" pitchFamily="18" charset="0"/>
-                <a:cs typeface="Times New Roman" pitchFamily="18" charset="0"/>
-              </a:rPr>
-              <a:t>у поля </a:t>
-            </a:r>
-            <a:r>
-              <a:rPr lang="en-US" b="1" dirty="0" smtClean="0">
-                <a:latin typeface="Times New Roman" pitchFamily="18" charset="0"/>
-                <a:cs typeface="Times New Roman" pitchFamily="18" charset="0"/>
-              </a:rPr>
-              <a:t>input</a:t>
-            </a:r>
-            <a:r>
-              <a:rPr lang="ru-RU" b="1" dirty="0" smtClean="0">
-                <a:latin typeface="Times New Roman" pitchFamily="18" charset="0"/>
-                <a:cs typeface="Times New Roman" pitchFamily="18" charset="0"/>
-              </a:rPr>
-              <a:t> </a:t>
-            </a:r>
-            <a:endParaRPr lang="ru-RU" dirty="0"/>
-          </a:p>
-        </p:txBody>
-      </p:sp>
       <p:pic>
         <p:nvPicPr>
-          <p:cNvPr id="23556" name="Picture 4"/>
+          <p:cNvPr id="7171" name="Picture 3"/>
           <p:cNvPicPr>
             <a:picLocks noChangeAspect="1" noChangeArrowheads="1"/>
           </p:cNvPicPr>
@@ -9086,8 +9047,8 @@
         </p:blipFill>
         <p:spPr bwMode="auto">
           <a:xfrm>
-            <a:off x="1666875" y="6372249"/>
-            <a:ext cx="7477125" cy="485775"/>
+            <a:off x="4911420" y="3000372"/>
+            <a:ext cx="4232580" cy="1485906"/>
           </a:xfrm>
           <a:prstGeom prst="rect">
             <a:avLst/>
@@ -9102,44 +9063,6 @@
           <a:effectLst/>
         </p:spPr>
       </p:pic>
-      <p:cxnSp>
-        <p:nvCxnSpPr>
-          <p:cNvPr id="7" name="Прямая со стрелкой 6"/>
-          <p:cNvCxnSpPr>
-            <a:stCxn id="14" idx="2"/>
-          </p:cNvCxnSpPr>
-          <p:nvPr/>
-        </p:nvCxnSpPr>
-        <p:spPr>
-          <a:xfrm rot="16200000" flipH="1">
-            <a:off x="6435451" y="5792517"/>
-            <a:ext cx="416486" cy="1000148"/>
-          </a:xfrm>
-          <a:prstGeom prst="straightConnector1">
-            <a:avLst/>
-          </a:prstGeom>
-          <a:ln w="25400">
-            <a:solidFill>
-              <a:srgbClr val="FF0000"/>
-            </a:solidFill>
-            <a:tailEnd type="arrow"/>
-          </a:ln>
-        </p:spPr>
-        <p:style>
-          <a:lnRef idx="1">
-            <a:schemeClr val="accent1"/>
-          </a:lnRef>
-          <a:fillRef idx="0">
-            <a:schemeClr val="accent1"/>
-          </a:fillRef>
-          <a:effectRef idx="0">
-            <a:schemeClr val="accent1"/>
-          </a:effectRef>
-          <a:fontRef idx="minor">
-            <a:schemeClr val="tx1"/>
-          </a:fontRef>
-        </p:style>
-      </p:cxnSp>
       <p:sp>
         <p:nvSpPr>
           <p:cNvPr id="12" name="Прямоугольник 11"/>
@@ -9148,8 +9071,8 @@
         </p:nvSpPr>
         <p:spPr>
           <a:xfrm>
-            <a:off x="0" y="500042"/>
-            <a:ext cx="9144000" cy="1569660"/>
+            <a:off x="4857752" y="2500306"/>
+            <a:ext cx="4286248" cy="369332"/>
           </a:xfrm>
           <a:prstGeom prst="rect">
             <a:avLst/>
@@ -9167,125 +9090,380 @@
           </a:bodyPr>
           <a:lstStyle/>
           <a:p>
-            <a:pPr algn="just"/>
-            <a:r>
-              <a:rPr lang="ru-RU" sz="1600" b="1" dirty="0" err="1" smtClean="0">
-                <a:latin typeface="Times New Roman" pitchFamily="18" charset="0"/>
-                <a:cs typeface="Times New Roman" pitchFamily="18" charset="0"/>
-              </a:rPr>
-              <a:t>Email</a:t>
-            </a:r>
-            <a:r>
-              <a:rPr lang="ru-RU" sz="1600" b="1" dirty="0" smtClean="0">
-                <a:latin typeface="Times New Roman" pitchFamily="18" charset="0"/>
-                <a:cs typeface="Times New Roman" pitchFamily="18" charset="0"/>
-              </a:rPr>
-              <a:t> </a:t>
-            </a:r>
-            <a:r>
-              <a:rPr lang="ru-RU" sz="1600" b="1" dirty="0" err="1" smtClean="0">
-                <a:latin typeface="Times New Roman" pitchFamily="18" charset="0"/>
-                <a:cs typeface="Times New Roman" pitchFamily="18" charset="0"/>
-              </a:rPr>
-              <a:t>Templates</a:t>
-            </a:r>
-            <a:r>
-              <a:rPr lang="ru-RU" sz="1600" dirty="0" smtClean="0">
-                <a:latin typeface="Times New Roman" pitchFamily="18" charset="0"/>
-                <a:cs typeface="Times New Roman" pitchFamily="18" charset="0"/>
-              </a:rPr>
-              <a:t> — раздел создания шаблонов электронных писем в </a:t>
-            </a:r>
-            <a:r>
-              <a:rPr lang="ru-RU" sz="1600" dirty="0" err="1" smtClean="0">
-                <a:latin typeface="Times New Roman" pitchFamily="18" charset="0"/>
-                <a:cs typeface="Times New Roman" pitchFamily="18" charset="0"/>
-              </a:rPr>
-              <a:t>EmailJS</a:t>
-            </a:r>
-            <a:r>
-              <a:rPr lang="ru-RU" sz="1600" dirty="0" smtClean="0">
-                <a:latin typeface="Times New Roman" pitchFamily="18" charset="0"/>
-                <a:cs typeface="Times New Roman" pitchFamily="18" charset="0"/>
-              </a:rPr>
-              <a:t>. Создание шаблона позволяет динамически настраивать макет и содержание писем. Чтобы создать шаблон, нужно:</a:t>
-            </a:r>
-          </a:p>
-          <a:p>
-            <a:pPr algn="just"/>
-            <a:r>
-              <a:rPr lang="ru-RU" sz="1600" dirty="0" smtClean="0">
-                <a:latin typeface="Times New Roman" pitchFamily="18" charset="0"/>
-                <a:cs typeface="Times New Roman" pitchFamily="18" charset="0"/>
-              </a:rPr>
-              <a:t>Перейти в раздел «</a:t>
-            </a:r>
-            <a:r>
-              <a:rPr lang="ru-RU" sz="1600" dirty="0" err="1" smtClean="0">
-                <a:latin typeface="Times New Roman" pitchFamily="18" charset="0"/>
-                <a:cs typeface="Times New Roman" pitchFamily="18" charset="0"/>
-              </a:rPr>
-              <a:t>Email</a:t>
-            </a:r>
-            <a:r>
-              <a:rPr lang="ru-RU" sz="1600" dirty="0" smtClean="0">
-                <a:latin typeface="Times New Roman" pitchFamily="18" charset="0"/>
-                <a:cs typeface="Times New Roman" pitchFamily="18" charset="0"/>
-              </a:rPr>
-              <a:t> </a:t>
-            </a:r>
-            <a:r>
-              <a:rPr lang="ru-RU" sz="1600" dirty="0" err="1" smtClean="0">
-                <a:latin typeface="Times New Roman" pitchFamily="18" charset="0"/>
-                <a:cs typeface="Times New Roman" pitchFamily="18" charset="0"/>
-              </a:rPr>
-              <a:t>Templates</a:t>
-            </a:r>
-            <a:r>
-              <a:rPr lang="ru-RU" sz="1600" dirty="0" smtClean="0">
-                <a:latin typeface="Times New Roman" pitchFamily="18" charset="0"/>
-                <a:cs typeface="Times New Roman" pitchFamily="18" charset="0"/>
-              </a:rPr>
-              <a:t>».</a:t>
-            </a:r>
-          </a:p>
-          <a:p>
-            <a:pPr algn="just"/>
-            <a:r>
-              <a:rPr lang="ru-RU" sz="1600" dirty="0" smtClean="0">
-                <a:latin typeface="Times New Roman" pitchFamily="18" charset="0"/>
-                <a:cs typeface="Times New Roman" pitchFamily="18" charset="0"/>
-              </a:rPr>
-              <a:t>Нажать «Создать новый шаблон».</a:t>
-            </a:r>
-          </a:p>
-          <a:p>
-            <a:pPr algn="just"/>
-            <a:r>
-              <a:rPr lang="ru-RU" sz="1600" dirty="0" smtClean="0">
-                <a:latin typeface="Times New Roman" pitchFamily="18" charset="0"/>
-                <a:cs typeface="Times New Roman" pitchFamily="18" charset="0"/>
-              </a:rPr>
-              <a:t>Использовать редактор шаблонов для форматирования тела письма и установки </a:t>
-            </a:r>
-            <a:r>
-              <a:rPr lang="ru-RU" sz="1600" dirty="0" err="1" smtClean="0">
-                <a:latin typeface="Times New Roman" pitchFamily="18" charset="0"/>
-                <a:cs typeface="Times New Roman" pitchFamily="18" charset="0"/>
-              </a:rPr>
-              <a:t>местозаполнителей</a:t>
-            </a:r>
-            <a:r>
-              <a:rPr lang="ru-RU" sz="1600" dirty="0" smtClean="0">
-                <a:latin typeface="Times New Roman" pitchFamily="18" charset="0"/>
-                <a:cs typeface="Times New Roman" pitchFamily="18" charset="0"/>
-              </a:rPr>
-              <a:t> для динамических данных.</a:t>
-            </a:r>
-            <a:endParaRPr lang="ru-RU" sz="1600" dirty="0">
+            <a:pPr algn="ctr"/>
+            <a:r>
+              <a:rPr lang="ru-RU" b="1" dirty="0" smtClean="0">
+                <a:latin typeface="Times New Roman" pitchFamily="18" charset="0"/>
+                <a:cs typeface="Times New Roman" pitchFamily="18" charset="0"/>
+              </a:rPr>
+              <a:t>Создание переключателя</a:t>
+            </a:r>
+            <a:endParaRPr lang="ru-RU" dirty="0"/>
+          </a:p>
+        </p:txBody>
+      </p:sp>
+      <p:sp>
+        <p:nvSpPr>
+          <p:cNvPr id="13" name="Прямоугольник 12"/>
+          <p:cNvSpPr/>
+          <p:nvPr/>
+        </p:nvSpPr>
+        <p:spPr>
+          <a:xfrm>
+            <a:off x="4857752" y="4429132"/>
+            <a:ext cx="4286248" cy="523220"/>
+          </a:xfrm>
+          <a:prstGeom prst="rect">
+            <a:avLst/>
+          </a:prstGeom>
+          <a:solidFill>
+            <a:schemeClr val="accent3">
+              <a:lumMod val="20000"/>
+              <a:lumOff val="80000"/>
+            </a:schemeClr>
+          </a:solidFill>
+        </p:spPr>
+        <p:txBody>
+          <a:bodyPr wrap="square">
+            <a:spAutoFit/>
+          </a:bodyPr>
+          <a:lstStyle/>
+          <a:p>
+            <a:pPr algn="ctr"/>
+            <a:r>
+              <a:rPr lang="ru-RU" sz="1400" b="1" dirty="0" smtClean="0">
+                <a:latin typeface="Times New Roman" pitchFamily="18" charset="0"/>
+                <a:cs typeface="Times New Roman" pitchFamily="18" charset="0"/>
+              </a:rPr>
+              <a:t>Функция для получения значения переключателя и вывода на экран</a:t>
+            </a:r>
+            <a:endParaRPr lang="ru-RU" sz="1400" dirty="0"/>
+          </a:p>
+        </p:txBody>
+      </p:sp>
+      <p:pic>
+        <p:nvPicPr>
+          <p:cNvPr id="8" name="Picture 5"/>
+          <p:cNvPicPr>
+            <a:picLocks noChangeAspect="1" noChangeArrowheads="1"/>
+          </p:cNvPicPr>
+          <p:nvPr/>
+        </p:nvPicPr>
+        <p:blipFill>
+          <a:blip r:embed="rId4"/>
+          <a:srcRect/>
+          <a:stretch>
+            <a:fillRect/>
+          </a:stretch>
+        </p:blipFill>
+        <p:spPr bwMode="auto">
+          <a:xfrm>
+            <a:off x="0" y="2000240"/>
+            <a:ext cx="3905250" cy="1095375"/>
+          </a:xfrm>
+          <a:prstGeom prst="rect">
+            <a:avLst/>
+          </a:prstGeom>
+          <a:noFill/>
+          <a:ln w="9525">
+            <a:noFill/>
+            <a:miter lim="800000"/>
+            <a:headEnd/>
+            <a:tailEnd/>
+          </a:ln>
+          <a:effectLst/>
+        </p:spPr>
+      </p:pic>
+      <p:sp>
+        <p:nvSpPr>
+          <p:cNvPr id="9" name="Прямоугольник 8"/>
+          <p:cNvSpPr/>
+          <p:nvPr/>
+        </p:nvSpPr>
+        <p:spPr>
+          <a:xfrm>
+            <a:off x="0" y="714356"/>
+            <a:ext cx="4572000" cy="1169551"/>
+          </a:xfrm>
+          <a:prstGeom prst="rect">
+            <a:avLst/>
+          </a:prstGeom>
+          <a:solidFill>
+            <a:schemeClr val="bg2"/>
+          </a:solidFill>
+        </p:spPr>
+        <p:txBody>
+          <a:bodyPr>
+            <a:spAutoFit/>
+          </a:bodyPr>
+          <a:lstStyle/>
+          <a:p>
+            <a:pPr algn="just"/>
+            <a:r>
+              <a:rPr lang="ru-RU" sz="1400" b="1" dirty="0" smtClean="0">
+                <a:latin typeface="Times New Roman" pitchFamily="18" charset="0"/>
+                <a:cs typeface="Times New Roman" pitchFamily="18" charset="0"/>
+              </a:rPr>
+              <a:t>Элемент &lt;</a:t>
+            </a:r>
+            <a:r>
+              <a:rPr lang="ru-RU" sz="1400" b="1" dirty="0" err="1" smtClean="0">
+                <a:latin typeface="Times New Roman" pitchFamily="18" charset="0"/>
+                <a:cs typeface="Times New Roman" pitchFamily="18" charset="0"/>
+              </a:rPr>
+              <a:t>select</a:t>
+            </a:r>
+            <a:r>
+              <a:rPr lang="ru-RU" sz="1400" b="1" dirty="0" smtClean="0">
+                <a:latin typeface="Times New Roman" pitchFamily="18" charset="0"/>
+                <a:cs typeface="Times New Roman" pitchFamily="18" charset="0"/>
+              </a:rPr>
+              <a:t>&gt; в </a:t>
+            </a:r>
+            <a:r>
+              <a:rPr lang="ru-RU" sz="1400" b="1" dirty="0" err="1" smtClean="0">
+                <a:latin typeface="Times New Roman" pitchFamily="18" charset="0"/>
+                <a:cs typeface="Times New Roman" pitchFamily="18" charset="0"/>
+              </a:rPr>
+              <a:t>JavaScript</a:t>
+            </a:r>
+            <a:r>
+              <a:rPr lang="ru-RU" sz="1400" dirty="0" smtClean="0">
+                <a:latin typeface="Times New Roman" pitchFamily="18" charset="0"/>
+                <a:cs typeface="Times New Roman" pitchFamily="18" charset="0"/>
+              </a:rPr>
+              <a:t> — компонент форм на </a:t>
+            </a:r>
+            <a:r>
+              <a:rPr lang="ru-RU" sz="1400" dirty="0" err="1" smtClean="0">
+                <a:latin typeface="Times New Roman" pitchFamily="18" charset="0"/>
+                <a:cs typeface="Times New Roman" pitchFamily="18" charset="0"/>
+              </a:rPr>
+              <a:t>веб-страницах</a:t>
+            </a:r>
+            <a:r>
+              <a:rPr lang="ru-RU" sz="1400" dirty="0" smtClean="0">
+                <a:latin typeface="Times New Roman" pitchFamily="18" charset="0"/>
+                <a:cs typeface="Times New Roman" pitchFamily="18" charset="0"/>
+              </a:rPr>
+              <a:t>, представляющий </a:t>
+            </a:r>
+            <a:r>
+              <a:rPr lang="ru-RU" sz="1400" b="1" dirty="0" smtClean="0">
+                <a:latin typeface="Times New Roman" pitchFamily="18" charset="0"/>
+                <a:cs typeface="Times New Roman" pitchFamily="18" charset="0"/>
+              </a:rPr>
+              <a:t>выпадающий список с вариантами выбора</a:t>
+            </a:r>
+            <a:r>
+              <a:rPr lang="ru-RU" sz="1400" dirty="0" smtClean="0">
+                <a:latin typeface="Times New Roman" pitchFamily="18" charset="0"/>
+                <a:cs typeface="Times New Roman" pitchFamily="18" charset="0"/>
+              </a:rPr>
+              <a:t>. Используется для отображения списка предопределённых значений, где пользователь может выбрать нужное.</a:t>
+            </a:r>
+            <a:endParaRPr lang="ru-RU" sz="1400" dirty="0">
               <a:latin typeface="Times New Roman" pitchFamily="18" charset="0"/>
               <a:cs typeface="Times New Roman" pitchFamily="18" charset="0"/>
             </a:endParaRPr>
+          </a:p>
+        </p:txBody>
+      </p:sp>
+      <p:pic>
+        <p:nvPicPr>
+          <p:cNvPr id="1026" name="Picture 2"/>
+          <p:cNvPicPr>
+            <a:picLocks noChangeAspect="1" noChangeArrowheads="1"/>
+          </p:cNvPicPr>
+          <p:nvPr/>
+        </p:nvPicPr>
+        <p:blipFill>
+          <a:blip r:embed="rId5"/>
+          <a:srcRect/>
+          <a:stretch>
+            <a:fillRect/>
+          </a:stretch>
+        </p:blipFill>
+        <p:spPr bwMode="auto">
+          <a:xfrm>
+            <a:off x="0" y="3448050"/>
+            <a:ext cx="4762500" cy="3409950"/>
+          </a:xfrm>
+          <a:prstGeom prst="rect">
+            <a:avLst/>
+          </a:prstGeom>
+          <a:noFill/>
+          <a:ln w="9525">
+            <a:noFill/>
+            <a:miter lim="800000"/>
+            <a:headEnd/>
+            <a:tailEnd/>
+          </a:ln>
+          <a:effectLst/>
+        </p:spPr>
+      </p:pic>
+      <p:sp>
+        <p:nvSpPr>
+          <p:cNvPr id="1027" name="Rectangle 3"/>
+          <p:cNvSpPr>
+            <a:spLocks noChangeArrowheads="1"/>
+          </p:cNvSpPr>
+          <p:nvPr/>
+        </p:nvSpPr>
+        <p:spPr bwMode="auto">
+          <a:xfrm>
+            <a:off x="4786314" y="5929330"/>
+            <a:ext cx="4357686" cy="923330"/>
+          </a:xfrm>
+          <a:prstGeom prst="rect">
+            <a:avLst/>
+          </a:prstGeom>
+          <a:noFill/>
+          <a:ln w="9525">
+            <a:noFill/>
+            <a:miter lim="800000"/>
+            <a:headEnd/>
+            <a:tailEnd/>
+          </a:ln>
+          <a:effectLst/>
+        </p:spPr>
+        <p:txBody>
+          <a:bodyPr vert="horz" wrap="square" lIns="91440" tIns="45720" rIns="91440" bIns="45720" numCol="1" anchor="ctr" anchorCtr="0" compatLnSpc="1">
+            <a:prstTxWarp prst="textNoShape">
+              <a:avLst/>
+            </a:prstTxWarp>
+            <a:spAutoFit/>
+          </a:bodyPr>
+          <a:lstStyle/>
+          <a:p>
+            <a:pPr marL="0" marR="0" lvl="0" indent="0" algn="just" defTabSz="914400" rtl="0" eaLnBrk="1" fontAlgn="base" latinLnBrk="0" hangingPunct="1">
+              <a:lnSpc>
+                <a:spcPct val="100000"/>
+              </a:lnSpc>
+              <a:spcBef>
+                <a:spcPct val="0"/>
+              </a:spcBef>
+              <a:spcAft>
+                <a:spcPct val="0"/>
+              </a:spcAft>
+              <a:buClrTx/>
+              <a:buSzTx/>
+              <a:buFontTx/>
+              <a:buNone/>
+              <a:tabLst/>
+            </a:pPr>
+            <a:r>
+              <a:rPr kumimoji="0" lang="ru-RU" b="1" i="1" u="none" strike="noStrike" cap="none" normalizeH="0" baseline="0" dirty="0" smtClean="0">
+                <a:ln>
+                  <a:noFill/>
+                </a:ln>
+                <a:solidFill>
+                  <a:srgbClr val="000000"/>
+                </a:solidFill>
+                <a:effectLst/>
+                <a:latin typeface="Times New Roman" pitchFamily="18" charset="0"/>
+                <a:cs typeface="Times New Roman" pitchFamily="18" charset="0"/>
+              </a:rPr>
+              <a:t>Для ввода простейшей текстовой информации предназначены элементы &lt;</a:t>
+            </a:r>
+            <a:r>
+              <a:rPr kumimoji="0" lang="ru-RU" b="1" i="1" u="none" strike="noStrike" cap="none" normalizeH="0" baseline="0" dirty="0" err="1" smtClean="0">
+                <a:ln>
+                  <a:noFill/>
+                </a:ln>
+                <a:solidFill>
+                  <a:srgbClr val="000000"/>
+                </a:solidFill>
+                <a:effectLst/>
+                <a:latin typeface="Times New Roman" pitchFamily="18" charset="0"/>
+                <a:cs typeface="Times New Roman" pitchFamily="18" charset="0"/>
+              </a:rPr>
+              <a:t>input</a:t>
+            </a:r>
+            <a:r>
+              <a:rPr kumimoji="0" lang="ru-RU" b="1" i="1" u="none" strike="noStrike" cap="none" normalizeH="0" baseline="0" dirty="0" smtClean="0">
+                <a:ln>
+                  <a:noFill/>
+                </a:ln>
+                <a:solidFill>
+                  <a:srgbClr val="000000"/>
+                </a:solidFill>
+                <a:effectLst/>
+                <a:latin typeface="Times New Roman" pitchFamily="18" charset="0"/>
+                <a:cs typeface="Times New Roman" pitchFamily="18" charset="0"/>
+              </a:rPr>
+              <a:t> </a:t>
+            </a:r>
+            <a:r>
+              <a:rPr kumimoji="0" lang="ru-RU" b="1" i="1" u="none" strike="noStrike" cap="none" normalizeH="0" baseline="0" dirty="0" err="1" smtClean="0">
+                <a:ln>
+                  <a:noFill/>
+                </a:ln>
+                <a:solidFill>
+                  <a:srgbClr val="000000"/>
+                </a:solidFill>
+                <a:effectLst/>
+                <a:latin typeface="Times New Roman" pitchFamily="18" charset="0"/>
+                <a:cs typeface="Times New Roman" pitchFamily="18" charset="0"/>
+              </a:rPr>
+              <a:t>type=</a:t>
+            </a:r>
+            <a:r>
+              <a:rPr kumimoji="0" lang="ru-RU" b="1" i="1" u="none" strike="noStrike" cap="none" normalizeH="0" baseline="0" dirty="0" smtClean="0">
+                <a:ln>
+                  <a:noFill/>
+                </a:ln>
+                <a:solidFill>
+                  <a:srgbClr val="000000"/>
+                </a:solidFill>
+                <a:effectLst/>
+                <a:latin typeface="Times New Roman" pitchFamily="18" charset="0"/>
+                <a:cs typeface="Times New Roman" pitchFamily="18" charset="0"/>
+              </a:rPr>
+              <a:t>"</a:t>
+            </a:r>
+            <a:r>
+              <a:rPr kumimoji="0" lang="ru-RU" b="1" i="1" u="none" strike="noStrike" cap="none" normalizeH="0" baseline="0" dirty="0" err="1" smtClean="0">
+                <a:ln>
+                  <a:noFill/>
+                </a:ln>
+                <a:solidFill>
+                  <a:srgbClr val="000000"/>
+                </a:solidFill>
+                <a:effectLst/>
+                <a:latin typeface="Times New Roman" pitchFamily="18" charset="0"/>
+                <a:cs typeface="Times New Roman" pitchFamily="18" charset="0"/>
+              </a:rPr>
+              <a:t>text</a:t>
+            </a:r>
+            <a:r>
+              <a:rPr kumimoji="0" lang="ru-RU" b="1" i="1" u="none" strike="noStrike" cap="none" normalizeH="0" baseline="0" dirty="0" smtClean="0">
+                <a:ln>
+                  <a:noFill/>
+                </a:ln>
+                <a:solidFill>
+                  <a:srgbClr val="000000"/>
+                </a:solidFill>
+                <a:effectLst/>
+                <a:latin typeface="Times New Roman" pitchFamily="18" charset="0"/>
+                <a:cs typeface="Times New Roman" pitchFamily="18" charset="0"/>
+              </a:rPr>
+              <a:t>"</a:t>
+            </a:r>
+            <a:r>
+              <a:rPr kumimoji="0" lang="ru-RU" b="1" i="1" u="none" strike="noStrike" cap="none" normalizeH="0" baseline="0" dirty="0" smtClean="0">
+                <a:ln>
+                  <a:noFill/>
+                </a:ln>
+                <a:solidFill>
+                  <a:schemeClr val="tx1"/>
+                </a:solidFill>
+                <a:effectLst/>
+                <a:latin typeface="Times New Roman" pitchFamily="18" charset="0"/>
+                <a:cs typeface="Times New Roman" pitchFamily="18" charset="0"/>
+              </a:rPr>
+              <a:t> </a:t>
+            </a:r>
           </a:p>
         </p:txBody>
       </p:sp>
@@ -9335,6 +9513,1022 @@
           <a:lstStyle/>
           <a:p>
             <a:r>
+              <a:rPr lang="en-US" b="1" dirty="0" smtClean="0"/>
+              <a:t>Email Services</a:t>
+            </a:r>
+          </a:p>
+        </p:txBody>
+      </p:sp>
+      <p:pic>
+        <p:nvPicPr>
+          <p:cNvPr id="24578" name="Picture 2"/>
+          <p:cNvPicPr>
+            <a:picLocks noChangeAspect="1" noChangeArrowheads="1"/>
+          </p:cNvPicPr>
+          <p:nvPr/>
+        </p:nvPicPr>
+        <p:blipFill>
+          <a:blip r:embed="rId2"/>
+          <a:srcRect/>
+          <a:stretch>
+            <a:fillRect/>
+          </a:stretch>
+        </p:blipFill>
+        <p:spPr bwMode="auto">
+          <a:xfrm>
+            <a:off x="0" y="2571744"/>
+            <a:ext cx="3038475" cy="2276475"/>
+          </a:xfrm>
+          <a:prstGeom prst="rect">
+            <a:avLst/>
+          </a:prstGeom>
+          <a:noFill/>
+          <a:ln w="9525">
+            <a:noFill/>
+            <a:miter lim="800000"/>
+            <a:headEnd/>
+            <a:tailEnd/>
+          </a:ln>
+          <a:effectLst/>
+        </p:spPr>
+      </p:pic>
+      <p:pic>
+        <p:nvPicPr>
+          <p:cNvPr id="24579" name="Picture 3"/>
+          <p:cNvPicPr>
+            <a:picLocks noChangeAspect="1" noChangeArrowheads="1"/>
+          </p:cNvPicPr>
+          <p:nvPr/>
+        </p:nvPicPr>
+        <p:blipFill>
+          <a:blip r:embed="rId3"/>
+          <a:srcRect/>
+          <a:stretch>
+            <a:fillRect/>
+          </a:stretch>
+        </p:blipFill>
+        <p:spPr bwMode="auto">
+          <a:xfrm>
+            <a:off x="5429256" y="2660657"/>
+            <a:ext cx="3714744" cy="4197343"/>
+          </a:xfrm>
+          <a:prstGeom prst="rect">
+            <a:avLst/>
+          </a:prstGeom>
+          <a:noFill/>
+          <a:ln w="9525">
+            <a:noFill/>
+            <a:miter lim="800000"/>
+            <a:headEnd/>
+            <a:tailEnd/>
+          </a:ln>
+          <a:effectLst/>
+        </p:spPr>
+      </p:pic>
+      <p:sp>
+        <p:nvSpPr>
+          <p:cNvPr id="9" name="Прямоугольник 8"/>
+          <p:cNvSpPr/>
+          <p:nvPr/>
+        </p:nvSpPr>
+        <p:spPr>
+          <a:xfrm>
+            <a:off x="0" y="4919008"/>
+            <a:ext cx="4786314" cy="1938992"/>
+          </a:xfrm>
+          <a:prstGeom prst="rect">
+            <a:avLst/>
+          </a:prstGeom>
+        </p:spPr>
+        <p:txBody>
+          <a:bodyPr wrap="square">
+            <a:spAutoFit/>
+          </a:bodyPr>
+          <a:lstStyle/>
+          <a:p>
+            <a:pPr algn="just"/>
+            <a:r>
+              <a:rPr lang="ru-RU" sz="2000" b="1" dirty="0" smtClean="0">
+                <a:latin typeface="Times New Roman" pitchFamily="18" charset="0"/>
+                <a:cs typeface="Times New Roman" pitchFamily="18" charset="0"/>
+              </a:rPr>
+              <a:t>Можно выбрать любую почту, но для взаимодействия с </a:t>
+            </a:r>
+            <a:r>
+              <a:rPr lang="en-US" sz="2000" b="1" dirty="0" smtClean="0">
+                <a:latin typeface="Times New Roman" pitchFamily="18" charset="0"/>
+                <a:cs typeface="Times New Roman" pitchFamily="18" charset="0"/>
+              </a:rPr>
+              <a:t>Mail </a:t>
+            </a:r>
+            <a:r>
+              <a:rPr lang="ru-RU" sz="2000" b="1" dirty="0" smtClean="0">
+                <a:latin typeface="Times New Roman" pitchFamily="18" charset="0"/>
+                <a:cs typeface="Times New Roman" pitchFamily="18" charset="0"/>
+              </a:rPr>
+              <a:t>или </a:t>
+            </a:r>
+            <a:r>
+              <a:rPr lang="en-US" sz="2000" b="1" dirty="0" err="1" smtClean="0">
+                <a:latin typeface="Times New Roman" pitchFamily="18" charset="0"/>
+                <a:cs typeface="Times New Roman" pitchFamily="18" charset="0"/>
+              </a:rPr>
+              <a:t>Yandex</a:t>
+            </a:r>
+            <a:r>
+              <a:rPr lang="en-US" sz="2000" b="1" dirty="0" smtClean="0">
+                <a:latin typeface="Times New Roman" pitchFamily="18" charset="0"/>
+                <a:cs typeface="Times New Roman" pitchFamily="18" charset="0"/>
+              </a:rPr>
+              <a:t> </a:t>
+            </a:r>
+            <a:r>
+              <a:rPr lang="ru-RU" sz="2000" b="1" dirty="0" smtClean="0">
+                <a:latin typeface="Times New Roman" pitchFamily="18" charset="0"/>
+                <a:cs typeface="Times New Roman" pitchFamily="18" charset="0"/>
+              </a:rPr>
+              <a:t>необходимо создать временный пароль для доступа к почте сторонних приложений. (</a:t>
+            </a:r>
+            <a:r>
+              <a:rPr lang="ru-RU" sz="2000" b="1" dirty="0" err="1" smtClean="0">
+                <a:latin typeface="Times New Roman" pitchFamily="18" charset="0"/>
+                <a:cs typeface="Times New Roman" pitchFamily="18" charset="0"/>
+              </a:rPr>
+              <a:t>EmailJS</a:t>
+            </a:r>
+            <a:r>
+              <a:rPr lang="ru-RU" sz="2000" b="1" dirty="0" smtClean="0">
+                <a:latin typeface="Times New Roman" pitchFamily="18" charset="0"/>
+                <a:cs typeface="Times New Roman" pitchFamily="18" charset="0"/>
+              </a:rPr>
+              <a:t> показывает ссылку, где это можно сделать)</a:t>
+            </a:r>
+            <a:endParaRPr lang="ru-RU" sz="2000" dirty="0">
+              <a:latin typeface="Times New Roman" pitchFamily="18" charset="0"/>
+              <a:cs typeface="Times New Roman" pitchFamily="18" charset="0"/>
+            </a:endParaRPr>
+          </a:p>
+        </p:txBody>
+      </p:sp>
+      <p:sp>
+        <p:nvSpPr>
+          <p:cNvPr id="6" name="Прямоугольник 5"/>
+          <p:cNvSpPr/>
+          <p:nvPr/>
+        </p:nvSpPr>
+        <p:spPr>
+          <a:xfrm>
+            <a:off x="0" y="500042"/>
+            <a:ext cx="9144000" cy="2031325"/>
+          </a:xfrm>
+          <a:prstGeom prst="rect">
+            <a:avLst/>
+          </a:prstGeom>
+          <a:solidFill>
+            <a:schemeClr val="accent3">
+              <a:lumMod val="20000"/>
+              <a:lumOff val="80000"/>
+            </a:schemeClr>
+          </a:solidFill>
+          <a:ln>
+            <a:noFill/>
+          </a:ln>
+        </p:spPr>
+        <p:txBody>
+          <a:bodyPr wrap="square">
+            <a:spAutoFit/>
+          </a:bodyPr>
+          <a:lstStyle/>
+          <a:p>
+            <a:pPr algn="just"/>
+            <a:r>
+              <a:rPr lang="ru-RU" b="1" dirty="0" err="1" smtClean="0">
+                <a:latin typeface="Times New Roman" pitchFamily="18" charset="0"/>
+                <a:cs typeface="Times New Roman" pitchFamily="18" charset="0"/>
+              </a:rPr>
+              <a:t>Email</a:t>
+            </a:r>
+            <a:r>
+              <a:rPr lang="ru-RU" b="1" dirty="0" smtClean="0">
+                <a:latin typeface="Times New Roman" pitchFamily="18" charset="0"/>
+                <a:cs typeface="Times New Roman" pitchFamily="18" charset="0"/>
+              </a:rPr>
+              <a:t> </a:t>
+            </a:r>
+            <a:r>
+              <a:rPr lang="ru-RU" b="1" dirty="0" err="1" smtClean="0">
+                <a:latin typeface="Times New Roman" pitchFamily="18" charset="0"/>
+                <a:cs typeface="Times New Roman" pitchFamily="18" charset="0"/>
+              </a:rPr>
+              <a:t>Services</a:t>
+            </a:r>
+            <a:r>
+              <a:rPr lang="ru-RU" dirty="0" smtClean="0">
+                <a:latin typeface="Times New Roman" pitchFamily="18" charset="0"/>
+                <a:cs typeface="Times New Roman" pitchFamily="18" charset="0"/>
+              </a:rPr>
+              <a:t> — раздел настройки сервисов электронной почты в </a:t>
+            </a:r>
+            <a:r>
+              <a:rPr lang="ru-RU" dirty="0" err="1" smtClean="0">
+                <a:latin typeface="Times New Roman" pitchFamily="18" charset="0"/>
+                <a:cs typeface="Times New Roman" pitchFamily="18" charset="0"/>
+              </a:rPr>
+              <a:t>EmailJS</a:t>
+            </a:r>
+            <a:r>
+              <a:rPr lang="ru-RU" dirty="0" smtClean="0">
+                <a:latin typeface="Times New Roman" pitchFamily="18" charset="0"/>
+                <a:cs typeface="Times New Roman" pitchFamily="18" charset="0"/>
+              </a:rPr>
+              <a:t>. Чтобы настроить сервис, нужно:</a:t>
+            </a:r>
+          </a:p>
+          <a:p>
+            <a:pPr algn="just"/>
+            <a:r>
+              <a:rPr lang="ru-RU" dirty="0" smtClean="0">
+                <a:latin typeface="Times New Roman" pitchFamily="18" charset="0"/>
+                <a:cs typeface="Times New Roman" pitchFamily="18" charset="0"/>
+              </a:rPr>
+              <a:t>Перейти в раздел «</a:t>
+            </a:r>
+            <a:r>
+              <a:rPr lang="ru-RU" dirty="0" err="1" smtClean="0">
+                <a:latin typeface="Times New Roman" pitchFamily="18" charset="0"/>
+                <a:cs typeface="Times New Roman" pitchFamily="18" charset="0"/>
+              </a:rPr>
+              <a:t>Email</a:t>
+            </a:r>
+            <a:r>
+              <a:rPr lang="ru-RU" dirty="0" smtClean="0">
+                <a:latin typeface="Times New Roman" pitchFamily="18" charset="0"/>
+                <a:cs typeface="Times New Roman" pitchFamily="18" charset="0"/>
+              </a:rPr>
+              <a:t> </a:t>
+            </a:r>
+            <a:r>
+              <a:rPr lang="ru-RU" dirty="0" err="1" smtClean="0">
+                <a:latin typeface="Times New Roman" pitchFamily="18" charset="0"/>
+                <a:cs typeface="Times New Roman" pitchFamily="18" charset="0"/>
+              </a:rPr>
+              <a:t>Services</a:t>
+            </a:r>
+            <a:r>
+              <a:rPr lang="ru-RU" dirty="0" smtClean="0">
+                <a:latin typeface="Times New Roman" pitchFamily="18" charset="0"/>
+                <a:cs typeface="Times New Roman" pitchFamily="18" charset="0"/>
+              </a:rPr>
+              <a:t>» на панели управления </a:t>
+            </a:r>
+            <a:r>
+              <a:rPr lang="ru-RU" dirty="0" err="1" smtClean="0">
+                <a:latin typeface="Times New Roman" pitchFamily="18" charset="0"/>
+                <a:cs typeface="Times New Roman" pitchFamily="18" charset="0"/>
+              </a:rPr>
+              <a:t>EmailJS</a:t>
+            </a:r>
+            <a:r>
+              <a:rPr lang="ru-RU" dirty="0" smtClean="0">
+                <a:latin typeface="Times New Roman" pitchFamily="18" charset="0"/>
+                <a:cs typeface="Times New Roman" pitchFamily="18" charset="0"/>
+              </a:rPr>
+              <a:t>.</a:t>
+            </a:r>
+          </a:p>
+          <a:p>
+            <a:pPr algn="just"/>
+            <a:r>
+              <a:rPr lang="ru-RU" dirty="0" smtClean="0">
+                <a:latin typeface="Times New Roman" pitchFamily="18" charset="0"/>
+                <a:cs typeface="Times New Roman" pitchFamily="18" charset="0"/>
+              </a:rPr>
+              <a:t>Нажать «Добавить новое обслуживание».</a:t>
+            </a:r>
+          </a:p>
+          <a:p>
+            <a:pPr algn="just"/>
+            <a:r>
+              <a:rPr lang="ru-RU" dirty="0" smtClean="0">
+                <a:latin typeface="Times New Roman" pitchFamily="18" charset="0"/>
+                <a:cs typeface="Times New Roman" pitchFamily="18" charset="0"/>
+              </a:rPr>
+              <a:t>Выбрать предпочитаемый сервис электронной почты.</a:t>
+            </a:r>
+          </a:p>
+          <a:p>
+            <a:pPr algn="just"/>
+            <a:r>
+              <a:rPr lang="ru-RU" dirty="0" smtClean="0">
+                <a:latin typeface="Times New Roman" pitchFamily="18" charset="0"/>
+                <a:cs typeface="Times New Roman" pitchFamily="18" charset="0"/>
+              </a:rPr>
+              <a:t>Следовать инструкциям, чтобы связать учётную запись электронной почты (обычно нужны ключи API или </a:t>
+            </a:r>
+            <a:r>
+              <a:rPr lang="ru-RU" dirty="0" err="1" smtClean="0">
+                <a:latin typeface="Times New Roman" pitchFamily="18" charset="0"/>
+                <a:cs typeface="Times New Roman" pitchFamily="18" charset="0"/>
+              </a:rPr>
+              <a:t>токены</a:t>
+            </a:r>
+            <a:r>
+              <a:rPr lang="ru-RU" dirty="0" smtClean="0">
+                <a:latin typeface="Times New Roman" pitchFamily="18" charset="0"/>
+                <a:cs typeface="Times New Roman" pitchFamily="18" charset="0"/>
+              </a:rPr>
+              <a:t> доступа).</a:t>
+            </a:r>
+            <a:endParaRPr lang="ru-RU" dirty="0">
+              <a:latin typeface="Times New Roman" pitchFamily="18" charset="0"/>
+              <a:cs typeface="Times New Roman" pitchFamily="18" charset="0"/>
+            </a:endParaRPr>
+          </a:p>
+        </p:txBody>
+      </p:sp>
+    </p:spTree>
+  </p:cSld>
+  <p:clrMapOvr>
+    <a:masterClrMapping/>
+  </p:clrMapOvr>
+</p:sld>
+</file>
+
+<file path=ppt/slides/slide3.xml><?xml version="1.0" encoding="utf-8"?>
+<p:sld xmlns:a="http://schemas.openxmlformats.org/drawingml/2006/main" xmlns:r="http://schemas.openxmlformats.org/officeDocument/2006/relationships" xmlns:p="http://schemas.openxmlformats.org/presentationml/2006/main">
+  <p:cSld>
+    <p:spTree>
+      <p:nvGrpSpPr>
+        <p:cNvPr id="1" name=""/>
+        <p:cNvGrpSpPr/>
+        <p:nvPr/>
+      </p:nvGrpSpPr>
+      <p:grpSpPr>
+        <a:xfrm>
+          <a:off x="0" y="0"/>
+          <a:ext cx="0" cy="0"/>
+          <a:chOff x="0" y="0"/>
+          <a:chExt cx="0" cy="0"/>
+        </a:xfrm>
+      </p:grpSpPr>
+      <p:sp>
+        <p:nvSpPr>
+          <p:cNvPr id="2" name="Заголовок 1"/>
+          <p:cNvSpPr>
+            <a:spLocks noGrp="1"/>
+          </p:cNvSpPr>
+          <p:nvPr>
+            <p:ph type="title"/>
+          </p:nvPr>
+        </p:nvSpPr>
+        <p:spPr>
+          <a:xfrm>
+            <a:off x="500034" y="-214338"/>
+            <a:ext cx="8229600" cy="1143000"/>
+          </a:xfrm>
+        </p:spPr>
+        <p:txBody>
+          <a:bodyPr>
+            <a:normAutofit/>
+          </a:bodyPr>
+          <a:lstStyle/>
+          <a:p>
+            <a:r>
+              <a:rPr lang="en-US" sz="4000" b="1" dirty="0" smtClean="0"/>
+              <a:t>JavaScript</a:t>
+            </a:r>
+            <a:endParaRPr lang="ru-RU" sz="4000" b="1" dirty="0"/>
+          </a:p>
+        </p:txBody>
+      </p:sp>
+      <p:sp>
+        <p:nvSpPr>
+          <p:cNvPr id="6" name="Прямоугольник 5"/>
+          <p:cNvSpPr/>
+          <p:nvPr/>
+        </p:nvSpPr>
+        <p:spPr>
+          <a:xfrm>
+            <a:off x="0" y="571480"/>
+            <a:ext cx="9144000" cy="1754326"/>
+          </a:xfrm>
+          <a:prstGeom prst="rect">
+            <a:avLst/>
+          </a:prstGeom>
+          <a:solidFill>
+            <a:schemeClr val="accent3">
+              <a:lumMod val="20000"/>
+              <a:lumOff val="80000"/>
+            </a:schemeClr>
+          </a:solidFill>
+          <a:ln>
+            <a:noFill/>
+          </a:ln>
+        </p:spPr>
+        <p:txBody>
+          <a:bodyPr wrap="square">
+            <a:spAutoFit/>
+          </a:bodyPr>
+          <a:lstStyle/>
+          <a:p>
+            <a:pPr algn="just"/>
+            <a:r>
+              <a:rPr lang="ru-RU" dirty="0" smtClean="0">
+                <a:latin typeface="Times New Roman" pitchFamily="18" charset="0"/>
+                <a:cs typeface="Times New Roman" pitchFamily="18" charset="0"/>
+              </a:rPr>
+              <a:t>Для создания программ на </a:t>
+            </a:r>
+            <a:r>
+              <a:rPr lang="ru-RU" dirty="0" err="1" smtClean="0">
+                <a:latin typeface="Times New Roman" pitchFamily="18" charset="0"/>
+                <a:cs typeface="Times New Roman" pitchFamily="18" charset="0"/>
+              </a:rPr>
+              <a:t>JavaScript</a:t>
+            </a:r>
+            <a:r>
+              <a:rPr lang="ru-RU" dirty="0" smtClean="0">
+                <a:latin typeface="Times New Roman" pitchFamily="18" charset="0"/>
+                <a:cs typeface="Times New Roman" pitchFamily="18" charset="0"/>
+              </a:rPr>
+              <a:t> не требуется никаких дополнительных средств— необходим лишь браузер, поддерживающий язык </a:t>
+            </a:r>
+            <a:r>
+              <a:rPr lang="ru-RU" dirty="0" err="1" smtClean="0">
+                <a:latin typeface="Times New Roman" pitchFamily="18" charset="0"/>
+                <a:cs typeface="Times New Roman" pitchFamily="18" charset="0"/>
+              </a:rPr>
+              <a:t>JavaScript</a:t>
+            </a:r>
+            <a:r>
+              <a:rPr lang="ru-RU" dirty="0" smtClean="0">
+                <a:latin typeface="Times New Roman" pitchFamily="18" charset="0"/>
+                <a:cs typeface="Times New Roman" pitchFamily="18" charset="0"/>
+              </a:rPr>
+              <a:t> соответствующей версии и текстовый редактор, позволяющий создавать HTML-документы. Так как программа на </a:t>
+            </a:r>
+            <a:r>
+              <a:rPr lang="ru-RU" dirty="0" err="1" smtClean="0">
+                <a:latin typeface="Times New Roman" pitchFamily="18" charset="0"/>
+                <a:cs typeface="Times New Roman" pitchFamily="18" charset="0"/>
+              </a:rPr>
+              <a:t>JavaScript</a:t>
+            </a:r>
+            <a:r>
+              <a:rPr lang="ru-RU" dirty="0" smtClean="0">
+                <a:latin typeface="Times New Roman" pitchFamily="18" charset="0"/>
+                <a:cs typeface="Times New Roman" pitchFamily="18" charset="0"/>
+              </a:rPr>
+              <a:t> встраивается непосредственно в текст HTML-документа, вы можете немедленно увидеть результаты своей работы во время просмотра документа браузером и при необходимости внести изменения.</a:t>
+            </a:r>
+          </a:p>
+        </p:txBody>
+      </p:sp>
+      <p:sp>
+        <p:nvSpPr>
+          <p:cNvPr id="7" name="Прямоугольник 6"/>
+          <p:cNvSpPr/>
+          <p:nvPr/>
+        </p:nvSpPr>
+        <p:spPr>
+          <a:xfrm>
+            <a:off x="0" y="4549676"/>
+            <a:ext cx="9144000" cy="2308324"/>
+          </a:xfrm>
+          <a:prstGeom prst="rect">
+            <a:avLst/>
+          </a:prstGeom>
+          <a:solidFill>
+            <a:schemeClr val="bg2"/>
+          </a:solidFill>
+          <a:ln>
+            <a:solidFill>
+              <a:schemeClr val="tx1"/>
+            </a:solidFill>
+          </a:ln>
+        </p:spPr>
+        <p:txBody>
+          <a:bodyPr wrap="square">
+            <a:spAutoFit/>
+          </a:bodyPr>
+          <a:lstStyle/>
+          <a:p>
+            <a:pPr algn="just"/>
+            <a:r>
+              <a:rPr lang="ru-RU" dirty="0" err="1" smtClean="0">
+                <a:latin typeface="Times New Roman" pitchFamily="18" charset="0"/>
+                <a:cs typeface="Times New Roman" pitchFamily="18" charset="0"/>
+              </a:rPr>
+              <a:t>JavaScript</a:t>
+            </a:r>
+            <a:r>
+              <a:rPr lang="ru-RU" dirty="0" smtClean="0">
+                <a:latin typeface="Times New Roman" pitchFamily="18" charset="0"/>
+                <a:cs typeface="Times New Roman" pitchFamily="18" charset="0"/>
+              </a:rPr>
+              <a:t> обеспечивает взаимодействие с пользователем. Важной особенностью этого языка является реализованная в нем возможность определять обработчики событий — произвольные порции кода, которые выполняются при наступлении конкретных событий (обычно действий пользователя). </a:t>
+            </a:r>
+            <a:r>
+              <a:rPr lang="ru-RU" dirty="0" err="1" smtClean="0">
+                <a:latin typeface="Times New Roman" pitchFamily="18" charset="0"/>
+                <a:cs typeface="Times New Roman" pitchFamily="18" charset="0"/>
+              </a:rPr>
+              <a:t>JavaScript</a:t>
+            </a:r>
+            <a:r>
+              <a:rPr lang="ru-RU" dirty="0" smtClean="0">
+                <a:latin typeface="Times New Roman" pitchFamily="18" charset="0"/>
+                <a:cs typeface="Times New Roman" pitchFamily="18" charset="0"/>
+              </a:rPr>
+              <a:t> позволяет использовать в качестве обработчиков событий любые новые предварительно заданные функции. Например, можно написать программу, которая выведет в строке состояния специальное сообщение, если пользователь установит указатель "мыши" на гипертекстовую ссылку, или выведет на экран диалоговое окно с запросом на подтверждение выполнения некоторого действия.</a:t>
+            </a:r>
+            <a:endParaRPr lang="ru-RU" dirty="0">
+              <a:latin typeface="Times New Roman" pitchFamily="18" charset="0"/>
+              <a:cs typeface="Times New Roman" pitchFamily="18" charset="0"/>
+            </a:endParaRPr>
+          </a:p>
+        </p:txBody>
+      </p:sp>
+      <p:pic>
+        <p:nvPicPr>
+          <p:cNvPr id="4098" name="Picture 2"/>
+          <p:cNvPicPr>
+            <a:picLocks noChangeAspect="1" noChangeArrowheads="1"/>
+          </p:cNvPicPr>
+          <p:nvPr/>
+        </p:nvPicPr>
+        <p:blipFill>
+          <a:blip r:embed="rId2" cstate="print"/>
+          <a:srcRect/>
+          <a:stretch>
+            <a:fillRect/>
+          </a:stretch>
+        </p:blipFill>
+        <p:spPr bwMode="auto">
+          <a:xfrm>
+            <a:off x="1766298" y="2357430"/>
+            <a:ext cx="5734660" cy="2071702"/>
+          </a:xfrm>
+          <a:prstGeom prst="rect">
+            <a:avLst/>
+          </a:prstGeom>
+          <a:noFill/>
+          <a:ln w="9525">
+            <a:noFill/>
+            <a:miter lim="800000"/>
+            <a:headEnd/>
+            <a:tailEnd/>
+          </a:ln>
+          <a:effectLst/>
+        </p:spPr>
+      </p:pic>
+    </p:spTree>
+  </p:cSld>
+  <p:clrMapOvr>
+    <a:masterClrMapping/>
+  </p:clrMapOvr>
+</p:sld>
+</file>
+
+<file path=ppt/slides/slide30.xml><?xml version="1.0" encoding="utf-8"?>
+<p:sld xmlns:a="http://schemas.openxmlformats.org/drawingml/2006/main" xmlns:r="http://schemas.openxmlformats.org/officeDocument/2006/relationships" xmlns:p="http://schemas.openxmlformats.org/presentationml/2006/main">
+  <p:cSld>
+    <p:spTree>
+      <p:nvGrpSpPr>
+        <p:cNvPr id="1" name=""/>
+        <p:cNvGrpSpPr/>
+        <p:nvPr/>
+      </p:nvGrpSpPr>
+      <p:grpSpPr>
+        <a:xfrm>
+          <a:off x="0" y="0"/>
+          <a:ext cx="0" cy="0"/>
+          <a:chOff x="0" y="0"/>
+          <a:chExt cx="0" cy="0"/>
+        </a:xfrm>
+      </p:grpSpPr>
+      <p:sp>
+        <p:nvSpPr>
+          <p:cNvPr id="2" name="Заголовок 1"/>
+          <p:cNvSpPr>
+            <a:spLocks noGrp="1"/>
+          </p:cNvSpPr>
+          <p:nvPr>
+            <p:ph type="title"/>
+          </p:nvPr>
+        </p:nvSpPr>
+        <p:spPr>
+          <a:xfrm>
+            <a:off x="500034" y="-285776"/>
+            <a:ext cx="8229600" cy="1143000"/>
+          </a:xfrm>
+        </p:spPr>
+        <p:txBody>
+          <a:bodyPr/>
+          <a:lstStyle/>
+          <a:p>
+            <a:r>
+              <a:rPr lang="en-US" b="1" dirty="0" smtClean="0"/>
+              <a:t>Email Templates</a:t>
+            </a:r>
+          </a:p>
+        </p:txBody>
+      </p:sp>
+      <p:pic>
+        <p:nvPicPr>
+          <p:cNvPr id="23555" name="Picture 3"/>
+          <p:cNvPicPr>
+            <a:picLocks noChangeAspect="1" noChangeArrowheads="1"/>
+          </p:cNvPicPr>
+          <p:nvPr/>
+        </p:nvPicPr>
+        <p:blipFill>
+          <a:blip r:embed="rId2"/>
+          <a:srcRect/>
+          <a:stretch>
+            <a:fillRect/>
+          </a:stretch>
+        </p:blipFill>
+        <p:spPr bwMode="auto">
+          <a:xfrm>
+            <a:off x="0" y="2000240"/>
+            <a:ext cx="9144000" cy="4714875"/>
+          </a:xfrm>
+          <a:prstGeom prst="rect">
+            <a:avLst/>
+          </a:prstGeom>
+          <a:noFill/>
+          <a:ln w="9525">
+            <a:noFill/>
+            <a:miter lim="800000"/>
+            <a:headEnd/>
+            <a:tailEnd/>
+          </a:ln>
+          <a:effectLst/>
+        </p:spPr>
+      </p:pic>
+      <p:cxnSp>
+        <p:nvCxnSpPr>
+          <p:cNvPr id="10" name="Прямая со стрелкой 9"/>
+          <p:cNvCxnSpPr/>
+          <p:nvPr/>
+        </p:nvCxnSpPr>
+        <p:spPr>
+          <a:xfrm rot="10800000">
+            <a:off x="1500166" y="5786454"/>
+            <a:ext cx="1643074" cy="142876"/>
+          </a:xfrm>
+          <a:prstGeom prst="straightConnector1">
+            <a:avLst/>
+          </a:prstGeom>
+          <a:ln w="25400">
+            <a:solidFill>
+              <a:srgbClr val="FF0000"/>
+            </a:solidFill>
+            <a:tailEnd type="arrow"/>
+          </a:ln>
+        </p:spPr>
+        <p:style>
+          <a:lnRef idx="1">
+            <a:schemeClr val="accent1"/>
+          </a:lnRef>
+          <a:fillRef idx="0">
+            <a:schemeClr val="accent1"/>
+          </a:fillRef>
+          <a:effectRef idx="0">
+            <a:schemeClr val="accent1"/>
+          </a:effectRef>
+          <a:fontRef idx="minor">
+            <a:schemeClr val="tx1"/>
+          </a:fontRef>
+        </p:style>
+      </p:cxnSp>
+      <p:sp>
+        <p:nvSpPr>
+          <p:cNvPr id="14" name="Прямоугольник 13"/>
+          <p:cNvSpPr/>
+          <p:nvPr/>
+        </p:nvSpPr>
+        <p:spPr>
+          <a:xfrm>
+            <a:off x="3143240" y="5715016"/>
+            <a:ext cx="6000760" cy="369332"/>
+          </a:xfrm>
+          <a:prstGeom prst="rect">
+            <a:avLst/>
+          </a:prstGeom>
+        </p:spPr>
+        <p:txBody>
+          <a:bodyPr wrap="square">
+            <a:spAutoFit/>
+          </a:bodyPr>
+          <a:lstStyle/>
+          <a:p>
+            <a:r>
+              <a:rPr lang="ru-RU" b="1" dirty="0" smtClean="0">
+                <a:latin typeface="Times New Roman" pitchFamily="18" charset="0"/>
+                <a:cs typeface="Times New Roman" pitchFamily="18" charset="0"/>
+              </a:rPr>
+              <a:t>Писать нужно также, какое значение </a:t>
+            </a:r>
+            <a:r>
+              <a:rPr lang="en-US" b="1" dirty="0" smtClean="0">
+                <a:latin typeface="Times New Roman" pitchFamily="18" charset="0"/>
+                <a:cs typeface="Times New Roman" pitchFamily="18" charset="0"/>
+              </a:rPr>
+              <a:t>name </a:t>
+            </a:r>
+            <a:r>
+              <a:rPr lang="ru-RU" b="1" dirty="0" smtClean="0">
+                <a:latin typeface="Times New Roman" pitchFamily="18" charset="0"/>
+                <a:cs typeface="Times New Roman" pitchFamily="18" charset="0"/>
+              </a:rPr>
+              <a:t>у поля </a:t>
+            </a:r>
+            <a:r>
+              <a:rPr lang="en-US" b="1" dirty="0" smtClean="0">
+                <a:latin typeface="Times New Roman" pitchFamily="18" charset="0"/>
+                <a:cs typeface="Times New Roman" pitchFamily="18" charset="0"/>
+              </a:rPr>
+              <a:t>input</a:t>
+            </a:r>
+            <a:r>
+              <a:rPr lang="ru-RU" b="1" dirty="0" smtClean="0">
+                <a:latin typeface="Times New Roman" pitchFamily="18" charset="0"/>
+                <a:cs typeface="Times New Roman" pitchFamily="18" charset="0"/>
+              </a:rPr>
+              <a:t> </a:t>
+            </a:r>
+            <a:endParaRPr lang="ru-RU" dirty="0"/>
+          </a:p>
+        </p:txBody>
+      </p:sp>
+      <p:pic>
+        <p:nvPicPr>
+          <p:cNvPr id="23556" name="Picture 4"/>
+          <p:cNvPicPr>
+            <a:picLocks noChangeAspect="1" noChangeArrowheads="1"/>
+          </p:cNvPicPr>
+          <p:nvPr/>
+        </p:nvPicPr>
+        <p:blipFill>
+          <a:blip r:embed="rId3"/>
+          <a:srcRect/>
+          <a:stretch>
+            <a:fillRect/>
+          </a:stretch>
+        </p:blipFill>
+        <p:spPr bwMode="auto">
+          <a:xfrm>
+            <a:off x="1666875" y="6372249"/>
+            <a:ext cx="7477125" cy="485775"/>
+          </a:xfrm>
+          <a:prstGeom prst="rect">
+            <a:avLst/>
+          </a:prstGeom>
+          <a:noFill/>
+          <a:ln w="9525">
+            <a:noFill/>
+            <a:miter lim="800000"/>
+            <a:headEnd/>
+            <a:tailEnd/>
+          </a:ln>
+          <a:effectLst/>
+        </p:spPr>
+      </p:pic>
+      <p:cxnSp>
+        <p:nvCxnSpPr>
+          <p:cNvPr id="7" name="Прямая со стрелкой 6"/>
+          <p:cNvCxnSpPr>
+            <a:stCxn id="14" idx="2"/>
+          </p:cNvCxnSpPr>
+          <p:nvPr/>
+        </p:nvCxnSpPr>
+        <p:spPr>
+          <a:xfrm rot="16200000" flipH="1">
+            <a:off x="6435451" y="5792517"/>
+            <a:ext cx="416486" cy="1000148"/>
+          </a:xfrm>
+          <a:prstGeom prst="straightConnector1">
+            <a:avLst/>
+          </a:prstGeom>
+          <a:ln w="25400">
+            <a:solidFill>
+              <a:srgbClr val="FF0000"/>
+            </a:solidFill>
+            <a:tailEnd type="arrow"/>
+          </a:ln>
+        </p:spPr>
+        <p:style>
+          <a:lnRef idx="1">
+            <a:schemeClr val="accent1"/>
+          </a:lnRef>
+          <a:fillRef idx="0">
+            <a:schemeClr val="accent1"/>
+          </a:fillRef>
+          <a:effectRef idx="0">
+            <a:schemeClr val="accent1"/>
+          </a:effectRef>
+          <a:fontRef idx="minor">
+            <a:schemeClr val="tx1"/>
+          </a:fontRef>
+        </p:style>
+      </p:cxnSp>
+      <p:sp>
+        <p:nvSpPr>
+          <p:cNvPr id="12" name="Прямоугольник 11"/>
+          <p:cNvSpPr/>
+          <p:nvPr/>
+        </p:nvSpPr>
+        <p:spPr>
+          <a:xfrm>
+            <a:off x="0" y="500042"/>
+            <a:ext cx="9144000" cy="1569660"/>
+          </a:xfrm>
+          <a:prstGeom prst="rect">
+            <a:avLst/>
+          </a:prstGeom>
+          <a:solidFill>
+            <a:schemeClr val="accent3">
+              <a:lumMod val="20000"/>
+              <a:lumOff val="80000"/>
+            </a:schemeClr>
+          </a:solidFill>
+        </p:spPr>
+        <p:txBody>
+          <a:bodyPr wrap="square">
+            <a:spAutoFit/>
+          </a:bodyPr>
+          <a:lstStyle/>
+          <a:p>
+            <a:pPr algn="just"/>
+            <a:r>
+              <a:rPr lang="ru-RU" sz="1600" b="1" dirty="0" err="1" smtClean="0">
+                <a:latin typeface="Times New Roman" pitchFamily="18" charset="0"/>
+                <a:cs typeface="Times New Roman" pitchFamily="18" charset="0"/>
+              </a:rPr>
+              <a:t>Email</a:t>
+            </a:r>
+            <a:r>
+              <a:rPr lang="ru-RU" sz="1600" b="1" dirty="0" smtClean="0">
+                <a:latin typeface="Times New Roman" pitchFamily="18" charset="0"/>
+                <a:cs typeface="Times New Roman" pitchFamily="18" charset="0"/>
+              </a:rPr>
+              <a:t> </a:t>
+            </a:r>
+            <a:r>
+              <a:rPr lang="ru-RU" sz="1600" b="1" dirty="0" err="1" smtClean="0">
+                <a:latin typeface="Times New Roman" pitchFamily="18" charset="0"/>
+                <a:cs typeface="Times New Roman" pitchFamily="18" charset="0"/>
+              </a:rPr>
+              <a:t>Templates</a:t>
+            </a:r>
+            <a:r>
+              <a:rPr lang="ru-RU" sz="1600" dirty="0" smtClean="0">
+                <a:latin typeface="Times New Roman" pitchFamily="18" charset="0"/>
+                <a:cs typeface="Times New Roman" pitchFamily="18" charset="0"/>
+              </a:rPr>
+              <a:t> — раздел создания шаблонов электронных писем в </a:t>
+            </a:r>
+            <a:r>
+              <a:rPr lang="ru-RU" sz="1600" dirty="0" err="1" smtClean="0">
+                <a:latin typeface="Times New Roman" pitchFamily="18" charset="0"/>
+                <a:cs typeface="Times New Roman" pitchFamily="18" charset="0"/>
+              </a:rPr>
+              <a:t>EmailJS</a:t>
+            </a:r>
+            <a:r>
+              <a:rPr lang="ru-RU" sz="1600" dirty="0" smtClean="0">
+                <a:latin typeface="Times New Roman" pitchFamily="18" charset="0"/>
+                <a:cs typeface="Times New Roman" pitchFamily="18" charset="0"/>
+              </a:rPr>
+              <a:t>. Создание шаблона позволяет динамически настраивать макет и содержание писем. Чтобы создать шаблон, нужно:</a:t>
+            </a:r>
+          </a:p>
+          <a:p>
+            <a:pPr algn="just"/>
+            <a:r>
+              <a:rPr lang="ru-RU" sz="1600" dirty="0" smtClean="0">
+                <a:latin typeface="Times New Roman" pitchFamily="18" charset="0"/>
+                <a:cs typeface="Times New Roman" pitchFamily="18" charset="0"/>
+              </a:rPr>
+              <a:t>Перейти в раздел «</a:t>
+            </a:r>
+            <a:r>
+              <a:rPr lang="ru-RU" sz="1600" dirty="0" err="1" smtClean="0">
+                <a:latin typeface="Times New Roman" pitchFamily="18" charset="0"/>
+                <a:cs typeface="Times New Roman" pitchFamily="18" charset="0"/>
+              </a:rPr>
+              <a:t>Email</a:t>
+            </a:r>
+            <a:r>
+              <a:rPr lang="ru-RU" sz="1600" dirty="0" smtClean="0">
+                <a:latin typeface="Times New Roman" pitchFamily="18" charset="0"/>
+                <a:cs typeface="Times New Roman" pitchFamily="18" charset="0"/>
+              </a:rPr>
+              <a:t> </a:t>
+            </a:r>
+            <a:r>
+              <a:rPr lang="ru-RU" sz="1600" dirty="0" err="1" smtClean="0">
+                <a:latin typeface="Times New Roman" pitchFamily="18" charset="0"/>
+                <a:cs typeface="Times New Roman" pitchFamily="18" charset="0"/>
+              </a:rPr>
+              <a:t>Templates</a:t>
+            </a:r>
+            <a:r>
+              <a:rPr lang="ru-RU" sz="1600" dirty="0" smtClean="0">
+                <a:latin typeface="Times New Roman" pitchFamily="18" charset="0"/>
+                <a:cs typeface="Times New Roman" pitchFamily="18" charset="0"/>
+              </a:rPr>
+              <a:t>».</a:t>
+            </a:r>
+          </a:p>
+          <a:p>
+            <a:pPr algn="just"/>
+            <a:r>
+              <a:rPr lang="ru-RU" sz="1600" dirty="0" smtClean="0">
+                <a:latin typeface="Times New Roman" pitchFamily="18" charset="0"/>
+                <a:cs typeface="Times New Roman" pitchFamily="18" charset="0"/>
+              </a:rPr>
+              <a:t>Нажать «Создать новый шаблон».</a:t>
+            </a:r>
+          </a:p>
+          <a:p>
+            <a:pPr algn="just"/>
+            <a:r>
+              <a:rPr lang="ru-RU" sz="1600" dirty="0" smtClean="0">
+                <a:latin typeface="Times New Roman" pitchFamily="18" charset="0"/>
+                <a:cs typeface="Times New Roman" pitchFamily="18" charset="0"/>
+              </a:rPr>
+              <a:t>Использовать редактор шаблонов для форматирования тела письма и установки </a:t>
+            </a:r>
+            <a:r>
+              <a:rPr lang="ru-RU" sz="1600" dirty="0" err="1" smtClean="0">
+                <a:latin typeface="Times New Roman" pitchFamily="18" charset="0"/>
+                <a:cs typeface="Times New Roman" pitchFamily="18" charset="0"/>
+              </a:rPr>
+              <a:t>местозаполнителей</a:t>
+            </a:r>
+            <a:r>
+              <a:rPr lang="ru-RU" sz="1600" dirty="0" smtClean="0">
+                <a:latin typeface="Times New Roman" pitchFamily="18" charset="0"/>
+                <a:cs typeface="Times New Roman" pitchFamily="18" charset="0"/>
+              </a:rPr>
+              <a:t> для динамических данных.</a:t>
+            </a:r>
+            <a:endParaRPr lang="ru-RU" sz="1600" dirty="0">
+              <a:latin typeface="Times New Roman" pitchFamily="18" charset="0"/>
+              <a:cs typeface="Times New Roman" pitchFamily="18" charset="0"/>
+            </a:endParaRPr>
+          </a:p>
+        </p:txBody>
+      </p:sp>
+    </p:spTree>
+  </p:cSld>
+  <p:clrMapOvr>
+    <a:masterClrMapping/>
+  </p:clrMapOvr>
+</p:sld>
+</file>
+
+<file path=ppt/slides/slide31.xml><?xml version="1.0" encoding="utf-8"?>
+<p:sld xmlns:a="http://schemas.openxmlformats.org/drawingml/2006/main" xmlns:r="http://schemas.openxmlformats.org/officeDocument/2006/relationships" xmlns:p="http://schemas.openxmlformats.org/presentationml/2006/main">
+  <p:cSld>
+    <p:spTree>
+      <p:nvGrpSpPr>
+        <p:cNvPr id="1" name=""/>
+        <p:cNvGrpSpPr/>
+        <p:nvPr/>
+      </p:nvGrpSpPr>
+      <p:grpSpPr>
+        <a:xfrm>
+          <a:off x="0" y="0"/>
+          <a:ext cx="0" cy="0"/>
+          <a:chOff x="0" y="0"/>
+          <a:chExt cx="0" cy="0"/>
+        </a:xfrm>
+      </p:grpSpPr>
+      <p:sp>
+        <p:nvSpPr>
+          <p:cNvPr id="2" name="Заголовок 1"/>
+          <p:cNvSpPr>
+            <a:spLocks noGrp="1"/>
+          </p:cNvSpPr>
+          <p:nvPr>
+            <p:ph type="title"/>
+          </p:nvPr>
+        </p:nvSpPr>
+        <p:spPr>
+          <a:xfrm>
+            <a:off x="500034" y="-285776"/>
+            <a:ext cx="8229600" cy="1143000"/>
+          </a:xfrm>
+        </p:spPr>
+        <p:txBody>
+          <a:bodyPr/>
+          <a:lstStyle/>
+          <a:p>
+            <a:r>
               <a:rPr lang="ru-RU" b="1" dirty="0" err="1" smtClean="0"/>
               <a:t>Скрипт</a:t>
             </a:r>
@@ -9980,242 +11174,6 @@
 </p:sld>
 </file>
 
-<file path=ppt/slides/slide3.xml><?xml version="1.0" encoding="utf-8"?>
-<p:sld xmlns:a="http://schemas.openxmlformats.org/drawingml/2006/main" xmlns:r="http://schemas.openxmlformats.org/officeDocument/2006/relationships" xmlns:p="http://schemas.openxmlformats.org/presentationml/2006/main">
-  <p:cSld>
-    <p:spTree>
-      <p:nvGrpSpPr>
-        <p:cNvPr id="1" name=""/>
-        <p:cNvGrpSpPr/>
-        <p:nvPr/>
-      </p:nvGrpSpPr>
-      <p:grpSpPr>
-        <a:xfrm>
-          <a:off x="0" y="0"/>
-          <a:ext cx="0" cy="0"/>
-          <a:chOff x="0" y="0"/>
-          <a:chExt cx="0" cy="0"/>
-        </a:xfrm>
-      </p:grpSpPr>
-      <p:sp>
-        <p:nvSpPr>
-          <p:cNvPr id="2" name="Заголовок 1"/>
-          <p:cNvSpPr>
-            <a:spLocks noGrp="1"/>
-          </p:cNvSpPr>
-          <p:nvPr>
-            <p:ph type="title"/>
-          </p:nvPr>
-        </p:nvSpPr>
-        <p:spPr>
-          <a:xfrm>
-            <a:off x="500034" y="-214338"/>
-            <a:ext cx="8229600" cy="1143000"/>
-          </a:xfrm>
-        </p:spPr>
-        <p:txBody>
-          <a:bodyPr>
-            <a:normAutofit/>
-          </a:bodyPr>
-          <a:lstStyle/>
-          <a:p>
-            <a:r>
-              <a:rPr lang="en-US" sz="4000" b="1" dirty="0" smtClean="0"/>
-              <a:t>JavaScript</a:t>
-            </a:r>
-            <a:endParaRPr lang="ru-RU" sz="4000" b="1" dirty="0"/>
-          </a:p>
-        </p:txBody>
-      </p:sp>
-      <p:sp>
-        <p:nvSpPr>
-          <p:cNvPr id="6" name="Прямоугольник 5"/>
-          <p:cNvSpPr/>
-          <p:nvPr/>
-        </p:nvSpPr>
-        <p:spPr>
-          <a:xfrm>
-            <a:off x="0" y="571480"/>
-            <a:ext cx="9144000" cy="1754326"/>
-          </a:xfrm>
-          <a:prstGeom prst="rect">
-            <a:avLst/>
-          </a:prstGeom>
-          <a:solidFill>
-            <a:schemeClr val="accent3">
-              <a:lumMod val="20000"/>
-              <a:lumOff val="80000"/>
-            </a:schemeClr>
-          </a:solidFill>
-          <a:ln>
-            <a:noFill/>
-          </a:ln>
-        </p:spPr>
-        <p:txBody>
-          <a:bodyPr wrap="square">
-            <a:spAutoFit/>
-          </a:bodyPr>
-          <a:lstStyle/>
-          <a:p>
-            <a:pPr algn="just"/>
-            <a:r>
-              <a:rPr lang="ru-RU" dirty="0" smtClean="0">
-                <a:latin typeface="Times New Roman" pitchFamily="18" charset="0"/>
-                <a:cs typeface="Times New Roman" pitchFamily="18" charset="0"/>
-              </a:rPr>
-              <a:t>Для создания программ на </a:t>
-            </a:r>
-            <a:r>
-              <a:rPr lang="ru-RU" dirty="0" err="1" smtClean="0">
-                <a:latin typeface="Times New Roman" pitchFamily="18" charset="0"/>
-                <a:cs typeface="Times New Roman" pitchFamily="18" charset="0"/>
-              </a:rPr>
-              <a:t>JavaScript</a:t>
-            </a:r>
-            <a:r>
-              <a:rPr lang="ru-RU" dirty="0" smtClean="0">
-                <a:latin typeface="Times New Roman" pitchFamily="18" charset="0"/>
-                <a:cs typeface="Times New Roman" pitchFamily="18" charset="0"/>
-              </a:rPr>
-              <a:t> не требуется никаких дополнительных средств— необходим лишь браузер, поддерживающий язык </a:t>
-            </a:r>
-            <a:r>
-              <a:rPr lang="ru-RU" dirty="0" err="1" smtClean="0">
-                <a:latin typeface="Times New Roman" pitchFamily="18" charset="0"/>
-                <a:cs typeface="Times New Roman" pitchFamily="18" charset="0"/>
-              </a:rPr>
-              <a:t>JavaScript</a:t>
-            </a:r>
-            <a:r>
-              <a:rPr lang="ru-RU" dirty="0" smtClean="0">
-                <a:latin typeface="Times New Roman" pitchFamily="18" charset="0"/>
-                <a:cs typeface="Times New Roman" pitchFamily="18" charset="0"/>
-              </a:rPr>
-              <a:t> соответствующей версии и текстовый редактор, позволяющий создавать HTML-документы. Так как программа на </a:t>
-            </a:r>
-            <a:r>
-              <a:rPr lang="ru-RU" dirty="0" err="1" smtClean="0">
-                <a:latin typeface="Times New Roman" pitchFamily="18" charset="0"/>
-                <a:cs typeface="Times New Roman" pitchFamily="18" charset="0"/>
-              </a:rPr>
-              <a:t>JavaScript</a:t>
-            </a:r>
-            <a:r>
-              <a:rPr lang="ru-RU" dirty="0" smtClean="0">
-                <a:latin typeface="Times New Roman" pitchFamily="18" charset="0"/>
-                <a:cs typeface="Times New Roman" pitchFamily="18" charset="0"/>
-              </a:rPr>
-              <a:t> встраивается непосредственно в текст HTML-документа, вы можете немедленно увидеть результаты своей работы во время просмотра документа браузером и при необходимости внести изменения.</a:t>
-            </a:r>
-          </a:p>
-        </p:txBody>
-      </p:sp>
-      <p:sp>
-        <p:nvSpPr>
-          <p:cNvPr id="7" name="Прямоугольник 6"/>
-          <p:cNvSpPr/>
-          <p:nvPr/>
-        </p:nvSpPr>
-        <p:spPr>
-          <a:xfrm>
-            <a:off x="0" y="4549676"/>
-            <a:ext cx="9144000" cy="2308324"/>
-          </a:xfrm>
-          <a:prstGeom prst="rect">
-            <a:avLst/>
-          </a:prstGeom>
-          <a:solidFill>
-            <a:schemeClr val="bg2"/>
-          </a:solidFill>
-          <a:ln>
-            <a:solidFill>
-              <a:schemeClr val="tx1"/>
-            </a:solidFill>
-          </a:ln>
-        </p:spPr>
-        <p:txBody>
-          <a:bodyPr wrap="square">
-            <a:spAutoFit/>
-          </a:bodyPr>
-          <a:lstStyle/>
-          <a:p>
-            <a:pPr algn="just"/>
-            <a:r>
-              <a:rPr lang="ru-RU" dirty="0" err="1" smtClean="0">
-                <a:latin typeface="Times New Roman" pitchFamily="18" charset="0"/>
-                <a:cs typeface="Times New Roman" pitchFamily="18" charset="0"/>
-              </a:rPr>
-              <a:t>JavaScript</a:t>
-            </a:r>
-            <a:r>
-              <a:rPr lang="ru-RU" dirty="0" smtClean="0">
-                <a:latin typeface="Times New Roman" pitchFamily="18" charset="0"/>
-                <a:cs typeface="Times New Roman" pitchFamily="18" charset="0"/>
-              </a:rPr>
-              <a:t> обеспечивает взаимодействие с пользователем. Важной особенностью этого языка является реализованная в нем возможность определять обработчики событий — произвольные порции кода, которые выполняются при наступлении конкретных событий (обычно действий пользователя). </a:t>
-            </a:r>
-            <a:r>
-              <a:rPr lang="ru-RU" dirty="0" err="1" smtClean="0">
-                <a:latin typeface="Times New Roman" pitchFamily="18" charset="0"/>
-                <a:cs typeface="Times New Roman" pitchFamily="18" charset="0"/>
-              </a:rPr>
-              <a:t>JavaScript</a:t>
-            </a:r>
-            <a:r>
-              <a:rPr lang="ru-RU" dirty="0" smtClean="0">
-                <a:latin typeface="Times New Roman" pitchFamily="18" charset="0"/>
-                <a:cs typeface="Times New Roman" pitchFamily="18" charset="0"/>
-              </a:rPr>
-              <a:t> позволяет использовать в качестве обработчиков событий любые новые предварительно заданные функции. Например, можно написать программу, которая выведет в строке состояния специальное сообщение, если пользователь установит указатель "мыши" на гипертекстовую ссылку, или выведет на экран диалоговое окно с запросом на подтверждение выполнения некоторого действия.</a:t>
-            </a:r>
-            <a:endParaRPr lang="ru-RU" dirty="0">
-              <a:latin typeface="Times New Roman" pitchFamily="18" charset="0"/>
-              <a:cs typeface="Times New Roman" pitchFamily="18" charset="0"/>
-            </a:endParaRPr>
-          </a:p>
-        </p:txBody>
-      </p:sp>
-      <p:pic>
-        <p:nvPicPr>
-          <p:cNvPr id="4098" name="Picture 2"/>
-          <p:cNvPicPr>
-            <a:picLocks noChangeAspect="1" noChangeArrowheads="1"/>
-          </p:cNvPicPr>
-          <p:nvPr/>
-        </p:nvPicPr>
-        <p:blipFill>
-          <a:blip r:embed="rId2" cstate="print"/>
-          <a:srcRect/>
-          <a:stretch>
-            <a:fillRect/>
-          </a:stretch>
-        </p:blipFill>
-        <p:spPr bwMode="auto">
-          <a:xfrm>
-            <a:off x="1766298" y="2357430"/>
-            <a:ext cx="5734660" cy="2071702"/>
-          </a:xfrm>
-          <a:prstGeom prst="rect">
-            <a:avLst/>
-          </a:prstGeom>
-          <a:noFill/>
-          <a:ln w="9525">
-            <a:noFill/>
-            <a:miter lim="800000"/>
-            <a:headEnd/>
-            <a:tailEnd/>
-          </a:ln>
-          <a:effectLst/>
-        </p:spPr>
-      </p:pic>
-    </p:spTree>
-  </p:cSld>
-  <p:clrMapOvr>
-    <a:masterClrMapping/>
-  </p:clrMapOvr>
-</p:sld>
-</file>
-
 <file path=ppt/slides/slide4.xml><?xml version="1.0" encoding="utf-8"?>
 <p:sld xmlns:a="http://schemas.openxmlformats.org/drawingml/2006/main" xmlns:r="http://schemas.openxmlformats.org/officeDocument/2006/relationships" xmlns:p="http://schemas.openxmlformats.org/presentationml/2006/main">
   <p:cSld>
@@ -10257,11 +11215,7 @@
           <a:p>
             <a:r>
               <a:rPr lang="ru-RU" dirty="0" smtClean="0"/>
-              <a:t>Задание 1</a:t>
-            </a:r>
-            <a:r>
-              <a:rPr lang="ru-RU" dirty="0" smtClean="0"/>
-              <a:t>. Внедрение готовых элементов</a:t>
+              <a:t>Задание 1. Внедрение готовых элементов</a:t>
             </a:r>
             <a:endParaRPr lang="ru-RU" dirty="0"/>
           </a:p>
@@ -10586,14 +11540,7 @@
                 <a:latin typeface="Times New Roman" pitchFamily="18" charset="0"/>
                 <a:cs typeface="Times New Roman" pitchFamily="18" charset="0"/>
               </a:rPr>
-              <a:t>используется, например, </a:t>
-            </a:r>
-            <a:r>
-              <a:rPr lang="ru-RU" dirty="0" smtClean="0">
-                <a:latin typeface="Times New Roman" pitchFamily="18" charset="0"/>
-                <a:cs typeface="Times New Roman" pitchFamily="18" charset="0"/>
-              </a:rPr>
-              <a:t>для создания таймеров обратного отсчёта — виртуальных часов, которые ведут обратный отсчёт от определённой даты (времени) до нуля. Такие таймеры помогают указать начало (или конец) события, например, на </a:t>
+              <a:t>используется, например, для создания таймеров обратного отсчёта — виртуальных часов, которые ведут обратный отсчёт от определённой даты (времени) до нуля. Такие таймеры помогают указать начало (или конец) события, например, на </a:t>
             </a:r>
             <a:r>
               <a:rPr lang="ru-RU" dirty="0" err="1" smtClean="0">
